--- a/Lectures/05.AE/Lecture_AE.pptx
+++ b/Lectures/05.AE/Lecture_AE.pptx
@@ -5,29 +5,34 @@
     <p:sldMasterId id="2147483648" r:id="rId1"/>
   </p:sldMasterIdLst>
   <p:notesMasterIdLst>
-    <p:notesMasterId r:id="rId19"/>
+    <p:notesMasterId r:id="rId24"/>
   </p:notesMasterIdLst>
   <p:handoutMasterIdLst>
-    <p:handoutMasterId r:id="rId20"/>
+    <p:handoutMasterId r:id="rId25"/>
   </p:handoutMasterIdLst>
   <p:sldIdLst>
     <p:sldId id="256" r:id="rId2"/>
     <p:sldId id="1055" r:id="rId3"/>
     <p:sldId id="1083" r:id="rId4"/>
     <p:sldId id="1084" r:id="rId5"/>
-    <p:sldId id="1081" r:id="rId6"/>
-    <p:sldId id="1057" r:id="rId7"/>
-    <p:sldId id="1092" r:id="rId8"/>
+    <p:sldId id="1056" r:id="rId6"/>
+    <p:sldId id="1085" r:id="rId7"/>
+    <p:sldId id="1099" r:id="rId8"/>
     <p:sldId id="1067" r:id="rId9"/>
-    <p:sldId id="1056" r:id="rId10"/>
-    <p:sldId id="1085" r:id="rId11"/>
-    <p:sldId id="1093" r:id="rId12"/>
+    <p:sldId id="1081" r:id="rId10"/>
+    <p:sldId id="1057" r:id="rId11"/>
+    <p:sldId id="1092" r:id="rId12"/>
     <p:sldId id="1091" r:id="rId13"/>
     <p:sldId id="1094" r:id="rId14"/>
     <p:sldId id="1096" r:id="rId15"/>
     <p:sldId id="1097" r:id="rId16"/>
     <p:sldId id="1098" r:id="rId17"/>
-    <p:sldId id="1088" r:id="rId18"/>
+    <p:sldId id="1100" r:id="rId18"/>
+    <p:sldId id="1101" r:id="rId19"/>
+    <p:sldId id="1102" r:id="rId20"/>
+    <p:sldId id="1103" r:id="rId21"/>
+    <p:sldId id="1104" r:id="rId22"/>
+    <p:sldId id="1088" r:id="rId23"/>
   </p:sldIdLst>
   <p:sldSz cx="9144000" cy="6858000" type="letter"/>
   <p:notesSz cx="9601200" cy="7315200"/>
@@ -2965,7 +2970,7 @@
         <p:cNvPr id="1" name="">
           <a:extLst>
             <a:ext uri="{FF2B5EF4-FFF2-40B4-BE49-F238E27FC236}">
-              <a16:creationId xmlns:a16="http://schemas.microsoft.com/office/drawing/2014/main" id="{E1D59C08-41B8-A2D2-647E-DE2B2B9B8F0E}"/>
+              <a16:creationId xmlns:a16="http://schemas.microsoft.com/office/drawing/2014/main" id="{9359C3DA-9A08-64E3-0E07-5972302829E4}"/>
             </a:ext>
           </a:extLst>
         </p:cNvPr>
@@ -2985,7 +2990,7 @@
           <p:cNvPr id="7" name="Title 6">
             <a:extLst>
               <a:ext uri="{FF2B5EF4-FFF2-40B4-BE49-F238E27FC236}">
-                <a16:creationId xmlns:a16="http://schemas.microsoft.com/office/drawing/2014/main" id="{9ACFEAEC-5075-C633-6D8C-1AEC17C0C3E1}"/>
+                <a16:creationId xmlns:a16="http://schemas.microsoft.com/office/drawing/2014/main" id="{EB9EC33A-50BA-E6E2-8666-32CD6A416E57}"/>
               </a:ext>
             </a:extLst>
           </p:cNvPr>
@@ -3013,670 +3018,170 @@
           </a:p>
         </p:txBody>
       </p:sp>
-      <mc:AlternateContent xmlns:mc="http://schemas.openxmlformats.org/markup-compatibility/2006" xmlns:a14="http://schemas.microsoft.com/office/drawing/2010/main">
-        <mc:Choice Requires="a14">
-          <p:sp>
-            <p:nvSpPr>
-              <p:cNvPr id="8" name="Content Placeholder 7">
-                <a:extLst>
-                  <a:ext uri="{FF2B5EF4-FFF2-40B4-BE49-F238E27FC236}">
-                    <a16:creationId xmlns:a16="http://schemas.microsoft.com/office/drawing/2014/main" id="{643F5EAD-1EF0-251F-2946-991C2C879FB9}"/>
-                  </a:ext>
-                </a:extLst>
-              </p:cNvPr>
-              <p:cNvSpPr>
-                <a:spLocks noGrp="1"/>
-              </p:cNvSpPr>
-              <p:nvPr>
-                <p:ph idx="1"/>
-              </p:nvPr>
-            </p:nvSpPr>
-            <p:spPr/>
-            <p:txBody>
-              <a:bodyPr/>
-              <a:lstStyle/>
-              <a:p>
-                <a:pPr marL="0" indent="0">
-                  <a:buNone/>
-                </a:pPr>
-                <a:r>
-                  <a:rPr lang="en-US" dirty="0">
-                    <a:latin typeface="Times New Roman" panose="02020603050405020304" pitchFamily="18" charset="0"/>
-                    <a:cs typeface="Times New Roman" panose="02020603050405020304" pitchFamily="18" charset="0"/>
-                  </a:rPr>
-                  <a:t>Since, by assumption, the function </a:t>
-                </a:r>
-                <a14:m>
-                  <m:oMath xmlns:m="http://schemas.openxmlformats.org/officeDocument/2006/math">
-                    <m:r>
-                      <a:rPr lang="en-US" i="1" smtClean="0">
-                        <a:solidFill>
-                          <a:srgbClr val="0033CC"/>
-                        </a:solidFill>
-                        <a:latin typeface="Cambria Math" panose="02040503050406030204" pitchFamily="18" charset="0"/>
-                      </a:rPr>
-                      <m:t>𝑔</m:t>
-                    </m:r>
-                    <m:r>
-                      <a:rPr lang="en-US" i="1" smtClean="0">
-                        <a:solidFill>
-                          <a:srgbClr val="0033CC"/>
-                        </a:solidFill>
-                        <a:latin typeface="Cambria Math" panose="02040503050406030204" pitchFamily="18" charset="0"/>
-                      </a:rPr>
-                      <m:t>(</m:t>
-                    </m:r>
-                    <m:r>
-                      <a:rPr lang="en-US" i="1" smtClean="0">
-                        <a:solidFill>
-                          <a:srgbClr val="0033CC"/>
-                        </a:solidFill>
-                        <a:latin typeface="Cambria Math" panose="02040503050406030204" pitchFamily="18" charset="0"/>
-                      </a:rPr>
-                      <m:t>𝑥</m:t>
-                    </m:r>
-                    <m:r>
-                      <a:rPr lang="en-US" i="1" smtClean="0">
-                        <a:solidFill>
-                          <a:srgbClr val="0033CC"/>
-                        </a:solidFill>
-                        <a:latin typeface="Cambria Math" panose="02040503050406030204" pitchFamily="18" charset="0"/>
-                      </a:rPr>
-                      <m:t>)</m:t>
-                    </m:r>
-                  </m:oMath>
-                </a14:m>
-                <a:r>
-                  <a:rPr lang="en-US" dirty="0">
-                    <a:latin typeface="Times New Roman" panose="02020603050405020304" pitchFamily="18" charset="0"/>
-                    <a:cs typeface="Times New Roman" panose="02020603050405020304" pitchFamily="18" charset="0"/>
-                  </a:rPr>
-                  <a:t> is arbitrary in</a:t>
-                </a:r>
-              </a:p>
-              <a:p>
-                <a:pPr marL="0" indent="0">
-                  <a:buNone/>
-                </a:pPr>
-                <a14:m>
-                  <m:oMathPara xmlns:m="http://schemas.openxmlformats.org/officeDocument/2006/math">
-                    <m:oMathParaPr>
-                      <m:jc m:val="centerGroup"/>
-                    </m:oMathParaPr>
-                    <m:oMath xmlns:m="http://schemas.openxmlformats.org/officeDocument/2006/math">
-                      <m:nary>
-                        <m:naryPr>
-                          <m:limLoc m:val="undOvr"/>
-                          <m:subHide m:val="on"/>
-                          <m:supHide m:val="on"/>
-                          <m:ctrlPr>
-                            <a:rPr lang="en-US" i="1">
-                              <a:latin typeface="Cambria Math" panose="02040503050406030204" pitchFamily="18" charset="0"/>
-                            </a:rPr>
-                          </m:ctrlPr>
-                        </m:naryPr>
-                        <m:sub/>
-                        <m:sup/>
-                        <m:e>
-                          <m:r>
-                            <a:rPr lang="en-US" i="1">
-                              <a:latin typeface="Cambria Math" panose="02040503050406030204" pitchFamily="18" charset="0"/>
-                            </a:rPr>
-                            <m:t>𝑑𝑥</m:t>
-                          </m:r>
-                          <m:r>
-                            <a:rPr lang="en-US" i="1">
-                              <a:latin typeface="Cambria Math" panose="02040503050406030204" pitchFamily="18" charset="0"/>
-                            </a:rPr>
-                            <m:t> </m:t>
-                          </m:r>
-                          <m:r>
-                            <a:rPr lang="en-US" i="1">
-                              <a:latin typeface="Cambria Math" panose="02040503050406030204" pitchFamily="18" charset="0"/>
-                            </a:rPr>
-                            <m:t>𝑝</m:t>
-                          </m:r>
-                          <m:d>
-                            <m:dPr>
-                              <m:ctrlPr>
-                                <a:rPr lang="en-US" i="1">
-                                  <a:latin typeface="Cambria Math" panose="02040503050406030204" pitchFamily="18" charset="0"/>
-                                </a:rPr>
-                              </m:ctrlPr>
-                            </m:dPr>
-                            <m:e>
-                              <m:r>
-                                <a:rPr lang="en-US" i="1">
-                                  <a:latin typeface="Cambria Math" panose="02040503050406030204" pitchFamily="18" charset="0"/>
-                                </a:rPr>
-                                <m:t>𝑥</m:t>
-                              </m:r>
-                            </m:e>
-                          </m:d>
-                          <m:r>
-                            <a:rPr lang="en-US" i="1">
-                              <a:latin typeface="Cambria Math" panose="02040503050406030204" pitchFamily="18" charset="0"/>
-                            </a:rPr>
-                            <m:t>𝑔</m:t>
-                          </m:r>
-                          <m:r>
-                            <a:rPr lang="en-US" i="1">
-                              <a:latin typeface="Cambria Math" panose="02040503050406030204" pitchFamily="18" charset="0"/>
-                            </a:rPr>
-                            <m:t>(</m:t>
-                          </m:r>
-                          <m:r>
-                            <a:rPr lang="en-US" i="1">
-                              <a:latin typeface="Cambria Math" panose="02040503050406030204" pitchFamily="18" charset="0"/>
-                            </a:rPr>
-                            <m:t>𝑥</m:t>
-                          </m:r>
-                          <m:r>
-                            <a:rPr lang="en-US" i="1">
-                              <a:latin typeface="Cambria Math" panose="02040503050406030204" pitchFamily="18" charset="0"/>
-                            </a:rPr>
-                            <m:t>)</m:t>
-                          </m:r>
-                          <m:f>
-                            <m:fPr>
-                              <m:ctrlPr>
-                                <a:rPr lang="en-US" i="1">
-                                  <a:latin typeface="Cambria Math" panose="02040503050406030204" pitchFamily="18" charset="0"/>
-                                </a:rPr>
-                              </m:ctrlPr>
-                            </m:fPr>
-                            <m:num>
-                              <m:r>
-                                <a:rPr lang="en-US" i="1">
-                                  <a:latin typeface="Cambria Math" panose="02040503050406030204" pitchFamily="18" charset="0"/>
-                                </a:rPr>
-                                <m:t>𝜕</m:t>
-                              </m:r>
-                              <m:r>
-                                <a:rPr lang="en-US" i="1">
-                                  <a:latin typeface="Cambria Math" panose="02040503050406030204" pitchFamily="18" charset="0"/>
-                                </a:rPr>
-                                <m:t>𝐿</m:t>
-                              </m:r>
-                            </m:num>
-                            <m:den>
-                              <m:r>
-                                <a:rPr lang="en-US" i="1">
-                                  <a:latin typeface="Cambria Math" panose="02040503050406030204" pitchFamily="18" charset="0"/>
-                                </a:rPr>
-                                <m:t>𝜕</m:t>
-                              </m:r>
-                              <m:r>
-                                <a:rPr lang="en-US" i="1">
-                                  <a:latin typeface="Cambria Math" panose="02040503050406030204" pitchFamily="18" charset="0"/>
-                                </a:rPr>
-                                <m:t>𝑓</m:t>
-                              </m:r>
-                            </m:den>
-                          </m:f>
-                        </m:e>
-                      </m:nary>
-                      <m:r>
-                        <a:rPr lang="en-US" i="1">
-                          <a:latin typeface="Cambria Math" panose="02040503050406030204" pitchFamily="18" charset="0"/>
-                        </a:rPr>
-                        <m:t>=0</m:t>
-                      </m:r>
-                    </m:oMath>
-                  </m:oMathPara>
-                </a14:m>
-                <a:endParaRPr lang="en-US" dirty="0"/>
-              </a:p>
-              <a:p>
-                <a:pPr marL="0" indent="0">
-                  <a:buNone/>
-                </a:pPr>
-                <a:r>
-                  <a:rPr lang="en-US" dirty="0"/>
-                  <a:t>Then, if </a:t>
-                </a:r>
-                <a14:m>
-                  <m:oMath xmlns:m="http://schemas.openxmlformats.org/officeDocument/2006/math">
-                    <m:r>
-                      <a:rPr lang="en-US" i="1" smtClean="0">
-                        <a:solidFill>
-                          <a:srgbClr val="0033CC"/>
-                        </a:solidFill>
-                        <a:latin typeface="Cambria Math" panose="02040503050406030204" pitchFamily="18" charset="0"/>
-                      </a:rPr>
-                      <m:t>𝑝</m:t>
-                    </m:r>
-                    <m:d>
-                      <m:dPr>
-                        <m:ctrlPr>
-                          <a:rPr lang="en-US" i="1">
-                            <a:solidFill>
-                              <a:srgbClr val="0033CC"/>
-                            </a:solidFill>
-                            <a:latin typeface="Cambria Math" panose="02040503050406030204" pitchFamily="18" charset="0"/>
-                          </a:rPr>
-                        </m:ctrlPr>
-                      </m:dPr>
-                      <m:e>
-                        <m:r>
-                          <a:rPr lang="en-US" i="1">
-                            <a:solidFill>
-                              <a:srgbClr val="0033CC"/>
-                            </a:solidFill>
-                            <a:latin typeface="Cambria Math" panose="02040503050406030204" pitchFamily="18" charset="0"/>
-                          </a:rPr>
-                          <m:t>𝑥</m:t>
-                        </m:r>
-                      </m:e>
-                    </m:d>
-                    <m:r>
-                      <a:rPr lang="en-US" b="0" i="1" smtClean="0">
-                        <a:solidFill>
-                          <a:srgbClr val="0033CC"/>
-                        </a:solidFill>
-                        <a:latin typeface="Cambria Math" panose="02040503050406030204" pitchFamily="18" charset="0"/>
-                      </a:rPr>
-                      <m:t>&gt;0 ∀ </m:t>
-                    </m:r>
-                    <m:r>
-                      <a:rPr lang="en-US" b="0" i="1" smtClean="0">
-                        <a:solidFill>
-                          <a:srgbClr val="0033CC"/>
-                        </a:solidFill>
-                        <a:latin typeface="Cambria Math" panose="02040503050406030204" pitchFamily="18" charset="0"/>
-                      </a:rPr>
-                      <m:t>𝑥</m:t>
-                    </m:r>
-                  </m:oMath>
-                </a14:m>
-                <a:r>
-                  <a:rPr lang="en-US" dirty="0"/>
-                  <a:t>, the equality will hold </a:t>
-                </a:r>
-                <a:r>
-                  <a:rPr lang="en-US" i="1" dirty="0"/>
-                  <a:t>if and only if </a:t>
-                </a:r>
-                <a:endParaRPr lang="en-US" i="1" dirty="0">
-                  <a:latin typeface="Cambria Math" panose="02040503050406030204" pitchFamily="18" charset="0"/>
-                </a:endParaRPr>
-              </a:p>
-              <a:p>
-                <a:pPr marL="0" indent="0">
-                  <a:buNone/>
-                </a:pPr>
-                <a14:m>
-                  <m:oMathPara xmlns:m="http://schemas.openxmlformats.org/officeDocument/2006/math">
-                    <m:oMathParaPr>
-                      <m:jc m:val="centerGroup"/>
-                    </m:oMathParaPr>
-                    <m:oMath xmlns:m="http://schemas.openxmlformats.org/officeDocument/2006/math">
-                      <m:f>
-                        <m:fPr>
-                          <m:ctrlPr>
-                            <a:rPr lang="en-US" i="1">
-                              <a:latin typeface="Cambria Math" panose="02040503050406030204" pitchFamily="18" charset="0"/>
-                            </a:rPr>
-                          </m:ctrlPr>
-                        </m:fPr>
-                        <m:num>
-                          <m:r>
-                            <a:rPr lang="en-US" i="1">
-                              <a:latin typeface="Cambria Math" panose="02040503050406030204" pitchFamily="18" charset="0"/>
-                            </a:rPr>
-                            <m:t>𝜕</m:t>
-                          </m:r>
-                          <m:r>
-                            <a:rPr lang="en-US" i="1">
-                              <a:latin typeface="Cambria Math" panose="02040503050406030204" pitchFamily="18" charset="0"/>
-                            </a:rPr>
-                            <m:t>𝐿</m:t>
-                          </m:r>
-                        </m:num>
-                        <m:den>
-                          <m:r>
-                            <a:rPr lang="en-US" i="1">
-                              <a:latin typeface="Cambria Math" panose="02040503050406030204" pitchFamily="18" charset="0"/>
-                            </a:rPr>
-                            <m:t>𝜕</m:t>
-                          </m:r>
-                          <m:r>
-                            <a:rPr lang="en-US" i="1">
-                              <a:latin typeface="Cambria Math" panose="02040503050406030204" pitchFamily="18" charset="0"/>
-                            </a:rPr>
-                            <m:t>𝑓</m:t>
-                          </m:r>
-                        </m:den>
-                      </m:f>
-                      <m:r>
-                        <a:rPr lang="en-US" b="0" i="1" smtClean="0">
-                          <a:latin typeface="Cambria Math" panose="02040503050406030204" pitchFamily="18" charset="0"/>
-                        </a:rPr>
-                        <m:t>=0</m:t>
-                      </m:r>
-                    </m:oMath>
-                  </m:oMathPara>
-                </a14:m>
-                <a:br>
-                  <a:rPr lang="en-US" dirty="0"/>
-                </a:br>
-                <a:endParaRPr lang="en-US" dirty="0"/>
-              </a:p>
-              <a:p>
-                <a:pPr marL="0" indent="0">
-                  <a:buNone/>
-                </a:pPr>
-                <a:r>
-                  <a:rPr lang="en-US" dirty="0"/>
-                  <a:t>which, for </a:t>
-                </a:r>
-                <a14:m>
-                  <m:oMath xmlns:m="http://schemas.openxmlformats.org/officeDocument/2006/math">
-                    <m:r>
-                      <a:rPr lang="en-US" i="1">
-                        <a:solidFill>
-                          <a:srgbClr val="0033CC"/>
-                        </a:solidFill>
-                        <a:latin typeface="Cambria Math" panose="02040503050406030204" pitchFamily="18" charset="0"/>
-                        <a:ea typeface="Cambria Math" charset="0"/>
-                        <a:cs typeface="Cambria Math" charset="0"/>
-                      </a:rPr>
-                      <m:t>𝐿</m:t>
-                    </m:r>
-                    <m:d>
-                      <m:dPr>
-                        <m:ctrlPr>
-                          <a:rPr lang="en-US" i="1">
-                            <a:solidFill>
-                              <a:srgbClr val="0033CC"/>
-                            </a:solidFill>
-                            <a:latin typeface="Cambria Math" panose="02040503050406030204" pitchFamily="18" charset="0"/>
-                            <a:ea typeface="Cambria Math" charset="0"/>
-                            <a:cs typeface="Cambria Math" charset="0"/>
-                          </a:rPr>
-                        </m:ctrlPr>
-                      </m:dPr>
-                      <m:e>
-                        <m:r>
-                          <a:rPr lang="en-US" i="1">
-                            <a:solidFill>
-                              <a:srgbClr val="0033CC"/>
-                            </a:solidFill>
-                            <a:latin typeface="Cambria Math" panose="02040503050406030204" pitchFamily="18" charset="0"/>
-                            <a:ea typeface="Cambria Math" charset="0"/>
-                            <a:cs typeface="Cambria Math" charset="0"/>
-                          </a:rPr>
-                          <m:t>𝑥</m:t>
-                        </m:r>
-                        <m:r>
-                          <a:rPr lang="en-US" i="1">
-                            <a:solidFill>
-                              <a:srgbClr val="0033CC"/>
-                            </a:solidFill>
-                            <a:latin typeface="Cambria Math" panose="02040503050406030204" pitchFamily="18" charset="0"/>
-                            <a:ea typeface="Cambria Math" charset="0"/>
-                            <a:cs typeface="Cambria Math" charset="0"/>
-                          </a:rPr>
-                          <m:t>, </m:t>
-                        </m:r>
-                        <m:r>
-                          <a:rPr lang="en-US" i="1">
-                            <a:solidFill>
-                              <a:srgbClr val="0033CC"/>
-                            </a:solidFill>
-                            <a:latin typeface="Cambria Math" panose="02040503050406030204" pitchFamily="18" charset="0"/>
-                            <a:ea typeface="Cambria Math" charset="0"/>
-                            <a:cs typeface="Cambria Math" charset="0"/>
-                          </a:rPr>
-                          <m:t>𝑓</m:t>
-                        </m:r>
-                      </m:e>
-                    </m:d>
-                    <m:r>
-                      <a:rPr lang="en-US">
-                        <a:solidFill>
-                          <a:srgbClr val="0033CC"/>
-                        </a:solidFill>
-                        <a:latin typeface="Cambria Math" panose="02040503050406030204" pitchFamily="18" charset="0"/>
-                        <a:ea typeface="Cambria Math" charset="0"/>
-                        <a:cs typeface="Cambria Math" charset="0"/>
-                      </a:rPr>
-                      <m:t>=</m:t>
-                    </m:r>
-                    <m:sSup>
-                      <m:sSupPr>
-                        <m:ctrlPr>
-                          <a:rPr lang="en-US" i="1">
-                            <a:solidFill>
-                              <a:srgbClr val="0033CC"/>
-                            </a:solidFill>
-                            <a:latin typeface="Cambria Math" panose="02040503050406030204" pitchFamily="18" charset="0"/>
-                          </a:rPr>
-                        </m:ctrlPr>
-                      </m:sSupPr>
-                      <m:e>
-                        <m:r>
-                          <a:rPr lang="en-US" i="1">
-                            <a:solidFill>
-                              <a:srgbClr val="0033CC"/>
-                            </a:solidFill>
-                            <a:latin typeface="Cambria Math" panose="02040503050406030204" pitchFamily="18" charset="0"/>
-                          </a:rPr>
-                          <m:t> </m:t>
-                        </m:r>
-                        <m:d>
-                          <m:dPr>
-                            <m:ctrlPr>
-                              <a:rPr lang="en-US" i="1">
-                                <a:solidFill>
-                                  <a:srgbClr val="0033CC"/>
-                                </a:solidFill>
-                                <a:latin typeface="Cambria Math" panose="02040503050406030204" pitchFamily="18" charset="0"/>
-                              </a:rPr>
-                            </m:ctrlPr>
-                          </m:dPr>
-                          <m:e>
-                            <m:r>
-                              <a:rPr lang="en-US" i="1">
-                                <a:solidFill>
-                                  <a:srgbClr val="0033CC"/>
-                                </a:solidFill>
-                                <a:latin typeface="Cambria Math" panose="02040503050406030204" pitchFamily="18" charset="0"/>
-                              </a:rPr>
-                              <m:t>𝑥</m:t>
-                            </m:r>
-                            <m:r>
-                              <a:rPr lang="en-US" i="1">
-                                <a:solidFill>
-                                  <a:srgbClr val="0033CC"/>
-                                </a:solidFill>
-                                <a:latin typeface="Cambria Math" charset="0"/>
-                              </a:rPr>
-                              <m:t>−</m:t>
-                            </m:r>
-                            <m:r>
-                              <a:rPr lang="en-US" i="1">
-                                <a:solidFill>
-                                  <a:srgbClr val="0033CC"/>
-                                </a:solidFill>
-                                <a:latin typeface="Cambria Math" charset="0"/>
-                              </a:rPr>
-                              <m:t>𝑓</m:t>
-                            </m:r>
-                          </m:e>
-                        </m:d>
-                      </m:e>
-                      <m:sup>
-                        <m:r>
-                          <a:rPr lang="en-US" i="1">
-                            <a:solidFill>
-                              <a:srgbClr val="0033CC"/>
-                            </a:solidFill>
-                            <a:latin typeface="Cambria Math" charset="0"/>
-                          </a:rPr>
-                          <m:t>2</m:t>
-                        </m:r>
-                      </m:sup>
-                    </m:sSup>
-                  </m:oMath>
-                </a14:m>
-                <a:r>
-                  <a:rPr lang="en-US" dirty="0"/>
-                  <a:t>, implies</a:t>
-                </a:r>
-              </a:p>
-              <a:p>
-                <a:pPr marL="0" indent="0" algn="ctr">
-                  <a:buNone/>
-                </a:pPr>
-                <a14:m>
-                  <m:oMath xmlns:m="http://schemas.openxmlformats.org/officeDocument/2006/math">
-                    <m:r>
-                      <a:rPr lang="en-US" i="1" dirty="0" smtClean="0">
-                        <a:latin typeface="Cambria Math" panose="02040503050406030204" pitchFamily="18" charset="0"/>
-                      </a:rPr>
-                      <m:t>𝑓</m:t>
-                    </m:r>
-                    <m:r>
-                      <a:rPr lang="en-US" i="1" dirty="0" smtClean="0">
-                        <a:latin typeface="Cambria Math" panose="02040503050406030204" pitchFamily="18" charset="0"/>
-                      </a:rPr>
-                      <m:t>(</m:t>
-                    </m:r>
-                    <m:r>
-                      <a:rPr lang="en-US" i="1" dirty="0" smtClean="0">
-                        <a:latin typeface="Cambria Math" panose="02040503050406030204" pitchFamily="18" charset="0"/>
-                      </a:rPr>
-                      <m:t>𝑥</m:t>
-                    </m:r>
-                    <m:r>
-                      <a:rPr lang="en-US" i="1" dirty="0" smtClean="0">
-                        <a:latin typeface="Cambria Math" panose="02040503050406030204" pitchFamily="18" charset="0"/>
-                      </a:rPr>
-                      <m:t>, </m:t>
-                    </m:r>
-                    <m:sSup>
-                      <m:sSupPr>
-                        <m:ctrlPr>
-                          <a:rPr lang="en-US" i="1" dirty="0">
-                            <a:latin typeface="Cambria Math" panose="02040503050406030204" pitchFamily="18" charset="0"/>
-                          </a:rPr>
-                        </m:ctrlPr>
-                      </m:sSupPr>
-                      <m:e>
-                        <m:r>
-                          <a:rPr lang="en-US" i="1" dirty="0">
-                            <a:latin typeface="Cambria Math" panose="02040503050406030204" pitchFamily="18" charset="0"/>
-                          </a:rPr>
-                          <m:t>𝜔</m:t>
-                        </m:r>
-                      </m:e>
-                      <m:sup>
-                        <m:r>
-                          <a:rPr lang="en-US" i="1" dirty="0">
-                            <a:latin typeface="Cambria Math" panose="02040503050406030204" pitchFamily="18" charset="0"/>
-                          </a:rPr>
-                          <m:t>∗</m:t>
-                        </m:r>
-                      </m:sup>
-                    </m:sSup>
-                    <m:r>
-                      <a:rPr lang="en-US" i="1" dirty="0">
-                        <a:latin typeface="Cambria Math" panose="02040503050406030204" pitchFamily="18" charset="0"/>
-                      </a:rPr>
-                      <m:t>)</m:t>
-                    </m:r>
-                    <m:r>
-                      <a:rPr lang="en-US" i="1">
-                        <a:latin typeface="Cambria Math" panose="02040503050406030204" pitchFamily="18" charset="0"/>
-                      </a:rPr>
-                      <m:t>=</m:t>
-                    </m:r>
-                    <m:r>
-                      <a:rPr lang="en-US" b="0" i="1" smtClean="0">
-                        <a:latin typeface="Cambria Math" panose="02040503050406030204" pitchFamily="18" charset="0"/>
-                      </a:rPr>
-                      <m:t>𝑥</m:t>
-                    </m:r>
-                  </m:oMath>
-                </a14:m>
-                <a:r>
-                  <a:rPr lang="en-US" dirty="0"/>
-                  <a:t>.</a:t>
-                </a:r>
-                <a:br>
-                  <a:rPr lang="en-US" dirty="0"/>
-                </a:br>
-                <a:endParaRPr lang="en-US" dirty="0"/>
-              </a:p>
-              <a:p>
-                <a:pPr marL="0" indent="0">
-                  <a:buNone/>
-                </a:pPr>
-                <a:r>
-                  <a:rPr lang="en-US" dirty="0"/>
-                  <a:t>In principle, we have an </a:t>
-                </a:r>
-                <a:r>
-                  <a:rPr lang="en-US" i="1" dirty="0">
-                    <a:solidFill>
-                      <a:srgbClr val="0033CC"/>
-                    </a:solidFill>
-                  </a:rPr>
-                  <a:t>unbiased</a:t>
-                </a:r>
-                <a:r>
-                  <a:rPr lang="en-US" dirty="0"/>
-                  <a:t> estimate of the input data.</a:t>
-                </a:r>
-              </a:p>
-            </p:txBody>
-          </p:sp>
-        </mc:Choice>
-        <mc:Fallback xmlns="">
-          <p:sp>
-            <p:nvSpPr>
-              <p:cNvPr id="8" name="Content Placeholder 7">
-                <a:extLst>
-                  <a:ext uri="{FF2B5EF4-FFF2-40B4-BE49-F238E27FC236}">
-                    <a16:creationId xmlns:a16="http://schemas.microsoft.com/office/drawing/2014/main" id="{643F5EAD-1EF0-251F-2946-991C2C879FB9}"/>
-                  </a:ext>
-                </a:extLst>
-              </p:cNvPr>
-              <p:cNvSpPr>
-                <a:spLocks noGrp="1" noRot="1" noChangeAspect="1" noMove="1" noResize="1" noEditPoints="1" noAdjustHandles="1" noChangeArrowheads="1" noChangeShapeType="1" noTextEdit="1"/>
-              </p:cNvSpPr>
-              <p:nvPr>
-                <p:ph idx="1"/>
-              </p:nvPr>
-            </p:nvSpPr>
-            <p:spPr>
-              <a:blipFill>
-                <a:blip r:embed="rId2"/>
-                <a:stretch>
-                  <a:fillRect l="-1305" t="-23421"/>
-                </a:stretch>
-              </a:blipFill>
-            </p:spPr>
-            <p:txBody>
-              <a:bodyPr/>
-              <a:lstStyle/>
-              <a:p>
-                <a:r>
-                  <a:rPr lang="en-US">
-                    <a:noFill/>
-                  </a:rPr>
-                  <a:t> </a:t>
-                </a:r>
-              </a:p>
-            </p:txBody>
-          </p:sp>
-        </mc:Fallback>
-      </mc:AlternateContent>
+      <p:sp>
+        <p:nvSpPr>
+          <p:cNvPr id="8" name="Content Placeholder 7">
+            <a:extLst>
+              <a:ext uri="{FF2B5EF4-FFF2-40B4-BE49-F238E27FC236}">
+                <a16:creationId xmlns:a16="http://schemas.microsoft.com/office/drawing/2014/main" id="{0952DC20-149F-4F7D-392D-CECD85A09A35}"/>
+              </a:ext>
+            </a:extLst>
+          </p:cNvPr>
+          <p:cNvSpPr>
+            <a:spLocks noGrp="1"/>
+          </p:cNvSpPr>
+          <p:nvPr>
+            <p:ph idx="1"/>
+          </p:nvPr>
+        </p:nvSpPr>
+        <p:spPr>
+          <a:xfrm>
+            <a:off x="711200" y="1295400"/>
+            <a:ext cx="8128000" cy="4819650"/>
+          </a:xfrm>
+        </p:spPr>
+        <p:txBody>
+          <a:bodyPr/>
+          <a:lstStyle/>
+          <a:p>
+            <a:pPr marL="0" indent="0">
+              <a:buNone/>
+            </a:pPr>
+            <a:r>
+              <a:rPr lang="en-US" dirty="0">
+                <a:solidFill>
+                  <a:srgbClr val="0033CC"/>
+                </a:solidFill>
+              </a:rPr>
+              <a:t>SDSS Dataset (</a:t>
+            </a:r>
+            <a:r>
+              <a:rPr lang="en-US" dirty="0">
+                <a:solidFill>
+                  <a:srgbClr val="0033CC"/>
+                </a:solidFill>
+                <a:hlinkClick r:id="rId2"/>
+              </a:rPr>
+              <a:t>https://cas.sdss.org/dr18/SearchTools/sql</a:t>
+            </a:r>
+            <a:r>
+              <a:rPr lang="en-US" dirty="0">
+                <a:solidFill>
+                  <a:srgbClr val="0033CC"/>
+                </a:solidFill>
+              </a:rPr>
+              <a:t>) </a:t>
+            </a:r>
+          </a:p>
+          <a:p>
+            <a:pPr marL="0" indent="0">
+              <a:buNone/>
+            </a:pPr>
+            <a:r>
+              <a:rPr lang="en-US" dirty="0"/>
+              <a:t>We use data from </a:t>
+            </a:r>
+            <a:r>
+              <a:rPr lang="en-US" dirty="0">
+                <a:solidFill>
+                  <a:srgbClr val="0033CC"/>
+                </a:solidFill>
+              </a:rPr>
+              <a:t>255,000</a:t>
+            </a:r>
+            <a:r>
+              <a:rPr lang="en-US" dirty="0"/>
+              <a:t> stars extracted using the SQL command:</a:t>
+            </a:r>
+          </a:p>
+          <a:p>
+            <a:pPr marL="0" indent="0">
+              <a:buNone/>
+            </a:pPr>
+            <a:endParaRPr lang="en-US" dirty="0"/>
+          </a:p>
+          <a:p>
+            <a:pPr marL="0" indent="0">
+              <a:buNone/>
+            </a:pPr>
+            <a:endParaRPr lang="en-US" dirty="0"/>
+          </a:p>
+          <a:p>
+            <a:pPr marL="0" indent="0">
+              <a:buNone/>
+            </a:pPr>
+            <a:endParaRPr lang="en-US" dirty="0"/>
+          </a:p>
+          <a:p>
+            <a:pPr marL="0" indent="0">
+              <a:buNone/>
+            </a:pPr>
+            <a:endParaRPr lang="en-US" dirty="0"/>
+          </a:p>
+          <a:p>
+            <a:pPr marL="0" indent="0">
+              <a:buNone/>
+            </a:pPr>
+            <a:endParaRPr lang="en-US" dirty="0"/>
+          </a:p>
+          <a:p>
+            <a:pPr marL="0" indent="0">
+              <a:buNone/>
+            </a:pPr>
+            <a:endParaRPr lang="en-US" dirty="0"/>
+          </a:p>
+          <a:p>
+            <a:pPr marL="0" indent="0">
+              <a:buNone/>
+            </a:pPr>
+            <a:r>
+              <a:rPr lang="en-US" dirty="0"/>
+              <a:t>				</a:t>
+            </a:r>
+          </a:p>
+        </p:txBody>
+      </p:sp>
+      <p:pic>
+        <p:nvPicPr>
+          <p:cNvPr id="3" name="Picture 2" descr="A screenshot of a computer code&#10;&#10;AI-generated content may be incorrect.">
+            <a:extLst>
+              <a:ext uri="{FF2B5EF4-FFF2-40B4-BE49-F238E27FC236}">
+                <a16:creationId xmlns:a16="http://schemas.microsoft.com/office/drawing/2014/main" id="{DC136126-D85F-ABF4-3D7E-35D07E9423AF}"/>
+              </a:ext>
+            </a:extLst>
+          </p:cNvPr>
+          <p:cNvPicPr>
+            <a:picLocks noChangeAspect="1"/>
+          </p:cNvPicPr>
+          <p:nvPr/>
+        </p:nvPicPr>
+        <p:blipFill>
+          <a:blip r:embed="rId3"/>
+          <a:stretch>
+            <a:fillRect/>
+          </a:stretch>
+        </p:blipFill>
+        <p:spPr>
+          <a:xfrm>
+            <a:off x="1204367" y="2514600"/>
+            <a:ext cx="7253833" cy="3371850"/>
+          </a:xfrm>
+          <a:prstGeom prst="rect">
+            <a:avLst/>
+          </a:prstGeom>
+          <a:effectLst>
+            <a:outerShdw blurRad="50800" dist="38100" dir="2700000" algn="tl" rotWithShape="0">
+              <a:prstClr val="black">
+                <a:alpha val="40000"/>
+              </a:prstClr>
+            </a:outerShdw>
+          </a:effectLst>
+        </p:spPr>
+      </p:pic>
     </p:spTree>
     <p:extLst>
       <p:ext uri="{BB962C8B-B14F-4D97-AF65-F5344CB8AC3E}">
-        <p14:creationId xmlns:p14="http://schemas.microsoft.com/office/powerpoint/2010/main" val="3442980997"/>
+        <p14:creationId xmlns:p14="http://schemas.microsoft.com/office/powerpoint/2010/main" val="4160723943"/>
       </p:ext>
     </p:extLst>
   </p:cSld>
@@ -3706,7 +3211,7 @@
         <p:cNvPr id="1" name="">
           <a:extLst>
             <a:ext uri="{FF2B5EF4-FFF2-40B4-BE49-F238E27FC236}">
-              <a16:creationId xmlns:a16="http://schemas.microsoft.com/office/drawing/2014/main" id="{4FF6A98C-9E5F-DED6-3109-3C443CB4104A}"/>
+              <a16:creationId xmlns:a16="http://schemas.microsoft.com/office/drawing/2014/main" id="{26801E74-81A9-5052-F699-835321EE1926}"/>
             </a:ext>
           </a:extLst>
         </p:cNvPr>
@@ -3723,10 +3228,10 @@
       </p:grpSpPr>
       <p:sp>
         <p:nvSpPr>
-          <p:cNvPr id="4" name="Title 3">
+          <p:cNvPr id="7" name="Title 6">
             <a:extLst>
               <a:ext uri="{FF2B5EF4-FFF2-40B4-BE49-F238E27FC236}">
-                <a16:creationId xmlns:a16="http://schemas.microsoft.com/office/drawing/2014/main" id="{BD48DC92-84ED-8472-F279-467D4C4466EE}"/>
+                <a16:creationId xmlns:a16="http://schemas.microsoft.com/office/drawing/2014/main" id="{D30CB107-DAF6-9843-34B0-2F5BEC6DFA83}"/>
               </a:ext>
             </a:extLst>
           </p:cNvPr>
@@ -3734,7 +3239,7 @@
             <a:spLocks noGrp="1"/>
           </p:cNvSpPr>
           <p:nvPr>
-            <p:ph type="ctrTitle"/>
+            <p:ph type="title"/>
           </p:nvPr>
         </p:nvSpPr>
         <p:spPr/>
@@ -3744,13 +3249,9 @@
           <a:p>
             <a:r>
               <a:rPr lang="en-US" dirty="0"/>
-              <a:t>AE </a:t>
-            </a:r>
-            <a:r>
-              <a:rPr lang="en-US" dirty="0" err="1"/>
-              <a:t>TuTorial</a:t>
-            </a:r>
-            <a:endParaRPr lang="en-US" sz="2400" dirty="0">
+              <a:t>Autoencoders (3)</a:t>
+            </a:r>
+            <a:endParaRPr lang="en-US" dirty="0">
               <a:solidFill>
                 <a:schemeClr val="accent1"/>
               </a:solidFill>
@@ -3758,19 +3259,155 @@
           </a:p>
         </p:txBody>
       </p:sp>
+      <p:sp>
+        <p:nvSpPr>
+          <p:cNvPr id="8" name="Content Placeholder 7">
+            <a:extLst>
+              <a:ext uri="{FF2B5EF4-FFF2-40B4-BE49-F238E27FC236}">
+                <a16:creationId xmlns:a16="http://schemas.microsoft.com/office/drawing/2014/main" id="{2BEE8A40-D7E6-3AAC-E92D-22BE2DE088F3}"/>
+              </a:ext>
+            </a:extLst>
+          </p:cNvPr>
+          <p:cNvSpPr>
+            <a:spLocks noGrp="1"/>
+          </p:cNvSpPr>
+          <p:nvPr>
+            <p:ph sz="half" idx="1"/>
+          </p:nvPr>
+        </p:nvSpPr>
+        <p:spPr>
+          <a:xfrm>
+            <a:off x="711200" y="1295400"/>
+            <a:ext cx="3556000" cy="4819650"/>
+          </a:xfrm>
+        </p:spPr>
+        <p:txBody>
+          <a:bodyPr/>
+          <a:lstStyle/>
+          <a:p>
+            <a:pPr marL="0" indent="0">
+              <a:buNone/>
+            </a:pPr>
+            <a:r>
+              <a:rPr lang="en-US" dirty="0"/>
+              <a:t>Beyond correlations, the plots show no obvious structure. </a:t>
+            </a:r>
+          </a:p>
+          <a:p>
+            <a:pPr marL="0" indent="0">
+              <a:buNone/>
+            </a:pPr>
+            <a:endParaRPr lang="en-US" dirty="0"/>
+          </a:p>
+          <a:p>
+            <a:pPr marL="0" indent="0">
+              <a:buNone/>
+            </a:pPr>
+            <a:r>
+              <a:rPr lang="en-US" dirty="0"/>
+              <a:t>But the hope is that the latent space of the autoencoder will reveal any structure that may be present in the data.</a:t>
+            </a:r>
+          </a:p>
+          <a:p>
+            <a:pPr marL="0" indent="0">
+              <a:buNone/>
+            </a:pPr>
+            <a:endParaRPr lang="en-US" dirty="0"/>
+          </a:p>
+          <a:p>
+            <a:pPr marL="0" indent="0">
+              <a:buNone/>
+            </a:pPr>
+            <a:endParaRPr lang="en-US" dirty="0"/>
+          </a:p>
+          <a:p>
+            <a:pPr marL="0" indent="0">
+              <a:buNone/>
+            </a:pPr>
+            <a:endParaRPr lang="en-US" dirty="0"/>
+          </a:p>
+          <a:p>
+            <a:pPr marL="0" indent="0">
+              <a:buNone/>
+            </a:pPr>
+            <a:endParaRPr lang="en-US" dirty="0"/>
+          </a:p>
+          <a:p>
+            <a:pPr marL="0" indent="0">
+              <a:buNone/>
+            </a:pPr>
+            <a:endParaRPr lang="en-US" dirty="0"/>
+          </a:p>
+          <a:p>
+            <a:pPr marL="0" indent="0">
+              <a:buNone/>
+            </a:pPr>
+            <a:r>
+              <a:rPr lang="en-US" dirty="0"/>
+              <a:t>				</a:t>
+            </a:r>
+          </a:p>
+        </p:txBody>
+      </p:sp>
+      <p:pic>
+        <p:nvPicPr>
+          <p:cNvPr id="5" name="Picture 4" descr="A graph of a graph of a number of objects&#10;&#10;AI-generated content may be incorrect.">
+            <a:extLst>
+              <a:ext uri="{FF2B5EF4-FFF2-40B4-BE49-F238E27FC236}">
+                <a16:creationId xmlns:a16="http://schemas.microsoft.com/office/drawing/2014/main" id="{6861D6D0-E5DD-9F17-C7B9-724DFEE9B1BD}"/>
+              </a:ext>
+            </a:extLst>
+          </p:cNvPr>
+          <p:cNvPicPr>
+            <a:picLocks noChangeAspect="1"/>
+          </p:cNvPicPr>
+          <p:nvPr/>
+        </p:nvPicPr>
+        <p:blipFill>
+          <a:blip r:embed="rId2"/>
+          <a:stretch>
+            <a:fillRect/>
+          </a:stretch>
+        </p:blipFill>
+        <p:spPr>
+          <a:xfrm>
+            <a:off x="4241409" y="1438275"/>
+            <a:ext cx="4533900" cy="4533900"/>
+          </a:xfrm>
+          <a:prstGeom prst="rect">
+            <a:avLst/>
+          </a:prstGeom>
+          <a:effectLst>
+            <a:outerShdw blurRad="50800" dist="38100" dir="2700000" algn="tl" rotWithShape="0">
+              <a:prstClr val="black">
+                <a:alpha val="40000"/>
+              </a:prstClr>
+            </a:outerShdw>
+          </a:effectLst>
+        </p:spPr>
+      </p:pic>
     </p:spTree>
     <p:extLst>
       <p:ext uri="{BB962C8B-B14F-4D97-AF65-F5344CB8AC3E}">
-        <p14:creationId xmlns:p14="http://schemas.microsoft.com/office/powerpoint/2010/main" val="1753121095"/>
+        <p14:creationId xmlns:p14="http://schemas.microsoft.com/office/powerpoint/2010/main" val="3560357507"/>
       </p:ext>
     </p:extLst>
   </p:cSld>
   <p:clrMapOvr>
     <a:masterClrMapping/>
   </p:clrMapOvr>
-  <p:transition>
-    <p:fade/>
-  </p:transition>
+  <mc:AlternateContent xmlns:mc="http://schemas.openxmlformats.org/markup-compatibility/2006" xmlns:p14="http://schemas.microsoft.com/office/powerpoint/2010/main">
+    <mc:Choice Requires="p14">
+      <p:transition spd="med" p14:dur="700">
+        <p:fade/>
+      </p:transition>
+    </mc:Choice>
+    <mc:Fallback xmlns="">
+      <p:transition spd="med">
+        <p:fade/>
+      </p:transition>
+    </mc:Fallback>
+  </mc:AlternateContent>
 </p:sld>
 </file>
 
@@ -3867,8 +3504,8 @@
           <a:effectLst/>
         </p:spPr>
       </p:cxnSp>
-      <mc:AlternateContent xmlns:mc="http://schemas.openxmlformats.org/markup-compatibility/2006">
-        <mc:Choice xmlns:a14="http://schemas.microsoft.com/office/drawing/2010/main" Requires="a14">
+      <mc:AlternateContent xmlns:mc="http://schemas.openxmlformats.org/markup-compatibility/2006" xmlns:a14="http://schemas.microsoft.com/office/drawing/2010/main">
+        <mc:Choice Requires="a14">
           <p:sp>
             <p:nvSpPr>
               <p:cNvPr id="3" name="Content Placeholder 2">
@@ -4047,7 +3684,7 @@
             </p:txBody>
           </p:sp>
         </mc:Choice>
-        <mc:Fallback>
+        <mc:Fallback xmlns="">
           <p:sp>
             <p:nvSpPr>
               <p:cNvPr id="3" name="Content Placeholder 2">
@@ -4110,12 +3747,14 @@
           <a:p>
             <a:r>
               <a:rPr lang="en-US" dirty="0"/>
-              <a:t>Autoencoder: </a:t>
+              <a:t>Autoencoders (4): </a:t>
             </a:r>
             <a:r>
               <a:rPr lang="en-US" dirty="0">
                 <a:solidFill>
-                  <a:schemeClr val="accent1"/>
+                  <a:schemeClr val="accent1">
+                    <a:lumMod val="75000"/>
+                  </a:schemeClr>
                 </a:solidFill>
               </a:rPr>
               <a:t>Encoder</a:t>
@@ -4624,8 +4263,8 @@
             </a:prstGeom>
           </p:spPr>
         </p:pic>
-        <mc:AlternateContent xmlns:mc="http://schemas.openxmlformats.org/markup-compatibility/2006">
-          <mc:Choice xmlns:a14="http://schemas.microsoft.com/office/drawing/2010/main" Requires="a14">
+        <mc:AlternateContent xmlns:mc="http://schemas.openxmlformats.org/markup-compatibility/2006" xmlns:a14="http://schemas.microsoft.com/office/drawing/2010/main">
+          <mc:Choice Requires="a14">
             <p:sp>
               <p:nvSpPr>
                 <p:cNvPr id="25" name="TextBox 24">
@@ -4675,7 +4314,7 @@
               </p:txBody>
             </p:sp>
           </mc:Choice>
-          <mc:Fallback>
+          <mc:Fallback xmlns="">
             <p:sp>
               <p:nvSpPr>
                 <p:cNvPr id="25" name="TextBox 24">
@@ -5285,8 +4924,8 @@
           </p:txBody>
         </p:sp>
       </p:grpSp>
-      <mc:AlternateContent xmlns:mc="http://schemas.openxmlformats.org/markup-compatibility/2006">
-        <mc:Choice xmlns:a14="http://schemas.microsoft.com/office/drawing/2010/main" Requires="a14">
+      <mc:AlternateContent xmlns:mc="http://schemas.openxmlformats.org/markup-compatibility/2006" xmlns:a14="http://schemas.microsoft.com/office/drawing/2010/main">
+        <mc:Choice Requires="a14">
           <p:sp>
             <p:nvSpPr>
               <p:cNvPr id="17" name="TextBox 16">
@@ -5301,8 +4940,8 @@
             </p:nvSpPr>
             <p:spPr>
               <a:xfrm>
-                <a:off x="7015167" y="3134380"/>
-                <a:ext cx="1406667" cy="523220"/>
+                <a:off x="6629400" y="3134380"/>
+                <a:ext cx="2080698" cy="523220"/>
               </a:xfrm>
               <a:prstGeom prst="rect">
                 <a:avLst/>
@@ -5329,6 +4968,24 @@
                           </a:solidFill>
                           <a:latin typeface="Cambria Math" panose="02040503050406030204" pitchFamily="18" charset="0"/>
                         </a:rPr>
+                        <m:t>𝒛</m:t>
+                      </m:r>
+                      <m:r>
+                        <a:rPr lang="en-US" sz="2800" b="1" i="1" smtClean="0">
+                          <a:solidFill>
+                            <a:srgbClr val="0033CC"/>
+                          </a:solidFill>
+                          <a:latin typeface="Cambria Math" panose="02040503050406030204" pitchFamily="18" charset="0"/>
+                        </a:rPr>
+                        <m:t>=</m:t>
+                      </m:r>
+                      <m:r>
+                        <a:rPr lang="en-US" sz="2800" b="1" i="1" smtClean="0">
+                          <a:solidFill>
+                            <a:srgbClr val="0033CC"/>
+                          </a:solidFill>
+                          <a:latin typeface="Cambria Math" panose="02040503050406030204" pitchFamily="18" charset="0"/>
+                        </a:rPr>
                         <m:t>𝒉</m:t>
                       </m:r>
                       <m:r>
@@ -5347,7 +5004,7 @@
                           </a:solidFill>
                           <a:latin typeface="Cambria Math" panose="02040503050406030204" pitchFamily="18" charset="0"/>
                         </a:rPr>
-                        <m:t>𝒛</m:t>
+                        <m:t>𝒙</m:t>
                       </m:r>
                       <m:r>
                         <a:rPr lang="en-US" sz="2800" b="1" i="1" smtClean="0">
@@ -5388,7 +5045,7 @@
             </p:txBody>
           </p:sp>
         </mc:Choice>
-        <mc:Fallback>
+        <mc:Fallback xmlns="">
           <p:sp>
             <p:nvSpPr>
               <p:cNvPr id="17" name="TextBox 16">
@@ -5405,8 +5062,8 @@
             </p:nvSpPr>
             <p:spPr>
               <a:xfrm>
-                <a:off x="7015167" y="3134380"/>
-                <a:ext cx="1406667" cy="523220"/>
+                <a:off x="6629400" y="3134380"/>
+                <a:ext cx="2080698" cy="523220"/>
               </a:xfrm>
               <a:prstGeom prst="rect">
                 <a:avLst/>
@@ -5414,7 +5071,7 @@
               <a:blipFill>
                 <a:blip r:embed="rId5"/>
                 <a:stretch>
-                  <a:fillRect r="-1786" b="-21429"/>
+                  <a:fillRect r="-1220" b="-21429"/>
                 </a:stretch>
               </a:blipFill>
             </p:spPr>
@@ -5551,8 +5208,8 @@
           <a:effectLst/>
         </p:spPr>
       </p:cxnSp>
-      <mc:AlternateContent xmlns:mc="http://schemas.openxmlformats.org/markup-compatibility/2006">
-        <mc:Choice xmlns:a14="http://schemas.microsoft.com/office/drawing/2010/main" Requires="a14">
+      <mc:AlternateContent xmlns:mc="http://schemas.openxmlformats.org/markup-compatibility/2006" xmlns:a14="http://schemas.microsoft.com/office/drawing/2010/main">
+        <mc:Choice Requires="a14">
           <p:sp>
             <p:nvSpPr>
               <p:cNvPr id="3" name="Content Placeholder 2">
@@ -5731,7 +5388,7 @@
             </p:txBody>
           </p:sp>
         </mc:Choice>
-        <mc:Fallback>
+        <mc:Fallback xmlns="">
           <p:sp>
             <p:nvSpPr>
               <p:cNvPr id="3" name="Content Placeholder 2">
@@ -5794,7 +5451,7 @@
           <a:p>
             <a:r>
               <a:rPr lang="en-US" dirty="0"/>
-              <a:t>Autoencoder: </a:t>
+              <a:t>Autoencoders (5): </a:t>
             </a:r>
             <a:r>
               <a:rPr lang="en-US" dirty="0">
@@ -5822,9 +5479,9 @@
         <p:grpSpPr>
           <a:xfrm>
             <a:off x="2057400" y="2309156"/>
-            <a:ext cx="6700837" cy="4167844"/>
+            <a:ext cx="7036654" cy="4167844"/>
             <a:chOff x="1295400" y="2237926"/>
-            <a:chExt cx="6700837" cy="4167844"/>
+            <a:chExt cx="7036654" cy="4167844"/>
           </a:xfrm>
         </p:grpSpPr>
         <p:grpSp>
@@ -6308,8 +5965,8 @@
             </a:prstGeom>
           </p:spPr>
         </p:pic>
-        <mc:AlternateContent xmlns:mc="http://schemas.openxmlformats.org/markup-compatibility/2006">
-          <mc:Choice xmlns:a14="http://schemas.microsoft.com/office/drawing/2010/main" Requires="a14">
+        <mc:AlternateContent xmlns:mc="http://schemas.openxmlformats.org/markup-compatibility/2006" xmlns:a14="http://schemas.microsoft.com/office/drawing/2010/main">
+          <mc:Choice Requires="a14">
             <p:sp>
               <p:nvSpPr>
                 <p:cNvPr id="24" name="TextBox 23">
@@ -6325,7 +5982,7 @@
               <p:spPr>
                 <a:xfrm>
                   <a:off x="6235326" y="3052970"/>
-                  <a:ext cx="1443537" cy="523220"/>
+                  <a:ext cx="2096728" cy="523220"/>
                 </a:xfrm>
                 <a:prstGeom prst="rect">
                   <a:avLst/>
@@ -6352,6 +6009,24 @@
                             </a:solidFill>
                             <a:latin typeface="Cambria Math" panose="02040503050406030204" pitchFamily="18" charset="0"/>
                           </a:rPr>
+                          <m:t>𝒙</m:t>
+                        </m:r>
+                        <m:r>
+                          <a:rPr lang="en-US" sz="2800" b="1" i="1" smtClean="0">
+                            <a:solidFill>
+                              <a:srgbClr val="C00000"/>
+                            </a:solidFill>
+                            <a:latin typeface="Cambria Math" panose="02040503050406030204" pitchFamily="18" charset="0"/>
+                          </a:rPr>
+                          <m:t>=</m:t>
+                        </m:r>
+                        <m:r>
+                          <a:rPr lang="en-US" sz="2800" b="1" i="1" smtClean="0">
+                            <a:solidFill>
+                              <a:srgbClr val="C00000"/>
+                            </a:solidFill>
+                            <a:latin typeface="Cambria Math" panose="02040503050406030204" pitchFamily="18" charset="0"/>
+                          </a:rPr>
                           <m:t>𝒈</m:t>
                         </m:r>
                         <m:r>
@@ -6370,7 +6045,7 @@
                             </a:solidFill>
                             <a:latin typeface="Cambria Math" panose="02040503050406030204" pitchFamily="18" charset="0"/>
                           </a:rPr>
-                          <m:t>𝒙</m:t>
+                          <m:t>𝒛</m:t>
                         </m:r>
                         <m:r>
                           <a:rPr lang="en-US" sz="2800" b="1" i="1" smtClean="0">
@@ -6411,7 +6086,7 @@
               </p:txBody>
             </p:sp>
           </mc:Choice>
-          <mc:Fallback>
+          <mc:Fallback xmlns="">
             <p:sp>
               <p:nvSpPr>
                 <p:cNvPr id="24" name="TextBox 23">
@@ -6429,7 +6104,7 @@
               <p:spPr>
                 <a:xfrm>
                   <a:off x="6235326" y="3052970"/>
-                  <a:ext cx="1443537" cy="523220"/>
+                  <a:ext cx="2096728" cy="523220"/>
                 </a:xfrm>
                 <a:prstGeom prst="rect">
                   <a:avLst/>
@@ -6437,7 +6112,7 @@
                 <a:blipFill>
                   <a:blip r:embed="rId4"/>
                   <a:stretch>
-                    <a:fillRect r="-1754" b="-19048"/>
+                    <a:fillRect r="-602" b="-19048"/>
                   </a:stretch>
                 </a:blipFill>
               </p:spPr>
@@ -6456,8 +6131,8 @@
             </p:sp>
           </mc:Fallback>
         </mc:AlternateContent>
-        <mc:AlternateContent xmlns:mc="http://schemas.openxmlformats.org/markup-compatibility/2006">
-          <mc:Choice xmlns:a14="http://schemas.microsoft.com/office/drawing/2010/main" Requires="a14">
+        <mc:AlternateContent xmlns:mc="http://schemas.openxmlformats.org/markup-compatibility/2006" xmlns:a14="http://schemas.microsoft.com/office/drawing/2010/main">
+          <mc:Choice Requires="a14">
             <p:sp>
               <p:nvSpPr>
                 <p:cNvPr id="25" name="TextBox 24">
@@ -6507,7 +6182,7 @@
               </p:txBody>
             </p:sp>
           </mc:Choice>
-          <mc:Fallback>
+          <mc:Fallback xmlns="">
             <p:sp>
               <p:nvSpPr>
                 <p:cNvPr id="25" name="TextBox 24">
@@ -7127,13 +6802,13 @@
   <p:clrMapOvr>
     <a:masterClrMapping/>
   </p:clrMapOvr>
-  <mc:AlternateContent xmlns:mc="http://schemas.openxmlformats.org/markup-compatibility/2006">
-    <mc:Choice xmlns:p14="http://schemas.microsoft.com/office/powerpoint/2010/main" Requires="p14">
+  <mc:AlternateContent xmlns:mc="http://schemas.openxmlformats.org/markup-compatibility/2006" xmlns:p14="http://schemas.microsoft.com/office/powerpoint/2010/main">
+    <mc:Choice Requires="p14">
       <p:transition spd="med" p14:dur="700">
         <p:fade/>
       </p:transition>
     </mc:Choice>
-    <mc:Fallback>
+    <mc:Fallback xmlns="">
       <p:transition spd="med">
         <p:fade/>
       </p:transition>
@@ -7394,12 +7069,14 @@
           <a:p>
             <a:r>
               <a:rPr lang="en-US" dirty="0"/>
-              <a:t>Autoencoder: </a:t>
+              <a:t>Autoencoders (6): </a:t>
             </a:r>
             <a:r>
               <a:rPr lang="en-US" dirty="0">
                 <a:solidFill>
-                  <a:schemeClr val="accent1"/>
+                  <a:schemeClr val="accent1">
+                    <a:lumMod val="75000"/>
+                  </a:schemeClr>
                 </a:solidFill>
               </a:rPr>
               <a:t>Training</a:t>
@@ -7503,12 +7180,14 @@
           <a:p>
             <a:r>
               <a:rPr lang="en-US" dirty="0"/>
-              <a:t>Autoencoder: </a:t>
+              <a:t>Autoencoders (7): </a:t>
             </a:r>
             <a:r>
               <a:rPr lang="en-US" dirty="0">
                 <a:solidFill>
-                  <a:schemeClr val="accent1"/>
+                  <a:schemeClr val="accent1">
+                    <a:lumMod val="75000"/>
+                  </a:schemeClr>
                 </a:solidFill>
               </a:rPr>
               <a:t>Latent Space</a:t>
@@ -7591,8 +7270,8 @@
           <a:chExt cx="0" cy="0"/>
         </a:xfrm>
       </p:grpSpPr>
-      <mc:AlternateContent xmlns:mc="http://schemas.openxmlformats.org/markup-compatibility/2006">
-        <mc:Choice xmlns:a14="http://schemas.microsoft.com/office/drawing/2010/main" Requires="a14">
+      <mc:AlternateContent xmlns:mc="http://schemas.openxmlformats.org/markup-compatibility/2006" xmlns:a14="http://schemas.microsoft.com/office/drawing/2010/main">
+        <mc:Choice Requires="a14">
           <p:sp>
             <p:nvSpPr>
               <p:cNvPr id="2" name="Content Placeholder 1" descr="xxx">
@@ -7681,7 +7360,7 @@
             </p:txBody>
           </p:sp>
         </mc:Choice>
-        <mc:Fallback>
+        <mc:Fallback xmlns="">
           <p:sp>
             <p:nvSpPr>
               <p:cNvPr id="2" name="Content Placeholder 1" descr="xxx">
@@ -7744,12 +7423,14 @@
           <a:p>
             <a:r>
               <a:rPr lang="en-US" dirty="0"/>
-              <a:t>Autoencoder: </a:t>
+              <a:t>Autoencoders (8): </a:t>
             </a:r>
             <a:r>
               <a:rPr lang="en-US" dirty="0">
                 <a:solidFill>
-                  <a:schemeClr val="accent1"/>
+                  <a:schemeClr val="accent1">
+                    <a:lumMod val="75000"/>
+                  </a:schemeClr>
                 </a:solidFill>
               </a:rPr>
               <a:t>Predictions</a:t>
@@ -7815,7 +7496,7 @@
         <p:cNvPr id="1" name="">
           <a:extLst>
             <a:ext uri="{FF2B5EF4-FFF2-40B4-BE49-F238E27FC236}">
-              <a16:creationId xmlns:a16="http://schemas.microsoft.com/office/drawing/2014/main" id="{42D7CE1E-C644-828C-8BB5-30BF147137CF}"/>
+              <a16:creationId xmlns:a16="http://schemas.microsoft.com/office/drawing/2014/main" id="{2A1E4D95-95BC-B8F1-D149-F57736D2C3BA}"/>
             </a:ext>
           </a:extLst>
         </p:cNvPr>
@@ -7832,10 +7513,143 @@
       </p:grpSpPr>
       <p:sp>
         <p:nvSpPr>
-          <p:cNvPr id="7" name="Title 6">
+          <p:cNvPr id="4" name="Title 3">
             <a:extLst>
               <a:ext uri="{FF2B5EF4-FFF2-40B4-BE49-F238E27FC236}">
-                <a16:creationId xmlns:a16="http://schemas.microsoft.com/office/drawing/2014/main" id="{F5556444-88BA-CD4E-25CE-6F7C7AA9F0B6}"/>
+                <a16:creationId xmlns:a16="http://schemas.microsoft.com/office/drawing/2014/main" id="{98DF852E-4060-2F42-00FC-1CCEDC6EA375}"/>
+              </a:ext>
+            </a:extLst>
+          </p:cNvPr>
+          <p:cNvSpPr>
+            <a:spLocks noGrp="1"/>
+          </p:cNvSpPr>
+          <p:nvPr>
+            <p:ph type="ctrTitle"/>
+          </p:nvPr>
+        </p:nvSpPr>
+        <p:spPr/>
+        <p:txBody>
+          <a:bodyPr/>
+          <a:lstStyle/>
+          <a:p>
+            <a:r>
+              <a:rPr lang="en-US" dirty="0"/>
+              <a:t>Convolutional Autoencoders (CAE)</a:t>
+            </a:r>
+            <a:endParaRPr lang="en-US" sz="2400" dirty="0">
+              <a:solidFill>
+                <a:srgbClr val="0033CC"/>
+              </a:solidFill>
+            </a:endParaRPr>
+          </a:p>
+        </p:txBody>
+      </p:sp>
+    </p:spTree>
+    <p:extLst>
+      <p:ext uri="{BB962C8B-B14F-4D97-AF65-F5344CB8AC3E}">
+        <p14:creationId xmlns:p14="http://schemas.microsoft.com/office/powerpoint/2010/main" val="1438551963"/>
+      </p:ext>
+    </p:extLst>
+  </p:cSld>
+  <p:clrMapOvr>
+    <a:masterClrMapping/>
+  </p:clrMapOvr>
+  <p:transition>
+    <p:fade/>
+  </p:transition>
+</p:sld>
+</file>
+
+<file path=ppt/slides/slide18.xml><?xml version="1.0" encoding="utf-8"?>
+<p:sld xmlns:a="http://schemas.openxmlformats.org/drawingml/2006/main" xmlns:r="http://schemas.openxmlformats.org/officeDocument/2006/relationships" xmlns:p="http://schemas.openxmlformats.org/presentationml/2006/main">
+  <p:cSld>
+    <p:spTree>
+      <p:nvGrpSpPr>
+        <p:cNvPr id="1" name=""/>
+        <p:cNvGrpSpPr/>
+        <p:nvPr/>
+      </p:nvGrpSpPr>
+      <p:grpSpPr>
+        <a:xfrm>
+          <a:off x="0" y="0"/>
+          <a:ext cx="0" cy="0"/>
+          <a:chOff x="0" y="0"/>
+          <a:chExt cx="0" cy="0"/>
+        </a:xfrm>
+      </p:grpSpPr>
+      <p:sp>
+        <p:nvSpPr>
+          <p:cNvPr id="4" name="Content Placeholder 3">
+            <a:extLst>
+              <a:ext uri="{FF2B5EF4-FFF2-40B4-BE49-F238E27FC236}">
+                <a16:creationId xmlns:a16="http://schemas.microsoft.com/office/drawing/2014/main" id="{D4FB97BE-B712-7756-FCD5-A227691F500E}"/>
+              </a:ext>
+            </a:extLst>
+          </p:cNvPr>
+          <p:cNvSpPr>
+            <a:spLocks noGrp="1"/>
+          </p:cNvSpPr>
+          <p:nvPr>
+            <p:ph sz="half" idx="1"/>
+          </p:nvPr>
+        </p:nvSpPr>
+        <p:spPr/>
+        <p:txBody>
+          <a:bodyPr/>
+          <a:lstStyle/>
+          <a:p>
+            <a:r>
+              <a:rPr lang="en-US" dirty="0"/>
+              <a:t>A convolutional autoencoder is simply an autoencoder that operates on 2-dimensional data, such as images.</a:t>
+            </a:r>
+          </a:p>
+          <a:p>
+            <a:endParaRPr lang="en-US" dirty="0"/>
+          </a:p>
+          <a:p>
+            <a:r>
+              <a:rPr lang="en-US" dirty="0"/>
+              <a:t>Suppose our goal is to create a compressed representation of galaxy images.</a:t>
+            </a:r>
+          </a:p>
+          <a:p>
+            <a:endParaRPr lang="en-US" dirty="0"/>
+          </a:p>
+          <a:p>
+            <a:r>
+              <a:rPr lang="en-US" dirty="0"/>
+              <a:t>This can be done using a CAE</a:t>
+            </a:r>
+            <a:br>
+              <a:rPr lang="en-US" dirty="0"/>
+            </a:br>
+            <a:r>
+              <a:rPr lang="en-US" dirty="0"/>
+              <a:t>with an encoder and a decoder</a:t>
+            </a:r>
+            <a:br>
+              <a:rPr lang="en-US" dirty="0"/>
+            </a:br>
+            <a:r>
+              <a:rPr lang="en-US" dirty="0"/>
+              <a:t>which, conceptually, are mirror</a:t>
+            </a:r>
+            <a:br>
+              <a:rPr lang="en-US" dirty="0"/>
+            </a:br>
+            <a:r>
+              <a:rPr lang="en-US" dirty="0"/>
+              <a:t>images of each other.</a:t>
+            </a:r>
+          </a:p>
+        </p:txBody>
+      </p:sp>
+      <p:sp>
+        <p:nvSpPr>
+          <p:cNvPr id="3" name="Title 2">
+            <a:extLst>
+              <a:ext uri="{FF2B5EF4-FFF2-40B4-BE49-F238E27FC236}">
+                <a16:creationId xmlns:a16="http://schemas.microsoft.com/office/drawing/2014/main" id="{3DA9A9B9-352C-4121-40A0-555006365DE9}"/>
               </a:ext>
             </a:extLst>
           </p:cNvPr>
@@ -7853,233 +7667,1993 @@
           <a:p>
             <a:r>
               <a:rPr lang="en-US" dirty="0"/>
-              <a:t>Summary</a:t>
-            </a:r>
-            <a:endParaRPr lang="en-US" dirty="0">
-              <a:solidFill>
-                <a:schemeClr val="accent1"/>
-              </a:solidFill>
-            </a:endParaRPr>
+              <a:t>Convolutional Autoencoders (1)</a:t>
+            </a:r>
           </a:p>
         </p:txBody>
       </p:sp>
-      <mc:AlternateContent xmlns:mc="http://schemas.openxmlformats.org/markup-compatibility/2006" xmlns:a14="http://schemas.microsoft.com/office/drawing/2010/main">
-        <mc:Choice Requires="a14">
-          <p:sp>
-            <p:nvSpPr>
-              <p:cNvPr id="8" name="Content Placeholder 7">
-                <a:extLst>
-                  <a:ext uri="{FF2B5EF4-FFF2-40B4-BE49-F238E27FC236}">
-                    <a16:creationId xmlns:a16="http://schemas.microsoft.com/office/drawing/2014/main" id="{C32B846A-7F3C-5809-5D05-66B4BFACE181}"/>
-                  </a:ext>
-                </a:extLst>
-              </p:cNvPr>
-              <p:cNvSpPr>
-                <a:spLocks noGrp="1"/>
-              </p:cNvSpPr>
-              <p:nvPr>
-                <p:ph idx="1"/>
-              </p:nvPr>
-            </p:nvSpPr>
-            <p:spPr/>
-            <p:txBody>
-              <a:bodyPr/>
-              <a:lstStyle/>
-              <a:p>
-                <a:r>
-                  <a:rPr lang="en-US" dirty="0"/>
-                  <a:t>An autoencoder is a model that implements the map </a:t>
-                </a:r>
-                <a:br>
-                  <a:rPr lang="en-US" b="0" i="1" dirty="0">
-                    <a:solidFill>
-                      <a:srgbClr val="0033CC"/>
-                    </a:solidFill>
-                    <a:latin typeface="Cambria Math" panose="02040503050406030204" pitchFamily="18" charset="0"/>
-                  </a:rPr>
-                </a:br>
-                <a14:m>
-                  <m:oMath xmlns:m="http://schemas.openxmlformats.org/officeDocument/2006/math">
-                    <m:r>
-                      <a:rPr lang="en-US" b="0" i="1" smtClean="0">
-                        <a:solidFill>
-                          <a:srgbClr val="0033CC"/>
-                        </a:solidFill>
-                        <a:latin typeface="Cambria Math" panose="02040503050406030204" pitchFamily="18" charset="0"/>
-                      </a:rPr>
-                      <m:t>𝑓</m:t>
-                    </m:r>
-                    <m:r>
-                      <a:rPr lang="en-US" b="0" i="1" smtClean="0">
-                        <a:solidFill>
-                          <a:srgbClr val="0033CC"/>
-                        </a:solidFill>
-                        <a:latin typeface="Cambria Math" panose="02040503050406030204" pitchFamily="18" charset="0"/>
-                      </a:rPr>
-                      <m:t>:</m:t>
-                    </m:r>
-                    <m:r>
-                      <a:rPr lang="en-US" b="0" i="1" smtClean="0">
-                        <a:solidFill>
-                          <a:srgbClr val="0033CC"/>
-                        </a:solidFill>
-                        <a:latin typeface="Cambria Math" panose="02040503050406030204" pitchFamily="18" charset="0"/>
-                      </a:rPr>
-                      <m:t>𝑥</m:t>
-                    </m:r>
-                    <m:r>
-                      <a:rPr lang="en-US" b="0" i="1" smtClean="0">
-                        <a:solidFill>
-                          <a:srgbClr val="0033CC"/>
-                        </a:solidFill>
-                        <a:latin typeface="Cambria Math" panose="02040503050406030204" pitchFamily="18" charset="0"/>
-                      </a:rPr>
-                      <m:t>→</m:t>
-                    </m:r>
-                    <m:r>
-                      <a:rPr lang="en-US" b="0" i="1" smtClean="0">
-                        <a:solidFill>
-                          <a:srgbClr val="0033CC"/>
-                        </a:solidFill>
-                        <a:latin typeface="Cambria Math" panose="02040503050406030204" pitchFamily="18" charset="0"/>
-                      </a:rPr>
-                      <m:t>𝑥</m:t>
-                    </m:r>
-                  </m:oMath>
-                </a14:m>
-                <a:r>
-                  <a:rPr lang="en-US" dirty="0">
-                    <a:solidFill>
-                      <a:srgbClr val="0033CC"/>
-                    </a:solidFill>
-                  </a:rPr>
-                  <a:t> </a:t>
-                </a:r>
-                <a:r>
-                  <a:rPr lang="en-US" dirty="0"/>
-                  <a:t>via a bottleneck called the </a:t>
-                </a:r>
-                <a:r>
-                  <a:rPr lang="en-US" dirty="0">
-                    <a:solidFill>
-                      <a:srgbClr val="0033CC"/>
-                    </a:solidFill>
-                  </a:rPr>
-                  <a:t>latent space </a:t>
-                </a:r>
-                <a:r>
-                  <a:rPr lang="en-US" dirty="0"/>
-                  <a:t>whose dimensionality is (usually) much smaller than that of the input space.</a:t>
-                </a:r>
-                <a:br>
-                  <a:rPr lang="en-US" dirty="0"/>
-                </a:br>
-                <a:endParaRPr lang="en-US" dirty="0"/>
-              </a:p>
-              <a:p>
-                <a:r>
-                  <a:rPr lang="en-US" dirty="0"/>
-                  <a:t>The applications include:</a:t>
-                </a:r>
-              </a:p>
-              <a:p>
-                <a:pPr marL="857250" lvl="1" indent="-457200">
-                  <a:buFont typeface="+mj-lt"/>
-                  <a:buAutoNum type="arabicPeriod"/>
-                </a:pPr>
-                <a:r>
-                  <a:rPr lang="en-US" dirty="0"/>
-                  <a:t>Data compression</a:t>
-                </a:r>
-              </a:p>
-              <a:p>
-                <a:pPr marL="857250" lvl="1" indent="-457200">
-                  <a:buFont typeface="+mj-lt"/>
-                  <a:buAutoNum type="arabicPeriod"/>
-                </a:pPr>
-                <a:r>
-                  <a:rPr lang="en-US" dirty="0"/>
-                  <a:t>Anomaly detection</a:t>
-                </a:r>
-              </a:p>
-              <a:p>
-                <a:pPr marL="857250" lvl="1" indent="-457200">
-                  <a:buFont typeface="+mj-lt"/>
-                  <a:buAutoNum type="arabicPeriod"/>
-                </a:pPr>
-                <a:r>
-                  <a:rPr lang="en-US" dirty="0"/>
-                  <a:t>Noise removal</a:t>
-                </a:r>
-              </a:p>
-              <a:p>
-                <a:endParaRPr lang="en-US" dirty="0"/>
-              </a:p>
-            </p:txBody>
-          </p:sp>
-        </mc:Choice>
-        <mc:Fallback xmlns="">
-          <p:sp>
-            <p:nvSpPr>
-              <p:cNvPr id="8" name="Content Placeholder 7">
-                <a:extLst>
-                  <a:ext uri="{FF2B5EF4-FFF2-40B4-BE49-F238E27FC236}">
-                    <a16:creationId xmlns:a16="http://schemas.microsoft.com/office/drawing/2014/main" id="{C32B846A-7F3C-5809-5D05-66B4BFACE181}"/>
-                  </a:ext>
-                </a:extLst>
-              </p:cNvPr>
-              <p:cNvSpPr>
-                <a:spLocks noGrp="1" noRot="1" noChangeAspect="1" noMove="1" noResize="1" noEditPoints="1" noAdjustHandles="1" noChangeArrowheads="1" noChangeShapeType="1" noTextEdit="1"/>
-              </p:cNvSpPr>
-              <p:nvPr>
-                <p:ph idx="1"/>
-              </p:nvPr>
-            </p:nvSpPr>
-            <p:spPr>
-              <a:blipFill>
-                <a:blip r:embed="rId2"/>
-                <a:stretch>
-                  <a:fillRect l="-1142" t="-1316"/>
-                </a:stretch>
-              </a:blipFill>
-            </p:spPr>
-            <p:txBody>
-              <a:bodyPr/>
-              <a:lstStyle/>
-              <a:p>
-                <a:r>
-                  <a:rPr lang="en-US">
-                    <a:noFill/>
-                  </a:rPr>
-                  <a:t> </a:t>
-                </a:r>
-              </a:p>
-            </p:txBody>
-          </p:sp>
-        </mc:Fallback>
-      </mc:AlternateContent>
+      <p:pic>
+        <p:nvPicPr>
+          <p:cNvPr id="6" name="Picture 5">
+            <a:extLst>
+              <a:ext uri="{FF2B5EF4-FFF2-40B4-BE49-F238E27FC236}">
+                <a16:creationId xmlns:a16="http://schemas.microsoft.com/office/drawing/2014/main" id="{B69FFC9F-148F-3450-8675-749BB65C8E59}"/>
+              </a:ext>
+            </a:extLst>
+          </p:cNvPr>
+          <p:cNvPicPr>
+            <a:picLocks noChangeAspect="1"/>
+          </p:cNvPicPr>
+          <p:nvPr/>
+        </p:nvPicPr>
+        <p:blipFill>
+          <a:blip r:embed="rId2"/>
+          <a:stretch>
+            <a:fillRect/>
+          </a:stretch>
+        </p:blipFill>
+        <p:spPr>
+          <a:xfrm>
+            <a:off x="5029200" y="3184525"/>
+            <a:ext cx="3657600" cy="2921000"/>
+          </a:xfrm>
+          <a:prstGeom prst="rect">
+            <a:avLst/>
+          </a:prstGeom>
+          <a:effectLst>
+            <a:outerShdw blurRad="50800" dist="38100" dir="2700000" algn="tl" rotWithShape="0">
+              <a:prstClr val="black">
+                <a:alpha val="40000"/>
+              </a:prstClr>
+            </a:outerShdw>
+          </a:effectLst>
+        </p:spPr>
+      </p:pic>
     </p:spTree>
     <p:extLst>
       <p:ext uri="{BB962C8B-B14F-4D97-AF65-F5344CB8AC3E}">
-        <p14:creationId xmlns:p14="http://schemas.microsoft.com/office/powerpoint/2010/main" val="3569935970"/>
+        <p14:creationId xmlns:p14="http://schemas.microsoft.com/office/powerpoint/2010/main" val="608569455"/>
       </p:ext>
     </p:extLst>
   </p:cSld>
   <p:clrMapOvr>
     <a:masterClrMapping/>
   </p:clrMapOvr>
-  <mc:AlternateContent xmlns:mc="http://schemas.openxmlformats.org/markup-compatibility/2006" xmlns:p14="http://schemas.microsoft.com/office/powerpoint/2010/main">
-    <mc:Choice Requires="p14">
-      <p:transition spd="med" p14:dur="700">
-        <p:fade/>
-      </p:transition>
-    </mc:Choice>
-    <mc:Fallback xmlns="">
-      <p:transition spd="med">
-        <p:fade/>
-      </p:transition>
-    </mc:Fallback>
-  </mc:AlternateContent>
+</p:sld>
+</file>
+
+<file path=ppt/slides/slide19.xml><?xml version="1.0" encoding="utf-8"?>
+<p:sld xmlns:a="http://schemas.openxmlformats.org/drawingml/2006/main" xmlns:r="http://schemas.openxmlformats.org/officeDocument/2006/relationships" xmlns:p="http://schemas.openxmlformats.org/presentationml/2006/main">
+  <p:cSld>
+    <p:spTree>
+      <p:nvGrpSpPr>
+        <p:cNvPr id="1" name=""/>
+        <p:cNvGrpSpPr/>
+        <p:nvPr/>
+      </p:nvGrpSpPr>
+      <p:grpSpPr>
+        <a:xfrm>
+          <a:off x="0" y="0"/>
+          <a:ext cx="0" cy="0"/>
+          <a:chOff x="0" y="0"/>
+          <a:chExt cx="0" cy="0"/>
+        </a:xfrm>
+      </p:grpSpPr>
+      <p:sp>
+        <p:nvSpPr>
+          <p:cNvPr id="2" name="Title 1">
+            <a:extLst>
+              <a:ext uri="{FF2B5EF4-FFF2-40B4-BE49-F238E27FC236}">
+                <a16:creationId xmlns:a16="http://schemas.microsoft.com/office/drawing/2014/main" id="{83DA47ED-C40F-9FDC-CF72-652A7415BB00}"/>
+              </a:ext>
+            </a:extLst>
+          </p:cNvPr>
+          <p:cNvSpPr>
+            <a:spLocks noGrp="1"/>
+          </p:cNvSpPr>
+          <p:nvPr>
+            <p:ph type="title"/>
+          </p:nvPr>
+        </p:nvSpPr>
+        <p:spPr>
+          <a:xfrm>
+            <a:off x="685800" y="228600"/>
+            <a:ext cx="7772400" cy="838200"/>
+          </a:xfrm>
+        </p:spPr>
+        <p:txBody>
+          <a:bodyPr/>
+          <a:lstStyle/>
+          <a:p>
+            <a:r>
+              <a:rPr lang="en-US" dirty="0"/>
+              <a:t>Convolutional Autoencoders (2)</a:t>
+            </a:r>
+          </a:p>
+        </p:txBody>
+      </p:sp>
+      <p:grpSp>
+        <p:nvGrpSpPr>
+          <p:cNvPr id="5" name="Group 4">
+            <a:extLst>
+              <a:ext uri="{FF2B5EF4-FFF2-40B4-BE49-F238E27FC236}">
+                <a16:creationId xmlns:a16="http://schemas.microsoft.com/office/drawing/2014/main" id="{1D7F3E21-3FC8-B922-4F69-B6DFC7D4D26A}"/>
+              </a:ext>
+            </a:extLst>
+          </p:cNvPr>
+          <p:cNvGrpSpPr/>
+          <p:nvPr/>
+        </p:nvGrpSpPr>
+        <p:grpSpPr>
+          <a:xfrm>
+            <a:off x="660828" y="2554605"/>
+            <a:ext cx="4413114" cy="2877953"/>
+            <a:chOff x="581100" y="1850531"/>
+            <a:chExt cx="6382671" cy="4162372"/>
+          </a:xfrm>
+        </p:grpSpPr>
+        <p:sp>
+          <p:nvSpPr>
+            <p:cNvPr id="65" name="Data 64">
+              <a:extLst>
+                <a:ext uri="{FF2B5EF4-FFF2-40B4-BE49-F238E27FC236}">
+                  <a16:creationId xmlns:a16="http://schemas.microsoft.com/office/drawing/2014/main" id="{3B7D1B51-2E30-5A5F-10EF-EF559132EE80}"/>
+                </a:ext>
+              </a:extLst>
+            </p:cNvPr>
+            <p:cNvSpPr/>
+            <p:nvPr/>
+          </p:nvSpPr>
+          <p:spPr>
+            <a:xfrm rot="16200000">
+              <a:off x="2033934" y="3398033"/>
+              <a:ext cx="1749791" cy="1147575"/>
+            </a:xfrm>
+            <a:prstGeom prst="flowChartInputOutput">
+              <a:avLst/>
+            </a:prstGeom>
+            <a:solidFill>
+              <a:srgbClr val="C00000">
+                <a:alpha val="51184"/>
+              </a:srgbClr>
+            </a:solidFill>
+            <a:effectLst>
+              <a:outerShdw blurRad="50800" dist="38100" dir="2700000" algn="tl" rotWithShape="0">
+                <a:prstClr val="black">
+                  <a:alpha val="40000"/>
+                </a:prstClr>
+              </a:outerShdw>
+            </a:effectLst>
+          </p:spPr>
+          <p:style>
+            <a:lnRef idx="2">
+              <a:schemeClr val="accent1">
+                <a:shade val="15000"/>
+              </a:schemeClr>
+            </a:lnRef>
+            <a:fillRef idx="1">
+              <a:schemeClr val="accent1"/>
+            </a:fillRef>
+            <a:effectRef idx="0">
+              <a:schemeClr val="accent1"/>
+            </a:effectRef>
+            <a:fontRef idx="minor">
+              <a:schemeClr val="lt1"/>
+            </a:fontRef>
+          </p:style>
+          <p:txBody>
+            <a:bodyPr rtlCol="0" anchor="ctr"/>
+            <a:lstStyle/>
+            <a:p>
+              <a:pPr algn="ctr"/>
+              <a:endParaRPr lang="en-US" sz="1800"/>
+            </a:p>
+          </p:txBody>
+        </p:sp>
+        <p:sp>
+          <p:nvSpPr>
+            <p:cNvPr id="59" name="Data 58">
+              <a:extLst>
+                <a:ext uri="{FF2B5EF4-FFF2-40B4-BE49-F238E27FC236}">
+                  <a16:creationId xmlns:a16="http://schemas.microsoft.com/office/drawing/2014/main" id="{33E62BC1-68C2-E765-4C74-0FF9A67042C2}"/>
+                </a:ext>
+              </a:extLst>
+            </p:cNvPr>
+            <p:cNvSpPr/>
+            <p:nvPr/>
+          </p:nvSpPr>
+          <p:spPr>
+            <a:xfrm rot="16200000">
+              <a:off x="250193" y="3662139"/>
+              <a:ext cx="2681671" cy="2019857"/>
+            </a:xfrm>
+            <a:prstGeom prst="flowChartInputOutput">
+              <a:avLst/>
+            </a:prstGeom>
+            <a:solidFill>
+              <a:schemeClr val="accent2">
+                <a:lumMod val="50000"/>
+                <a:alpha val="51184"/>
+              </a:schemeClr>
+            </a:solidFill>
+          </p:spPr>
+          <p:style>
+            <a:lnRef idx="2">
+              <a:schemeClr val="accent1">
+                <a:shade val="15000"/>
+              </a:schemeClr>
+            </a:lnRef>
+            <a:fillRef idx="1">
+              <a:schemeClr val="accent1"/>
+            </a:fillRef>
+            <a:effectRef idx="0">
+              <a:schemeClr val="accent1"/>
+            </a:effectRef>
+            <a:fontRef idx="minor">
+              <a:schemeClr val="lt1"/>
+            </a:fontRef>
+          </p:style>
+          <p:txBody>
+            <a:bodyPr rtlCol="0" anchor="ctr"/>
+            <a:lstStyle/>
+            <a:p>
+              <a:pPr algn="ctr"/>
+              <a:endParaRPr lang="en-US" sz="1800"/>
+            </a:p>
+          </p:txBody>
+        </p:sp>
+        <p:sp>
+          <p:nvSpPr>
+            <p:cNvPr id="57" name="Data 56">
+              <a:extLst>
+                <a:ext uri="{FF2B5EF4-FFF2-40B4-BE49-F238E27FC236}">
+                  <a16:creationId xmlns:a16="http://schemas.microsoft.com/office/drawing/2014/main" id="{995DCE3E-14D5-F288-4C93-1DA3D99C8F87}"/>
+                </a:ext>
+              </a:extLst>
+            </p:cNvPr>
+            <p:cNvSpPr/>
+            <p:nvPr/>
+          </p:nvSpPr>
+          <p:spPr>
+            <a:xfrm rot="16200000">
+              <a:off x="4055944" y="2565472"/>
+              <a:ext cx="788544" cy="489376"/>
+            </a:xfrm>
+            <a:prstGeom prst="flowChartInputOutput">
+              <a:avLst/>
+            </a:prstGeom>
+            <a:solidFill>
+              <a:srgbClr val="C00000">
+                <a:alpha val="51184"/>
+              </a:srgbClr>
+            </a:solidFill>
+            <a:effectLst>
+              <a:outerShdw blurRad="50800" dist="38100" dir="2700000" algn="tl" rotWithShape="0">
+                <a:prstClr val="black">
+                  <a:alpha val="40000"/>
+                </a:prstClr>
+              </a:outerShdw>
+            </a:effectLst>
+          </p:spPr>
+          <p:style>
+            <a:lnRef idx="2">
+              <a:schemeClr val="accent1">
+                <a:shade val="15000"/>
+              </a:schemeClr>
+            </a:lnRef>
+            <a:fillRef idx="1">
+              <a:schemeClr val="accent1"/>
+            </a:fillRef>
+            <a:effectRef idx="0">
+              <a:schemeClr val="accent1"/>
+            </a:effectRef>
+            <a:fontRef idx="minor">
+              <a:schemeClr val="lt1"/>
+            </a:fontRef>
+          </p:style>
+          <p:txBody>
+            <a:bodyPr rtlCol="0" anchor="ctr"/>
+            <a:lstStyle/>
+            <a:p>
+              <a:pPr algn="ctr"/>
+              <a:endParaRPr lang="en-US" sz="1800"/>
+            </a:p>
+          </p:txBody>
+        </p:sp>
+        <p:sp>
+          <p:nvSpPr>
+            <p:cNvPr id="47" name="Data 46">
+              <a:extLst>
+                <a:ext uri="{FF2B5EF4-FFF2-40B4-BE49-F238E27FC236}">
+                  <a16:creationId xmlns:a16="http://schemas.microsoft.com/office/drawing/2014/main" id="{95344A39-68C2-3CF2-7A92-675DE23DE72E}"/>
+                </a:ext>
+              </a:extLst>
+            </p:cNvPr>
+            <p:cNvSpPr/>
+            <p:nvPr/>
+          </p:nvSpPr>
+          <p:spPr>
+            <a:xfrm rot="16200000">
+              <a:off x="2998797" y="2918649"/>
+              <a:ext cx="1210437" cy="683624"/>
+            </a:xfrm>
+            <a:prstGeom prst="flowChartInputOutput">
+              <a:avLst/>
+            </a:prstGeom>
+            <a:solidFill>
+              <a:schemeClr val="accent1">
+                <a:lumMod val="75000"/>
+                <a:alpha val="51184"/>
+              </a:schemeClr>
+            </a:solidFill>
+            <a:effectLst>
+              <a:outerShdw blurRad="50800" dist="38100" dir="2700000" algn="tl" rotWithShape="0">
+                <a:prstClr val="black">
+                  <a:alpha val="40000"/>
+                </a:prstClr>
+              </a:outerShdw>
+            </a:effectLst>
+          </p:spPr>
+          <p:style>
+            <a:lnRef idx="2">
+              <a:schemeClr val="accent1">
+                <a:shade val="15000"/>
+              </a:schemeClr>
+            </a:lnRef>
+            <a:fillRef idx="1">
+              <a:schemeClr val="accent1"/>
+            </a:fillRef>
+            <a:effectRef idx="0">
+              <a:schemeClr val="accent1"/>
+            </a:effectRef>
+            <a:fontRef idx="minor">
+              <a:schemeClr val="lt1"/>
+            </a:fontRef>
+          </p:style>
+          <p:txBody>
+            <a:bodyPr rtlCol="0" anchor="ctr"/>
+            <a:lstStyle/>
+            <a:p>
+              <a:pPr algn="ctr"/>
+              <a:endParaRPr lang="en-US" sz="1800"/>
+            </a:p>
+          </p:txBody>
+        </p:sp>
+        <p:sp>
+          <p:nvSpPr>
+            <p:cNvPr id="40" name="Data 39">
+              <a:extLst>
+                <a:ext uri="{FF2B5EF4-FFF2-40B4-BE49-F238E27FC236}">
+                  <a16:creationId xmlns:a16="http://schemas.microsoft.com/office/drawing/2014/main" id="{73D2C67A-8A83-90C5-FD68-5E934C1D7F6D}"/>
+                </a:ext>
+              </a:extLst>
+            </p:cNvPr>
+            <p:cNvSpPr/>
+            <p:nvPr/>
+          </p:nvSpPr>
+          <p:spPr>
+            <a:xfrm rot="16200000">
+              <a:off x="4778518" y="1987333"/>
+              <a:ext cx="582448" cy="308844"/>
+            </a:xfrm>
+            <a:prstGeom prst="flowChartInputOutput">
+              <a:avLst/>
+            </a:prstGeom>
+            <a:solidFill>
+              <a:schemeClr val="accent1">
+                <a:lumMod val="75000"/>
+                <a:alpha val="51184"/>
+              </a:schemeClr>
+            </a:solidFill>
+          </p:spPr>
+          <p:style>
+            <a:lnRef idx="2">
+              <a:schemeClr val="accent1">
+                <a:shade val="15000"/>
+              </a:schemeClr>
+            </a:lnRef>
+            <a:fillRef idx="1">
+              <a:schemeClr val="accent1"/>
+            </a:fillRef>
+            <a:effectRef idx="0">
+              <a:schemeClr val="accent1"/>
+            </a:effectRef>
+            <a:fontRef idx="minor">
+              <a:schemeClr val="lt1"/>
+            </a:fontRef>
+          </p:style>
+          <p:txBody>
+            <a:bodyPr rtlCol="0" anchor="ctr"/>
+            <a:lstStyle/>
+            <a:p>
+              <a:pPr algn="ctr"/>
+              <a:endParaRPr lang="en-US" sz="1800"/>
+            </a:p>
+          </p:txBody>
+        </p:sp>
+        <p:sp>
+          <p:nvSpPr>
+            <p:cNvPr id="23" name="TextBox 22">
+              <a:extLst>
+                <a:ext uri="{FF2B5EF4-FFF2-40B4-BE49-F238E27FC236}">
+                  <a16:creationId xmlns:a16="http://schemas.microsoft.com/office/drawing/2014/main" id="{3A8AC778-198E-D24E-27E6-2D00202DB2AA}"/>
+                </a:ext>
+              </a:extLst>
+            </p:cNvPr>
+            <p:cNvSpPr txBox="1"/>
+            <p:nvPr/>
+          </p:nvSpPr>
+          <p:spPr>
+            <a:xfrm>
+              <a:off x="2614389" y="5471257"/>
+              <a:ext cx="1306768" cy="415498"/>
+            </a:xfrm>
+            <a:prstGeom prst="rect">
+              <a:avLst/>
+            </a:prstGeom>
+            <a:noFill/>
+          </p:spPr>
+          <p:txBody>
+            <a:bodyPr wrap="none" rtlCol="0">
+              <a:spAutoFit/>
+            </a:bodyPr>
+            <a:lstStyle/>
+            <a:p>
+              <a:r>
+                <a:rPr lang="en-US" sz="2100" dirty="0">
+                  <a:latin typeface="Times New Roman" panose="02020603050405020304" pitchFamily="18" charset="0"/>
+                  <a:cs typeface="Times New Roman" panose="02020603050405020304" pitchFamily="18" charset="0"/>
+                </a:rPr>
+                <a:t>(3, 96, 96)</a:t>
+              </a:r>
+            </a:p>
+          </p:txBody>
+        </p:sp>
+        <p:sp>
+          <p:nvSpPr>
+            <p:cNvPr id="24" name="TextBox 23">
+              <a:extLst>
+                <a:ext uri="{FF2B5EF4-FFF2-40B4-BE49-F238E27FC236}">
+                  <a16:creationId xmlns:a16="http://schemas.microsoft.com/office/drawing/2014/main" id="{2544DD86-DDC7-9C25-4131-6E5A7F04ABF2}"/>
+                </a:ext>
+              </a:extLst>
+            </p:cNvPr>
+            <p:cNvSpPr txBox="1"/>
+            <p:nvPr/>
+          </p:nvSpPr>
+          <p:spPr>
+            <a:xfrm>
+              <a:off x="3482618" y="4293875"/>
+              <a:ext cx="1889974" cy="600933"/>
+            </a:xfrm>
+            <a:prstGeom prst="rect">
+              <a:avLst/>
+            </a:prstGeom>
+            <a:noFill/>
+          </p:spPr>
+          <p:txBody>
+            <a:bodyPr wrap="none" rtlCol="0">
+              <a:spAutoFit/>
+            </a:bodyPr>
+            <a:lstStyle/>
+            <a:p>
+              <a:r>
+                <a:rPr lang="en-US" sz="2100" dirty="0">
+                  <a:latin typeface="Times New Roman" panose="02020603050405020304" pitchFamily="18" charset="0"/>
+                  <a:cs typeface="Times New Roman" panose="02020603050405020304" pitchFamily="18" charset="0"/>
+                </a:rPr>
+                <a:t>(6, 48, 48)</a:t>
+              </a:r>
+            </a:p>
+          </p:txBody>
+        </p:sp>
+        <p:sp>
+          <p:nvSpPr>
+            <p:cNvPr id="25" name="TextBox 24">
+              <a:extLst>
+                <a:ext uri="{FF2B5EF4-FFF2-40B4-BE49-F238E27FC236}">
+                  <a16:creationId xmlns:a16="http://schemas.microsoft.com/office/drawing/2014/main" id="{52639917-AF79-FDD2-7DB8-860679299320}"/>
+                </a:ext>
+              </a:extLst>
+            </p:cNvPr>
+            <p:cNvSpPr txBox="1"/>
+            <p:nvPr/>
+          </p:nvSpPr>
+          <p:spPr>
+            <a:xfrm>
+              <a:off x="3927488" y="3324325"/>
+              <a:ext cx="2084720" cy="600933"/>
+            </a:xfrm>
+            <a:prstGeom prst="rect">
+              <a:avLst/>
+            </a:prstGeom>
+            <a:noFill/>
+          </p:spPr>
+          <p:txBody>
+            <a:bodyPr wrap="none" rtlCol="0">
+              <a:spAutoFit/>
+            </a:bodyPr>
+            <a:lstStyle/>
+            <a:p>
+              <a:r>
+                <a:rPr lang="en-US" sz="2100" dirty="0">
+                  <a:latin typeface="Times New Roman" panose="02020603050405020304" pitchFamily="18" charset="0"/>
+                  <a:cs typeface="Times New Roman" panose="02020603050405020304" pitchFamily="18" charset="0"/>
+                </a:rPr>
+                <a:t>(12, 24, 24)</a:t>
+              </a:r>
+            </a:p>
+          </p:txBody>
+        </p:sp>
+        <p:sp>
+          <p:nvSpPr>
+            <p:cNvPr id="26" name="TextBox 25">
+              <a:extLst>
+                <a:ext uri="{FF2B5EF4-FFF2-40B4-BE49-F238E27FC236}">
+                  <a16:creationId xmlns:a16="http://schemas.microsoft.com/office/drawing/2014/main" id="{F6B3E995-95AC-1B63-D12F-97E804C33D83}"/>
+                </a:ext>
+              </a:extLst>
+            </p:cNvPr>
+            <p:cNvSpPr txBox="1"/>
+            <p:nvPr/>
+          </p:nvSpPr>
+          <p:spPr>
+            <a:xfrm>
+              <a:off x="4734059" y="2685400"/>
+              <a:ext cx="2084720" cy="600933"/>
+            </a:xfrm>
+            <a:prstGeom prst="rect">
+              <a:avLst/>
+            </a:prstGeom>
+            <a:noFill/>
+          </p:spPr>
+          <p:txBody>
+            <a:bodyPr wrap="none" rtlCol="0">
+              <a:spAutoFit/>
+            </a:bodyPr>
+            <a:lstStyle/>
+            <a:p>
+              <a:r>
+                <a:rPr lang="en-US" sz="2100" dirty="0">
+                  <a:latin typeface="Times New Roman" panose="02020603050405020304" pitchFamily="18" charset="0"/>
+                  <a:cs typeface="Times New Roman" panose="02020603050405020304" pitchFamily="18" charset="0"/>
+                </a:rPr>
+                <a:t>(24, 12, 12)</a:t>
+              </a:r>
+            </a:p>
+          </p:txBody>
+        </p:sp>
+        <p:sp>
+          <p:nvSpPr>
+            <p:cNvPr id="27" name="TextBox 26">
+              <a:extLst>
+                <a:ext uri="{FF2B5EF4-FFF2-40B4-BE49-F238E27FC236}">
+                  <a16:creationId xmlns:a16="http://schemas.microsoft.com/office/drawing/2014/main" id="{4860710B-C7FC-7F07-146F-668EC338DCBF}"/>
+                </a:ext>
+              </a:extLst>
+            </p:cNvPr>
+            <p:cNvSpPr txBox="1"/>
+            <p:nvPr/>
+          </p:nvSpPr>
+          <p:spPr>
+            <a:xfrm>
+              <a:off x="5268544" y="2054310"/>
+              <a:ext cx="1695227" cy="600933"/>
+            </a:xfrm>
+            <a:prstGeom prst="rect">
+              <a:avLst/>
+            </a:prstGeom>
+            <a:noFill/>
+          </p:spPr>
+          <p:txBody>
+            <a:bodyPr wrap="none" rtlCol="0">
+              <a:spAutoFit/>
+            </a:bodyPr>
+            <a:lstStyle/>
+            <a:p>
+              <a:r>
+                <a:rPr lang="en-US" sz="2100" dirty="0">
+                  <a:latin typeface="Times New Roman" panose="02020603050405020304" pitchFamily="18" charset="0"/>
+                  <a:cs typeface="Times New Roman" panose="02020603050405020304" pitchFamily="18" charset="0"/>
+                </a:rPr>
+                <a:t>(16, 6, 6)</a:t>
+              </a:r>
+            </a:p>
+          </p:txBody>
+        </p:sp>
+        <p:sp>
+          <p:nvSpPr>
+            <p:cNvPr id="28" name="Oval 27">
+              <a:extLst>
+                <a:ext uri="{FF2B5EF4-FFF2-40B4-BE49-F238E27FC236}">
+                  <a16:creationId xmlns:a16="http://schemas.microsoft.com/office/drawing/2014/main" id="{F007FC06-E61D-30D8-1545-66B644D48D54}"/>
+                </a:ext>
+              </a:extLst>
+            </p:cNvPr>
+            <p:cNvSpPr/>
+            <p:nvPr/>
+          </p:nvSpPr>
+          <p:spPr>
+            <a:xfrm>
+              <a:off x="2629227" y="3755472"/>
+              <a:ext cx="412560" cy="436955"/>
+            </a:xfrm>
+            <a:prstGeom prst="ellipse">
+              <a:avLst/>
+            </a:prstGeom>
+            <a:gradFill>
+              <a:gsLst>
+                <a:gs pos="0">
+                  <a:schemeClr val="accent2">
+                    <a:lumMod val="0"/>
+                    <a:lumOff val="100000"/>
+                  </a:schemeClr>
+                </a:gs>
+                <a:gs pos="35000">
+                  <a:schemeClr val="accent2">
+                    <a:lumMod val="0"/>
+                    <a:lumOff val="100000"/>
+                  </a:schemeClr>
+                </a:gs>
+                <a:gs pos="100000">
+                  <a:schemeClr val="accent2">
+                    <a:lumMod val="100000"/>
+                  </a:schemeClr>
+                </a:gs>
+              </a:gsLst>
+              <a:path path="circle">
+                <a:fillToRect l="50000" t="-80000" r="50000" b="180000"/>
+              </a:path>
+            </a:gradFill>
+          </p:spPr>
+          <p:style>
+            <a:lnRef idx="2">
+              <a:schemeClr val="accent1">
+                <a:shade val="15000"/>
+              </a:schemeClr>
+            </a:lnRef>
+            <a:fillRef idx="1">
+              <a:schemeClr val="accent1"/>
+            </a:fillRef>
+            <a:effectRef idx="0">
+              <a:schemeClr val="accent1"/>
+            </a:effectRef>
+            <a:fontRef idx="minor">
+              <a:schemeClr val="lt1"/>
+            </a:fontRef>
+          </p:style>
+          <p:txBody>
+            <a:bodyPr rtlCol="0" anchor="ctr"/>
+            <a:lstStyle/>
+            <a:p>
+              <a:pPr algn="ctr"/>
+              <a:endParaRPr lang="en-US" sz="1800"/>
+            </a:p>
+          </p:txBody>
+        </p:sp>
+        <p:sp>
+          <p:nvSpPr>
+            <p:cNvPr id="29" name="Oval 28">
+              <a:extLst>
+                <a:ext uri="{FF2B5EF4-FFF2-40B4-BE49-F238E27FC236}">
+                  <a16:creationId xmlns:a16="http://schemas.microsoft.com/office/drawing/2014/main" id="{C0C04F78-9B16-14A0-D6C8-EF753D9C5A52}"/>
+                </a:ext>
+              </a:extLst>
+            </p:cNvPr>
+            <p:cNvSpPr/>
+            <p:nvPr/>
+          </p:nvSpPr>
+          <p:spPr>
+            <a:xfrm>
+              <a:off x="3397734" y="3058817"/>
+              <a:ext cx="412560" cy="436955"/>
+            </a:xfrm>
+            <a:prstGeom prst="ellipse">
+              <a:avLst/>
+            </a:prstGeom>
+            <a:gradFill>
+              <a:gsLst>
+                <a:gs pos="0">
+                  <a:schemeClr val="accent2">
+                    <a:lumMod val="0"/>
+                    <a:lumOff val="100000"/>
+                  </a:schemeClr>
+                </a:gs>
+                <a:gs pos="35000">
+                  <a:schemeClr val="accent2">
+                    <a:lumMod val="0"/>
+                    <a:lumOff val="100000"/>
+                  </a:schemeClr>
+                </a:gs>
+                <a:gs pos="100000">
+                  <a:schemeClr val="accent2">
+                    <a:lumMod val="100000"/>
+                  </a:schemeClr>
+                </a:gs>
+              </a:gsLst>
+              <a:path path="circle">
+                <a:fillToRect l="50000" t="-80000" r="50000" b="180000"/>
+              </a:path>
+            </a:gradFill>
+          </p:spPr>
+          <p:style>
+            <a:lnRef idx="2">
+              <a:schemeClr val="accent1">
+                <a:shade val="15000"/>
+              </a:schemeClr>
+            </a:lnRef>
+            <a:fillRef idx="1">
+              <a:schemeClr val="accent1"/>
+            </a:fillRef>
+            <a:effectRef idx="0">
+              <a:schemeClr val="accent1"/>
+            </a:effectRef>
+            <a:fontRef idx="minor">
+              <a:schemeClr val="lt1"/>
+            </a:fontRef>
+          </p:style>
+          <p:txBody>
+            <a:bodyPr rtlCol="0" anchor="ctr"/>
+            <a:lstStyle/>
+            <a:p>
+              <a:pPr algn="ctr"/>
+              <a:endParaRPr lang="en-US" sz="1800"/>
+            </a:p>
+          </p:txBody>
+        </p:sp>
+        <p:sp>
+          <p:nvSpPr>
+            <p:cNvPr id="30" name="Oval 29">
+              <a:extLst>
+                <a:ext uri="{FF2B5EF4-FFF2-40B4-BE49-F238E27FC236}">
+                  <a16:creationId xmlns:a16="http://schemas.microsoft.com/office/drawing/2014/main" id="{3321C1A1-F48D-B5C4-D684-39999012B4AA}"/>
+                </a:ext>
+              </a:extLst>
+            </p:cNvPr>
+            <p:cNvSpPr/>
+            <p:nvPr/>
+          </p:nvSpPr>
+          <p:spPr>
+            <a:xfrm>
+              <a:off x="3974789" y="2645462"/>
+              <a:ext cx="412560" cy="436955"/>
+            </a:xfrm>
+            <a:prstGeom prst="ellipse">
+              <a:avLst/>
+            </a:prstGeom>
+            <a:gradFill>
+              <a:gsLst>
+                <a:gs pos="0">
+                  <a:schemeClr val="accent2">
+                    <a:lumMod val="0"/>
+                    <a:lumOff val="100000"/>
+                  </a:schemeClr>
+                </a:gs>
+                <a:gs pos="35000">
+                  <a:schemeClr val="accent2">
+                    <a:lumMod val="0"/>
+                    <a:lumOff val="100000"/>
+                  </a:schemeClr>
+                </a:gs>
+                <a:gs pos="100000">
+                  <a:schemeClr val="accent2">
+                    <a:lumMod val="100000"/>
+                  </a:schemeClr>
+                </a:gs>
+              </a:gsLst>
+              <a:path path="circle">
+                <a:fillToRect l="50000" t="-80000" r="50000" b="180000"/>
+              </a:path>
+            </a:gradFill>
+          </p:spPr>
+          <p:style>
+            <a:lnRef idx="2">
+              <a:schemeClr val="accent1">
+                <a:shade val="15000"/>
+              </a:schemeClr>
+            </a:lnRef>
+            <a:fillRef idx="1">
+              <a:schemeClr val="accent1"/>
+            </a:fillRef>
+            <a:effectRef idx="0">
+              <a:schemeClr val="accent1"/>
+            </a:effectRef>
+            <a:fontRef idx="minor">
+              <a:schemeClr val="lt1"/>
+            </a:fontRef>
+          </p:style>
+          <p:txBody>
+            <a:bodyPr rtlCol="0" anchor="ctr"/>
+            <a:lstStyle/>
+            <a:p>
+              <a:pPr algn="ctr"/>
+              <a:endParaRPr lang="en-US" sz="1800"/>
+            </a:p>
+          </p:txBody>
+        </p:sp>
+        <p:sp>
+          <p:nvSpPr>
+            <p:cNvPr id="31" name="Oval 30">
+              <a:extLst>
+                <a:ext uri="{FF2B5EF4-FFF2-40B4-BE49-F238E27FC236}">
+                  <a16:creationId xmlns:a16="http://schemas.microsoft.com/office/drawing/2014/main" id="{C8DF2EFC-B78B-5F21-E224-52A6D18FD962}"/>
+                </a:ext>
+              </a:extLst>
+            </p:cNvPr>
+            <p:cNvSpPr/>
+            <p:nvPr/>
+          </p:nvSpPr>
+          <p:spPr>
+            <a:xfrm>
+              <a:off x="4635570" y="2106231"/>
+              <a:ext cx="412560" cy="436955"/>
+            </a:xfrm>
+            <a:prstGeom prst="ellipse">
+              <a:avLst/>
+            </a:prstGeom>
+            <a:gradFill>
+              <a:gsLst>
+                <a:gs pos="0">
+                  <a:schemeClr val="accent2">
+                    <a:lumMod val="0"/>
+                    <a:lumOff val="100000"/>
+                  </a:schemeClr>
+                </a:gs>
+                <a:gs pos="35000">
+                  <a:schemeClr val="accent2">
+                    <a:lumMod val="0"/>
+                    <a:lumOff val="100000"/>
+                  </a:schemeClr>
+                </a:gs>
+                <a:gs pos="100000">
+                  <a:schemeClr val="accent2">
+                    <a:lumMod val="100000"/>
+                  </a:schemeClr>
+                </a:gs>
+              </a:gsLst>
+              <a:path path="circle">
+                <a:fillToRect l="50000" t="-80000" r="50000" b="180000"/>
+              </a:path>
+            </a:gradFill>
+          </p:spPr>
+          <p:style>
+            <a:lnRef idx="2">
+              <a:schemeClr val="accent1">
+                <a:shade val="15000"/>
+              </a:schemeClr>
+            </a:lnRef>
+            <a:fillRef idx="1">
+              <a:schemeClr val="accent1"/>
+            </a:fillRef>
+            <a:effectRef idx="0">
+              <a:schemeClr val="accent1"/>
+            </a:effectRef>
+            <a:fontRef idx="minor">
+              <a:schemeClr val="lt1"/>
+            </a:fontRef>
+          </p:style>
+          <p:txBody>
+            <a:bodyPr rtlCol="0" anchor="ctr"/>
+            <a:lstStyle/>
+            <a:p>
+              <a:pPr algn="ctr"/>
+              <a:endParaRPr lang="en-US" sz="1800"/>
+            </a:p>
+          </p:txBody>
+        </p:sp>
+      </p:grpSp>
+      <p:sp>
+        <p:nvSpPr>
+          <p:cNvPr id="81" name="TextBox 80">
+            <a:extLst>
+              <a:ext uri="{FF2B5EF4-FFF2-40B4-BE49-F238E27FC236}">
+                <a16:creationId xmlns:a16="http://schemas.microsoft.com/office/drawing/2014/main" id="{1A2EBAE2-F78D-F68E-ABFD-80372FDDEFC6}"/>
+              </a:ext>
+            </a:extLst>
+          </p:cNvPr>
+          <p:cNvSpPr txBox="1"/>
+          <p:nvPr/>
+        </p:nvSpPr>
+        <p:spPr>
+          <a:xfrm>
+            <a:off x="951890" y="2571570"/>
+            <a:ext cx="1295547" cy="461665"/>
+          </a:xfrm>
+          <a:prstGeom prst="rect">
+            <a:avLst/>
+          </a:prstGeom>
+          <a:noFill/>
+        </p:spPr>
+        <p:txBody>
+          <a:bodyPr wrap="none" rtlCol="0">
+            <a:spAutoFit/>
+          </a:bodyPr>
+          <a:lstStyle/>
+          <a:p>
+            <a:r>
+              <a:rPr lang="en-US" b="1" dirty="0">
+                <a:solidFill>
+                  <a:srgbClr val="0033CC"/>
+                </a:solidFill>
+              </a:rPr>
+              <a:t>Encoder</a:t>
+            </a:r>
+          </a:p>
+        </p:txBody>
+      </p:sp>
+      <p:sp>
+        <p:nvSpPr>
+          <p:cNvPr id="82" name="TextBox 81">
+            <a:extLst>
+              <a:ext uri="{FF2B5EF4-FFF2-40B4-BE49-F238E27FC236}">
+                <a16:creationId xmlns:a16="http://schemas.microsoft.com/office/drawing/2014/main" id="{B4739420-5EA3-73B3-B5DE-CA41963EC4AB}"/>
+              </a:ext>
+            </a:extLst>
+          </p:cNvPr>
+          <p:cNvSpPr txBox="1"/>
+          <p:nvPr/>
+        </p:nvSpPr>
+        <p:spPr>
+          <a:xfrm>
+            <a:off x="6909854" y="4198542"/>
+            <a:ext cx="1277914" cy="461665"/>
+          </a:xfrm>
+          <a:prstGeom prst="rect">
+            <a:avLst/>
+          </a:prstGeom>
+          <a:noFill/>
+        </p:spPr>
+        <p:txBody>
+          <a:bodyPr wrap="none" rtlCol="0">
+            <a:spAutoFit/>
+          </a:bodyPr>
+          <a:lstStyle/>
+          <a:p>
+            <a:r>
+              <a:rPr lang="en-US" b="1" dirty="0">
+                <a:solidFill>
+                  <a:srgbClr val="0033CC"/>
+                </a:solidFill>
+              </a:rPr>
+              <a:t>Decoder</a:t>
+            </a:r>
+          </a:p>
+        </p:txBody>
+      </p:sp>
+      <p:sp>
+        <p:nvSpPr>
+          <p:cNvPr id="83" name="TextBox 82">
+            <a:extLst>
+              <a:ext uri="{FF2B5EF4-FFF2-40B4-BE49-F238E27FC236}">
+                <a16:creationId xmlns:a16="http://schemas.microsoft.com/office/drawing/2014/main" id="{66153096-9EA7-ACAE-5289-118D7E8EFA1B}"/>
+              </a:ext>
+            </a:extLst>
+          </p:cNvPr>
+          <p:cNvSpPr txBox="1"/>
+          <p:nvPr/>
+        </p:nvSpPr>
+        <p:spPr>
+          <a:xfrm>
+            <a:off x="4018431" y="2209800"/>
+            <a:ext cx="1851789" cy="461665"/>
+          </a:xfrm>
+          <a:prstGeom prst="rect">
+            <a:avLst/>
+          </a:prstGeom>
+          <a:noFill/>
+        </p:spPr>
+        <p:txBody>
+          <a:bodyPr wrap="none" rtlCol="0">
+            <a:spAutoFit/>
+          </a:bodyPr>
+          <a:lstStyle/>
+          <a:p>
+            <a:r>
+              <a:rPr lang="en-US" b="1" dirty="0">
+                <a:solidFill>
+                  <a:srgbClr val="0033CC"/>
+                </a:solidFill>
+              </a:rPr>
+              <a:t>Latent space</a:t>
+            </a:r>
+          </a:p>
+        </p:txBody>
+      </p:sp>
+      <p:grpSp>
+        <p:nvGrpSpPr>
+          <p:cNvPr id="84" name="Group 83">
+            <a:extLst>
+              <a:ext uri="{FF2B5EF4-FFF2-40B4-BE49-F238E27FC236}">
+                <a16:creationId xmlns:a16="http://schemas.microsoft.com/office/drawing/2014/main" id="{6E70ECF9-C6F0-092C-0EA1-7AC7647A50A7}"/>
+              </a:ext>
+            </a:extLst>
+          </p:cNvPr>
+          <p:cNvGrpSpPr/>
+          <p:nvPr/>
+        </p:nvGrpSpPr>
+        <p:grpSpPr>
+          <a:xfrm>
+            <a:off x="705193" y="1447800"/>
+            <a:ext cx="4647173" cy="436955"/>
+            <a:chOff x="705193" y="1589668"/>
+            <a:chExt cx="4647173" cy="436955"/>
+          </a:xfrm>
+        </p:grpSpPr>
+        <p:sp>
+          <p:nvSpPr>
+            <p:cNvPr id="85" name="Oval 84">
+              <a:extLst>
+                <a:ext uri="{FF2B5EF4-FFF2-40B4-BE49-F238E27FC236}">
+                  <a16:creationId xmlns:a16="http://schemas.microsoft.com/office/drawing/2014/main" id="{4D8EB524-DD64-FFF4-FF7B-989EB6F52297}"/>
+                </a:ext>
+              </a:extLst>
+            </p:cNvPr>
+            <p:cNvSpPr/>
+            <p:nvPr/>
+          </p:nvSpPr>
+          <p:spPr>
+            <a:xfrm>
+              <a:off x="705193" y="1589668"/>
+              <a:ext cx="412560" cy="436955"/>
+            </a:xfrm>
+            <a:prstGeom prst="ellipse">
+              <a:avLst/>
+            </a:prstGeom>
+            <a:gradFill>
+              <a:gsLst>
+                <a:gs pos="0">
+                  <a:schemeClr val="accent2">
+                    <a:lumMod val="0"/>
+                    <a:lumOff val="100000"/>
+                  </a:schemeClr>
+                </a:gs>
+                <a:gs pos="35000">
+                  <a:schemeClr val="accent2">
+                    <a:lumMod val="0"/>
+                    <a:lumOff val="100000"/>
+                  </a:schemeClr>
+                </a:gs>
+                <a:gs pos="100000">
+                  <a:schemeClr val="accent2">
+                    <a:lumMod val="100000"/>
+                  </a:schemeClr>
+                </a:gs>
+              </a:gsLst>
+              <a:path path="circle">
+                <a:fillToRect l="50000" t="-80000" r="50000" b="180000"/>
+              </a:path>
+            </a:gradFill>
+          </p:spPr>
+          <p:style>
+            <a:lnRef idx="2">
+              <a:schemeClr val="accent1">
+                <a:shade val="15000"/>
+              </a:schemeClr>
+            </a:lnRef>
+            <a:fillRef idx="1">
+              <a:schemeClr val="accent1"/>
+            </a:fillRef>
+            <a:effectRef idx="0">
+              <a:schemeClr val="accent1"/>
+            </a:effectRef>
+            <a:fontRef idx="minor">
+              <a:schemeClr val="lt1"/>
+            </a:fontRef>
+          </p:style>
+          <p:txBody>
+            <a:bodyPr rtlCol="0" anchor="ctr"/>
+            <a:lstStyle/>
+            <a:p>
+              <a:pPr algn="ctr"/>
+              <a:endParaRPr lang="en-US" sz="1800"/>
+            </a:p>
+          </p:txBody>
+        </p:sp>
+        <p:sp>
+          <p:nvSpPr>
+            <p:cNvPr id="86" name="TextBox 85">
+              <a:extLst>
+                <a:ext uri="{FF2B5EF4-FFF2-40B4-BE49-F238E27FC236}">
+                  <a16:creationId xmlns:a16="http://schemas.microsoft.com/office/drawing/2014/main" id="{7E1925D2-6EC5-AB91-E652-EE7627611CEF}"/>
+                </a:ext>
+              </a:extLst>
+            </p:cNvPr>
+            <p:cNvSpPr txBox="1"/>
+            <p:nvPr/>
+          </p:nvSpPr>
+          <p:spPr>
+            <a:xfrm>
+              <a:off x="1148971" y="1589668"/>
+              <a:ext cx="4203395" cy="415498"/>
+            </a:xfrm>
+            <a:prstGeom prst="rect">
+              <a:avLst/>
+            </a:prstGeom>
+            <a:noFill/>
+          </p:spPr>
+          <p:txBody>
+            <a:bodyPr wrap="none" rtlCol="0">
+              <a:spAutoFit/>
+            </a:bodyPr>
+            <a:lstStyle/>
+            <a:p>
+              <a:r>
+                <a:rPr lang="en-US" sz="2100" b="1" dirty="0">
+                  <a:latin typeface="Courier New" panose="02070309020205020404" pitchFamily="49" charset="0"/>
+                  <a:cs typeface="Courier New" panose="02070309020205020404" pitchFamily="49" charset="0"/>
+                </a:rPr>
+                <a:t>MaxPool2d</a:t>
+              </a:r>
+              <a:r>
+                <a:rPr lang="en-US" sz="2100" b="1" dirty="0">
+                  <a:latin typeface="Times New Roman" panose="02020603050405020304" pitchFamily="18" charset="0"/>
+                  <a:cs typeface="Times New Roman" panose="02020603050405020304" pitchFamily="18" charset="0"/>
+                </a:rPr>
+                <a:t>( </a:t>
+              </a:r>
+              <a:r>
+                <a:rPr lang="en-US" sz="2100" b="1" dirty="0" err="1">
+                  <a:latin typeface="Courier New" panose="02070309020205020404" pitchFamily="49" charset="0"/>
+                  <a:cs typeface="Courier New" panose="02070309020205020404" pitchFamily="49" charset="0"/>
+                </a:rPr>
+                <a:t>ReLU</a:t>
+              </a:r>
+              <a:r>
+                <a:rPr lang="en-US" sz="2100" b="1" dirty="0">
+                  <a:latin typeface="Times New Roman" panose="02020603050405020304" pitchFamily="18" charset="0"/>
+                  <a:cs typeface="Times New Roman" panose="02020603050405020304" pitchFamily="18" charset="0"/>
+                </a:rPr>
+                <a:t>( </a:t>
+              </a:r>
+              <a:r>
+                <a:rPr lang="en-US" sz="2100" b="1" dirty="0">
+                  <a:latin typeface="Courier New" panose="02070309020205020404" pitchFamily="49" charset="0"/>
+                  <a:cs typeface="Courier New" panose="02070309020205020404" pitchFamily="49" charset="0"/>
+                </a:rPr>
+                <a:t>Conv2d</a:t>
+              </a:r>
+              <a:r>
+                <a:rPr lang="en-US" sz="2100" b="1" dirty="0">
+                  <a:latin typeface="Times New Roman" panose="02020603050405020304" pitchFamily="18" charset="0"/>
+                  <a:cs typeface="Times New Roman" panose="02020603050405020304" pitchFamily="18" charset="0"/>
+                </a:rPr>
+                <a:t>(</a:t>
+              </a:r>
+              <a:r>
+                <a:rPr lang="en-US" sz="2100" b="1" i="1" dirty="0">
+                  <a:latin typeface="Times New Roman" panose="02020603050405020304" pitchFamily="18" charset="0"/>
+                  <a:cs typeface="Times New Roman" panose="02020603050405020304" pitchFamily="18" charset="0"/>
+                </a:rPr>
+                <a:t>x</a:t>
+              </a:r>
+              <a:r>
+                <a:rPr lang="en-US" sz="2100" b="1" dirty="0">
+                  <a:latin typeface="Times New Roman" panose="02020603050405020304" pitchFamily="18" charset="0"/>
+                  <a:cs typeface="Times New Roman" panose="02020603050405020304" pitchFamily="18" charset="0"/>
+                </a:rPr>
+                <a:t>) ) )</a:t>
+              </a:r>
+            </a:p>
+          </p:txBody>
+        </p:sp>
+      </p:grpSp>
+      <p:grpSp>
+        <p:nvGrpSpPr>
+          <p:cNvPr id="93" name="Group 92">
+            <a:extLst>
+              <a:ext uri="{FF2B5EF4-FFF2-40B4-BE49-F238E27FC236}">
+                <a16:creationId xmlns:a16="http://schemas.microsoft.com/office/drawing/2014/main" id="{C2CA904A-BF27-5386-8664-99A83106C3FE}"/>
+              </a:ext>
+            </a:extLst>
+          </p:cNvPr>
+          <p:cNvGrpSpPr/>
+          <p:nvPr/>
+        </p:nvGrpSpPr>
+        <p:grpSpPr>
+          <a:xfrm>
+            <a:off x="4114800" y="1837710"/>
+            <a:ext cx="4921576" cy="4334490"/>
+            <a:chOff x="4114800" y="1837710"/>
+            <a:chExt cx="4921576" cy="4334490"/>
+          </a:xfrm>
+        </p:grpSpPr>
+        <p:grpSp>
+          <p:nvGrpSpPr>
+            <p:cNvPr id="66" name="Group 65">
+              <a:extLst>
+                <a:ext uri="{FF2B5EF4-FFF2-40B4-BE49-F238E27FC236}">
+                  <a16:creationId xmlns:a16="http://schemas.microsoft.com/office/drawing/2014/main" id="{8F5BC9FB-731F-2AB6-FF12-71FEEC23F0E1}"/>
+                </a:ext>
+              </a:extLst>
+            </p:cNvPr>
+            <p:cNvGrpSpPr/>
+            <p:nvPr/>
+          </p:nvGrpSpPr>
+          <p:grpSpPr>
+            <a:xfrm rot="10800000">
+              <a:off x="5585475" y="1837710"/>
+              <a:ext cx="3210313" cy="2877953"/>
+              <a:chOff x="581100" y="1850531"/>
+              <a:chExt cx="4643064" cy="4162372"/>
+            </a:xfrm>
+          </p:grpSpPr>
+          <p:sp>
+            <p:nvSpPr>
+              <p:cNvPr id="67" name="Data 66">
+                <a:extLst>
+                  <a:ext uri="{FF2B5EF4-FFF2-40B4-BE49-F238E27FC236}">
+                    <a16:creationId xmlns:a16="http://schemas.microsoft.com/office/drawing/2014/main" id="{96C6028A-02ED-FDBF-88B4-A1973522D670}"/>
+                  </a:ext>
+                </a:extLst>
+              </p:cNvPr>
+              <p:cNvSpPr/>
+              <p:nvPr/>
+            </p:nvSpPr>
+            <p:spPr>
+              <a:xfrm rot="16200000">
+                <a:off x="2033934" y="3398033"/>
+                <a:ext cx="1749791" cy="1147575"/>
+              </a:xfrm>
+              <a:prstGeom prst="flowChartInputOutput">
+                <a:avLst/>
+              </a:prstGeom>
+              <a:solidFill>
+                <a:srgbClr val="C00000">
+                  <a:alpha val="51184"/>
+                </a:srgbClr>
+              </a:solidFill>
+              <a:effectLst>
+                <a:outerShdw blurRad="50800" dist="38100" dir="2700000" algn="tl" rotWithShape="0">
+                  <a:prstClr val="black">
+                    <a:alpha val="40000"/>
+                  </a:prstClr>
+                </a:outerShdw>
+              </a:effectLst>
+            </p:spPr>
+            <p:style>
+              <a:lnRef idx="2">
+                <a:schemeClr val="accent1">
+                  <a:shade val="15000"/>
+                </a:schemeClr>
+              </a:lnRef>
+              <a:fillRef idx="1">
+                <a:schemeClr val="accent1"/>
+              </a:fillRef>
+              <a:effectRef idx="0">
+                <a:schemeClr val="accent1"/>
+              </a:effectRef>
+              <a:fontRef idx="minor">
+                <a:schemeClr val="lt1"/>
+              </a:fontRef>
+            </p:style>
+            <p:txBody>
+              <a:bodyPr rtlCol="0" anchor="ctr"/>
+              <a:lstStyle/>
+              <a:p>
+                <a:pPr algn="ctr"/>
+                <a:endParaRPr lang="en-US" sz="1800"/>
+              </a:p>
+            </p:txBody>
+          </p:sp>
+          <p:sp>
+            <p:nvSpPr>
+              <p:cNvPr id="68" name="Data 67">
+                <a:extLst>
+                  <a:ext uri="{FF2B5EF4-FFF2-40B4-BE49-F238E27FC236}">
+                    <a16:creationId xmlns:a16="http://schemas.microsoft.com/office/drawing/2014/main" id="{E86F45AF-4FDC-4E89-FF23-B15A949E2462}"/>
+                  </a:ext>
+                </a:extLst>
+              </p:cNvPr>
+              <p:cNvSpPr/>
+              <p:nvPr/>
+            </p:nvSpPr>
+            <p:spPr>
+              <a:xfrm rot="16200000">
+                <a:off x="250193" y="3662139"/>
+                <a:ext cx="2681671" cy="2019857"/>
+              </a:xfrm>
+              <a:prstGeom prst="flowChartInputOutput">
+                <a:avLst/>
+              </a:prstGeom>
+              <a:solidFill>
+                <a:schemeClr val="accent2">
+                  <a:lumMod val="50000"/>
+                  <a:alpha val="51184"/>
+                </a:schemeClr>
+              </a:solidFill>
+            </p:spPr>
+            <p:style>
+              <a:lnRef idx="2">
+                <a:schemeClr val="accent1">
+                  <a:shade val="15000"/>
+                </a:schemeClr>
+              </a:lnRef>
+              <a:fillRef idx="1">
+                <a:schemeClr val="accent1"/>
+              </a:fillRef>
+              <a:effectRef idx="0">
+                <a:schemeClr val="accent1"/>
+              </a:effectRef>
+              <a:fontRef idx="minor">
+                <a:schemeClr val="lt1"/>
+              </a:fontRef>
+            </p:style>
+            <p:txBody>
+              <a:bodyPr rtlCol="0" anchor="ctr"/>
+              <a:lstStyle/>
+              <a:p>
+                <a:pPr algn="ctr"/>
+                <a:endParaRPr lang="en-US" sz="1800"/>
+              </a:p>
+            </p:txBody>
+          </p:sp>
+          <p:sp>
+            <p:nvSpPr>
+              <p:cNvPr id="69" name="Data 68">
+                <a:extLst>
+                  <a:ext uri="{FF2B5EF4-FFF2-40B4-BE49-F238E27FC236}">
+                    <a16:creationId xmlns:a16="http://schemas.microsoft.com/office/drawing/2014/main" id="{BCBB4787-FF05-34DA-E265-748A5890C8B0}"/>
+                  </a:ext>
+                </a:extLst>
+              </p:cNvPr>
+              <p:cNvSpPr/>
+              <p:nvPr/>
+            </p:nvSpPr>
+            <p:spPr>
+              <a:xfrm rot="16200000">
+                <a:off x="4055944" y="2565472"/>
+                <a:ext cx="788544" cy="489376"/>
+              </a:xfrm>
+              <a:prstGeom prst="flowChartInputOutput">
+                <a:avLst/>
+              </a:prstGeom>
+              <a:solidFill>
+                <a:srgbClr val="C00000">
+                  <a:alpha val="51184"/>
+                </a:srgbClr>
+              </a:solidFill>
+              <a:effectLst>
+                <a:outerShdw blurRad="50800" dist="38100" dir="2700000" algn="tl" rotWithShape="0">
+                  <a:prstClr val="black">
+                    <a:alpha val="40000"/>
+                  </a:prstClr>
+                </a:outerShdw>
+              </a:effectLst>
+            </p:spPr>
+            <p:style>
+              <a:lnRef idx="2">
+                <a:schemeClr val="accent1">
+                  <a:shade val="15000"/>
+                </a:schemeClr>
+              </a:lnRef>
+              <a:fillRef idx="1">
+                <a:schemeClr val="accent1"/>
+              </a:fillRef>
+              <a:effectRef idx="0">
+                <a:schemeClr val="accent1"/>
+              </a:effectRef>
+              <a:fontRef idx="minor">
+                <a:schemeClr val="lt1"/>
+              </a:fontRef>
+            </p:style>
+            <p:txBody>
+              <a:bodyPr rtlCol="0" anchor="ctr"/>
+              <a:lstStyle/>
+              <a:p>
+                <a:pPr algn="ctr"/>
+                <a:endParaRPr lang="en-US" sz="1800"/>
+              </a:p>
+            </p:txBody>
+          </p:sp>
+          <p:sp>
+            <p:nvSpPr>
+              <p:cNvPr id="70" name="Data 69">
+                <a:extLst>
+                  <a:ext uri="{FF2B5EF4-FFF2-40B4-BE49-F238E27FC236}">
+                    <a16:creationId xmlns:a16="http://schemas.microsoft.com/office/drawing/2014/main" id="{D130F803-CD16-2D29-FD7E-EE994DD7C658}"/>
+                  </a:ext>
+                </a:extLst>
+              </p:cNvPr>
+              <p:cNvSpPr/>
+              <p:nvPr/>
+            </p:nvSpPr>
+            <p:spPr>
+              <a:xfrm rot="16200000">
+                <a:off x="2998797" y="2918649"/>
+                <a:ext cx="1210437" cy="683624"/>
+              </a:xfrm>
+              <a:prstGeom prst="flowChartInputOutput">
+                <a:avLst/>
+              </a:prstGeom>
+              <a:solidFill>
+                <a:schemeClr val="accent1">
+                  <a:lumMod val="75000"/>
+                  <a:alpha val="51184"/>
+                </a:schemeClr>
+              </a:solidFill>
+              <a:effectLst>
+                <a:outerShdw blurRad="50800" dist="38100" dir="2700000" algn="tl" rotWithShape="0">
+                  <a:prstClr val="black">
+                    <a:alpha val="40000"/>
+                  </a:prstClr>
+                </a:outerShdw>
+              </a:effectLst>
+            </p:spPr>
+            <p:style>
+              <a:lnRef idx="2">
+                <a:schemeClr val="accent1">
+                  <a:shade val="15000"/>
+                </a:schemeClr>
+              </a:lnRef>
+              <a:fillRef idx="1">
+                <a:schemeClr val="accent1"/>
+              </a:fillRef>
+              <a:effectRef idx="0">
+                <a:schemeClr val="accent1"/>
+              </a:effectRef>
+              <a:fontRef idx="minor">
+                <a:schemeClr val="lt1"/>
+              </a:fontRef>
+            </p:style>
+            <p:txBody>
+              <a:bodyPr rtlCol="0" anchor="ctr"/>
+              <a:lstStyle/>
+              <a:p>
+                <a:pPr algn="ctr"/>
+                <a:endParaRPr lang="en-US" sz="1800"/>
+              </a:p>
+            </p:txBody>
+          </p:sp>
+          <p:sp>
+            <p:nvSpPr>
+              <p:cNvPr id="71" name="Data 70">
+                <a:extLst>
+                  <a:ext uri="{FF2B5EF4-FFF2-40B4-BE49-F238E27FC236}">
+                    <a16:creationId xmlns:a16="http://schemas.microsoft.com/office/drawing/2014/main" id="{842413DC-AB1D-8A9F-6FFA-21394DAC1E31}"/>
+                  </a:ext>
+                </a:extLst>
+              </p:cNvPr>
+              <p:cNvSpPr/>
+              <p:nvPr/>
+            </p:nvSpPr>
+            <p:spPr>
+              <a:xfrm rot="16200000">
+                <a:off x="4778518" y="1987333"/>
+                <a:ext cx="582448" cy="308844"/>
+              </a:xfrm>
+              <a:prstGeom prst="flowChartInputOutput">
+                <a:avLst/>
+              </a:prstGeom>
+              <a:solidFill>
+                <a:schemeClr val="accent1">
+                  <a:lumMod val="75000"/>
+                  <a:alpha val="51184"/>
+                </a:schemeClr>
+              </a:solidFill>
+            </p:spPr>
+            <p:style>
+              <a:lnRef idx="2">
+                <a:schemeClr val="accent1">
+                  <a:shade val="15000"/>
+                </a:schemeClr>
+              </a:lnRef>
+              <a:fillRef idx="1">
+                <a:schemeClr val="accent1"/>
+              </a:fillRef>
+              <a:effectRef idx="0">
+                <a:schemeClr val="accent1"/>
+              </a:effectRef>
+              <a:fontRef idx="minor">
+                <a:schemeClr val="lt1"/>
+              </a:fontRef>
+            </p:style>
+            <p:txBody>
+              <a:bodyPr rtlCol="0" anchor="ctr"/>
+              <a:lstStyle/>
+              <a:p>
+                <a:pPr algn="ctr"/>
+                <a:endParaRPr lang="en-US" sz="1800"/>
+              </a:p>
+            </p:txBody>
+          </p:sp>
+          <p:sp>
+            <p:nvSpPr>
+              <p:cNvPr id="77" name="Oval 76">
+                <a:extLst>
+                  <a:ext uri="{FF2B5EF4-FFF2-40B4-BE49-F238E27FC236}">
+                    <a16:creationId xmlns:a16="http://schemas.microsoft.com/office/drawing/2014/main" id="{AB5539B1-B054-E34B-C846-71EB5BCF1CBF}"/>
+                  </a:ext>
+                </a:extLst>
+              </p:cNvPr>
+              <p:cNvSpPr/>
+              <p:nvPr/>
+            </p:nvSpPr>
+            <p:spPr>
+              <a:xfrm>
+                <a:off x="1591028" y="4409762"/>
+                <a:ext cx="412560" cy="436955"/>
+              </a:xfrm>
+              <a:prstGeom prst="ellipse">
+                <a:avLst/>
+              </a:prstGeom>
+              <a:solidFill>
+                <a:schemeClr val="accent5">
+                  <a:lumMod val="90000"/>
+                </a:schemeClr>
+              </a:solidFill>
+            </p:spPr>
+            <p:style>
+              <a:lnRef idx="2">
+                <a:schemeClr val="accent1">
+                  <a:shade val="15000"/>
+                </a:schemeClr>
+              </a:lnRef>
+              <a:fillRef idx="1">
+                <a:schemeClr val="accent1"/>
+              </a:fillRef>
+              <a:effectRef idx="0">
+                <a:schemeClr val="accent1"/>
+              </a:effectRef>
+              <a:fontRef idx="minor">
+                <a:schemeClr val="lt1"/>
+              </a:fontRef>
+            </p:style>
+            <p:txBody>
+              <a:bodyPr rtlCol="0" anchor="ctr"/>
+              <a:lstStyle/>
+              <a:p>
+                <a:pPr algn="ctr"/>
+                <a:endParaRPr lang="en-US" sz="1800"/>
+              </a:p>
+            </p:txBody>
+          </p:sp>
+          <p:sp>
+            <p:nvSpPr>
+              <p:cNvPr id="78" name="Oval 77">
+                <a:extLst>
+                  <a:ext uri="{FF2B5EF4-FFF2-40B4-BE49-F238E27FC236}">
+                    <a16:creationId xmlns:a16="http://schemas.microsoft.com/office/drawing/2014/main" id="{9DFBEF5B-E722-9C6F-B664-C877854B4D59}"/>
+                  </a:ext>
+                </a:extLst>
+              </p:cNvPr>
+              <p:cNvSpPr/>
+              <p:nvPr/>
+            </p:nvSpPr>
+            <p:spPr>
+              <a:xfrm>
+                <a:off x="2750740" y="3647202"/>
+                <a:ext cx="412560" cy="436955"/>
+              </a:xfrm>
+              <a:prstGeom prst="ellipse">
+                <a:avLst/>
+              </a:prstGeom>
+              <a:solidFill>
+                <a:srgbClr val="FFC000"/>
+              </a:solidFill>
+            </p:spPr>
+            <p:style>
+              <a:lnRef idx="2">
+                <a:schemeClr val="accent1">
+                  <a:shade val="15000"/>
+                </a:schemeClr>
+              </a:lnRef>
+              <a:fillRef idx="1">
+                <a:schemeClr val="accent1"/>
+              </a:fillRef>
+              <a:effectRef idx="0">
+                <a:schemeClr val="accent1"/>
+              </a:effectRef>
+              <a:fontRef idx="minor">
+                <a:schemeClr val="lt1"/>
+              </a:fontRef>
+            </p:style>
+            <p:txBody>
+              <a:bodyPr rtlCol="0" anchor="ctr"/>
+              <a:lstStyle/>
+              <a:p>
+                <a:pPr algn="ctr"/>
+                <a:endParaRPr lang="en-US" sz="1800"/>
+              </a:p>
+            </p:txBody>
+          </p:sp>
+          <p:sp>
+            <p:nvSpPr>
+              <p:cNvPr id="79" name="Oval 78">
+                <a:extLst>
+                  <a:ext uri="{FF2B5EF4-FFF2-40B4-BE49-F238E27FC236}">
+                    <a16:creationId xmlns:a16="http://schemas.microsoft.com/office/drawing/2014/main" id="{71E1C012-7C8A-8810-EC9E-8EB0548055C1}"/>
+                  </a:ext>
+                </a:extLst>
+              </p:cNvPr>
+              <p:cNvSpPr/>
+              <p:nvPr/>
+            </p:nvSpPr>
+            <p:spPr>
+              <a:xfrm>
+                <a:off x="3604016" y="2965676"/>
+                <a:ext cx="412560" cy="436955"/>
+              </a:xfrm>
+              <a:prstGeom prst="ellipse">
+                <a:avLst/>
+              </a:prstGeom>
+              <a:solidFill>
+                <a:srgbClr val="FFC000"/>
+              </a:solidFill>
+            </p:spPr>
+            <p:style>
+              <a:lnRef idx="2">
+                <a:schemeClr val="accent1">
+                  <a:shade val="15000"/>
+                </a:schemeClr>
+              </a:lnRef>
+              <a:fillRef idx="1">
+                <a:schemeClr val="accent1"/>
+              </a:fillRef>
+              <a:effectRef idx="0">
+                <a:schemeClr val="accent1"/>
+              </a:effectRef>
+              <a:fontRef idx="minor">
+                <a:schemeClr val="lt1"/>
+              </a:fontRef>
+            </p:style>
+            <p:txBody>
+              <a:bodyPr rtlCol="0" anchor="ctr"/>
+              <a:lstStyle/>
+              <a:p>
+                <a:pPr algn="ctr"/>
+                <a:endParaRPr lang="en-US" sz="1800"/>
+              </a:p>
+            </p:txBody>
+          </p:sp>
+          <p:sp>
+            <p:nvSpPr>
+              <p:cNvPr id="80" name="Oval 79">
+                <a:extLst>
+                  <a:ext uri="{FF2B5EF4-FFF2-40B4-BE49-F238E27FC236}">
+                    <a16:creationId xmlns:a16="http://schemas.microsoft.com/office/drawing/2014/main" id="{37948605-43A4-61B2-3B3B-1EC93AA7B39D}"/>
+                  </a:ext>
+                </a:extLst>
+              </p:cNvPr>
+              <p:cNvSpPr/>
+              <p:nvPr/>
+            </p:nvSpPr>
+            <p:spPr>
+              <a:xfrm>
+                <a:off x="4488625" y="2301136"/>
+                <a:ext cx="412560" cy="436955"/>
+              </a:xfrm>
+              <a:prstGeom prst="ellipse">
+                <a:avLst/>
+              </a:prstGeom>
+              <a:solidFill>
+                <a:srgbClr val="FFC000"/>
+              </a:solidFill>
+            </p:spPr>
+            <p:style>
+              <a:lnRef idx="2">
+                <a:schemeClr val="accent1">
+                  <a:shade val="15000"/>
+                </a:schemeClr>
+              </a:lnRef>
+              <a:fillRef idx="1">
+                <a:schemeClr val="accent1"/>
+              </a:fillRef>
+              <a:effectRef idx="0">
+                <a:schemeClr val="accent1"/>
+              </a:effectRef>
+              <a:fontRef idx="minor">
+                <a:schemeClr val="lt1"/>
+              </a:fontRef>
+            </p:style>
+            <p:txBody>
+              <a:bodyPr rtlCol="0" anchor="ctr"/>
+              <a:lstStyle/>
+              <a:p>
+                <a:pPr algn="ctr"/>
+                <a:endParaRPr lang="en-US" sz="1800"/>
+              </a:p>
+            </p:txBody>
+          </p:sp>
+        </p:grpSp>
+        <p:grpSp>
+          <p:nvGrpSpPr>
+            <p:cNvPr id="87" name="Group 86">
+              <a:extLst>
+                <a:ext uri="{FF2B5EF4-FFF2-40B4-BE49-F238E27FC236}">
+                  <a16:creationId xmlns:a16="http://schemas.microsoft.com/office/drawing/2014/main" id="{3C4DE694-1AF1-47FB-ECDC-EB97B1ACF460}"/>
+                </a:ext>
+              </a:extLst>
+            </p:cNvPr>
+            <p:cNvGrpSpPr/>
+            <p:nvPr/>
+          </p:nvGrpSpPr>
+          <p:grpSpPr>
+            <a:xfrm>
+              <a:off x="4114800" y="5057612"/>
+              <a:ext cx="4490079" cy="436955"/>
+              <a:chOff x="705193" y="1589668"/>
+              <a:chExt cx="4490079" cy="436955"/>
+            </a:xfrm>
+          </p:grpSpPr>
+          <p:sp>
+            <p:nvSpPr>
+              <p:cNvPr id="88" name="Oval 87">
+                <a:extLst>
+                  <a:ext uri="{FF2B5EF4-FFF2-40B4-BE49-F238E27FC236}">
+                    <a16:creationId xmlns:a16="http://schemas.microsoft.com/office/drawing/2014/main" id="{AE5FABCD-CAEC-DD5C-4426-A1C54749C95E}"/>
+                  </a:ext>
+                </a:extLst>
+              </p:cNvPr>
+              <p:cNvSpPr/>
+              <p:nvPr/>
+            </p:nvSpPr>
+            <p:spPr>
+              <a:xfrm>
+                <a:off x="705193" y="1589668"/>
+                <a:ext cx="412560" cy="436955"/>
+              </a:xfrm>
+              <a:prstGeom prst="ellipse">
+                <a:avLst/>
+              </a:prstGeom>
+              <a:solidFill>
+                <a:srgbClr val="FFC000"/>
+              </a:solidFill>
+            </p:spPr>
+            <p:style>
+              <a:lnRef idx="2">
+                <a:schemeClr val="accent1">
+                  <a:shade val="15000"/>
+                </a:schemeClr>
+              </a:lnRef>
+              <a:fillRef idx="1">
+                <a:schemeClr val="accent1"/>
+              </a:fillRef>
+              <a:effectRef idx="0">
+                <a:schemeClr val="accent1"/>
+              </a:effectRef>
+              <a:fontRef idx="minor">
+                <a:schemeClr val="lt1"/>
+              </a:fontRef>
+            </p:style>
+            <p:txBody>
+              <a:bodyPr rtlCol="0" anchor="ctr"/>
+              <a:lstStyle/>
+              <a:p>
+                <a:pPr algn="ctr"/>
+                <a:endParaRPr lang="en-US" sz="1800"/>
+              </a:p>
+            </p:txBody>
+          </p:sp>
+          <p:sp>
+            <p:nvSpPr>
+              <p:cNvPr id="89" name="TextBox 88">
+                <a:extLst>
+                  <a:ext uri="{FF2B5EF4-FFF2-40B4-BE49-F238E27FC236}">
+                    <a16:creationId xmlns:a16="http://schemas.microsoft.com/office/drawing/2014/main" id="{55B3D280-8EC0-6262-262B-C1010EF723CE}"/>
+                  </a:ext>
+                </a:extLst>
+              </p:cNvPr>
+              <p:cNvSpPr txBox="1"/>
+              <p:nvPr/>
+            </p:nvSpPr>
+            <p:spPr>
+              <a:xfrm>
+                <a:off x="1148971" y="1589668"/>
+                <a:ext cx="4046301" cy="415498"/>
+              </a:xfrm>
+              <a:prstGeom prst="rect">
+                <a:avLst/>
+              </a:prstGeom>
+              <a:noFill/>
+            </p:spPr>
+            <p:txBody>
+              <a:bodyPr wrap="none" rtlCol="0">
+                <a:spAutoFit/>
+              </a:bodyPr>
+              <a:lstStyle/>
+              <a:p>
+                <a:r>
+                  <a:rPr lang="en-US" sz="2100" b="1" dirty="0" err="1">
+                    <a:latin typeface="Courier New" panose="02070309020205020404" pitchFamily="49" charset="0"/>
+                    <a:cs typeface="Courier New" panose="02070309020205020404" pitchFamily="49" charset="0"/>
+                  </a:rPr>
+                  <a:t>ReLU</a:t>
+                </a:r>
+                <a:r>
+                  <a:rPr lang="en-US" sz="2100" b="1" dirty="0">
+                    <a:latin typeface="Times New Roman" panose="02020603050405020304" pitchFamily="18" charset="0"/>
+                    <a:cs typeface="Times New Roman" panose="02020603050405020304" pitchFamily="18" charset="0"/>
+                  </a:rPr>
+                  <a:t>( </a:t>
+                </a:r>
+                <a:r>
+                  <a:rPr lang="en-US" sz="2100" b="1" dirty="0">
+                    <a:latin typeface="Courier New" panose="02070309020205020404" pitchFamily="49" charset="0"/>
+                    <a:cs typeface="Courier New" panose="02070309020205020404" pitchFamily="49" charset="0"/>
+                  </a:rPr>
+                  <a:t>Conv2dTranspose</a:t>
+                </a:r>
+                <a:r>
+                  <a:rPr lang="en-US" sz="2100" b="1" dirty="0">
+                    <a:latin typeface="Times New Roman" panose="02020603050405020304" pitchFamily="18" charset="0"/>
+                    <a:cs typeface="Times New Roman" panose="02020603050405020304" pitchFamily="18" charset="0"/>
+                  </a:rPr>
+                  <a:t>(</a:t>
+                </a:r>
+                <a:r>
+                  <a:rPr lang="en-US" sz="2100" b="1" i="1" dirty="0">
+                    <a:latin typeface="Times New Roman" panose="02020603050405020304" pitchFamily="18" charset="0"/>
+                    <a:cs typeface="Times New Roman" panose="02020603050405020304" pitchFamily="18" charset="0"/>
+                  </a:rPr>
+                  <a:t>x</a:t>
+                </a:r>
+                <a:r>
+                  <a:rPr lang="en-US" sz="2100" b="1" dirty="0">
+                    <a:latin typeface="Times New Roman" panose="02020603050405020304" pitchFamily="18" charset="0"/>
+                    <a:cs typeface="Times New Roman" panose="02020603050405020304" pitchFamily="18" charset="0"/>
+                  </a:rPr>
+                  <a:t>) ))</a:t>
+                </a:r>
+              </a:p>
+            </p:txBody>
+          </p:sp>
+        </p:grpSp>
+        <p:grpSp>
+          <p:nvGrpSpPr>
+            <p:cNvPr id="90" name="Group 89">
+              <a:extLst>
+                <a:ext uri="{FF2B5EF4-FFF2-40B4-BE49-F238E27FC236}">
+                  <a16:creationId xmlns:a16="http://schemas.microsoft.com/office/drawing/2014/main" id="{D9EBCEDD-2824-4FC1-6028-52D9CCC36C04}"/>
+                </a:ext>
+              </a:extLst>
+            </p:cNvPr>
+            <p:cNvGrpSpPr/>
+            <p:nvPr/>
+          </p:nvGrpSpPr>
+          <p:grpSpPr>
+            <a:xfrm>
+              <a:off x="4127914" y="5735245"/>
+              <a:ext cx="4908462" cy="436955"/>
+              <a:chOff x="705193" y="1589668"/>
+              <a:chExt cx="4908462" cy="436955"/>
+            </a:xfrm>
+          </p:grpSpPr>
+          <p:sp>
+            <p:nvSpPr>
+              <p:cNvPr id="91" name="Oval 90">
+                <a:extLst>
+                  <a:ext uri="{FF2B5EF4-FFF2-40B4-BE49-F238E27FC236}">
+                    <a16:creationId xmlns:a16="http://schemas.microsoft.com/office/drawing/2014/main" id="{678E8253-98A2-B4E4-5E63-ABAB9920EAA4}"/>
+                  </a:ext>
+                </a:extLst>
+              </p:cNvPr>
+              <p:cNvSpPr/>
+              <p:nvPr/>
+            </p:nvSpPr>
+            <p:spPr>
+              <a:xfrm>
+                <a:off x="705193" y="1589668"/>
+                <a:ext cx="412560" cy="436955"/>
+              </a:xfrm>
+              <a:prstGeom prst="ellipse">
+                <a:avLst/>
+              </a:prstGeom>
+              <a:solidFill>
+                <a:schemeClr val="accent5">
+                  <a:lumMod val="90000"/>
+                </a:schemeClr>
+              </a:solidFill>
+            </p:spPr>
+            <p:style>
+              <a:lnRef idx="2">
+                <a:schemeClr val="accent1">
+                  <a:shade val="15000"/>
+                </a:schemeClr>
+              </a:lnRef>
+              <a:fillRef idx="1">
+                <a:schemeClr val="accent1"/>
+              </a:fillRef>
+              <a:effectRef idx="0">
+                <a:schemeClr val="accent1"/>
+              </a:effectRef>
+              <a:fontRef idx="minor">
+                <a:schemeClr val="lt1"/>
+              </a:fontRef>
+            </p:style>
+            <p:txBody>
+              <a:bodyPr rtlCol="0" anchor="ctr"/>
+              <a:lstStyle/>
+              <a:p>
+                <a:pPr algn="ctr"/>
+                <a:endParaRPr lang="en-US" sz="1800"/>
+              </a:p>
+            </p:txBody>
+          </p:sp>
+          <p:sp>
+            <p:nvSpPr>
+              <p:cNvPr id="92" name="TextBox 91">
+                <a:extLst>
+                  <a:ext uri="{FF2B5EF4-FFF2-40B4-BE49-F238E27FC236}">
+                    <a16:creationId xmlns:a16="http://schemas.microsoft.com/office/drawing/2014/main" id="{BB1CF010-7BE5-9692-7E37-283E5CDFC8F3}"/>
+                  </a:ext>
+                </a:extLst>
+              </p:cNvPr>
+              <p:cNvSpPr txBox="1"/>
+              <p:nvPr/>
+            </p:nvSpPr>
+            <p:spPr>
+              <a:xfrm>
+                <a:off x="1148971" y="1589668"/>
+                <a:ext cx="4464684" cy="415498"/>
+              </a:xfrm>
+              <a:prstGeom prst="rect">
+                <a:avLst/>
+              </a:prstGeom>
+              <a:noFill/>
+            </p:spPr>
+            <p:txBody>
+              <a:bodyPr wrap="none" rtlCol="0">
+                <a:spAutoFit/>
+              </a:bodyPr>
+              <a:lstStyle/>
+              <a:p>
+                <a:r>
+                  <a:rPr lang="en-US" sz="2100" b="1" dirty="0">
+                    <a:latin typeface="Courier New" panose="02070309020205020404" pitchFamily="49" charset="0"/>
+                    <a:cs typeface="Courier New" panose="02070309020205020404" pitchFamily="49" charset="0"/>
+                  </a:rPr>
+                  <a:t>Sigmoid</a:t>
+                </a:r>
+                <a:r>
+                  <a:rPr lang="en-US" sz="2100" b="1" dirty="0">
+                    <a:latin typeface="Times New Roman" panose="02020603050405020304" pitchFamily="18" charset="0"/>
+                    <a:cs typeface="Times New Roman" panose="02020603050405020304" pitchFamily="18" charset="0"/>
+                  </a:rPr>
+                  <a:t>( </a:t>
+                </a:r>
+                <a:r>
+                  <a:rPr lang="en-US" sz="2100" b="1" dirty="0">
+                    <a:latin typeface="Courier New" panose="02070309020205020404" pitchFamily="49" charset="0"/>
+                    <a:cs typeface="Courier New" panose="02070309020205020404" pitchFamily="49" charset="0"/>
+                  </a:rPr>
+                  <a:t>Conv2dTranspose</a:t>
+                </a:r>
+                <a:r>
+                  <a:rPr lang="en-US" sz="2100" b="1" dirty="0">
+                    <a:latin typeface="Times New Roman" panose="02020603050405020304" pitchFamily="18" charset="0"/>
+                    <a:cs typeface="Times New Roman" panose="02020603050405020304" pitchFamily="18" charset="0"/>
+                  </a:rPr>
+                  <a:t>(</a:t>
+                </a:r>
+                <a:r>
+                  <a:rPr lang="en-US" sz="2100" b="1" i="1" dirty="0">
+                    <a:latin typeface="Times New Roman" panose="02020603050405020304" pitchFamily="18" charset="0"/>
+                    <a:cs typeface="Times New Roman" panose="02020603050405020304" pitchFamily="18" charset="0"/>
+                  </a:rPr>
+                  <a:t>x</a:t>
+                </a:r>
+                <a:r>
+                  <a:rPr lang="en-US" sz="2100" b="1" dirty="0">
+                    <a:latin typeface="Times New Roman" panose="02020603050405020304" pitchFamily="18" charset="0"/>
+                    <a:cs typeface="Times New Roman" panose="02020603050405020304" pitchFamily="18" charset="0"/>
+                  </a:rPr>
+                  <a:t>) ))</a:t>
+                </a:r>
+              </a:p>
+            </p:txBody>
+          </p:sp>
+        </p:grpSp>
+      </p:grpSp>
+    </p:spTree>
+    <p:extLst>
+      <p:ext uri="{BB962C8B-B14F-4D97-AF65-F5344CB8AC3E}">
+        <p14:creationId xmlns:p14="http://schemas.microsoft.com/office/powerpoint/2010/main" val="3461763920"/>
+      </p:ext>
+    </p:extLst>
+  </p:cSld>
+  <p:clrMapOvr>
+    <a:masterClrMapping/>
+  </p:clrMapOvr>
   <p:timing>
     <p:tnLst>
       <p:par>
@@ -8114,11 +9688,7 @@
                                           </p:stCondLst>
                                         </p:cTn>
                                         <p:tgtEl>
-                                          <p:spTgt spid="8">
-                                            <p:txEl>
-                                              <p:pRg st="1" end="1"/>
-                                            </p:txEl>
-                                          </p:spTgt>
+                                          <p:spTgt spid="93"/>
                                         </p:tgtEl>
                                         <p:attrNameLst>
                                           <p:attrName>style.visibility</p:attrName>
@@ -8132,140 +9702,7 @@
                                       <p:cBhvr>
                                         <p:cTn id="7" dur="500"/>
                                         <p:tgtEl>
-                                          <p:spTgt spid="8">
-                                            <p:txEl>
-                                              <p:pRg st="1" end="1"/>
-                                            </p:txEl>
-                                          </p:spTgt>
-                                        </p:tgtEl>
-                                      </p:cBhvr>
-                                    </p:animEffect>
-                                  </p:childTnLst>
-                                </p:cTn>
-                              </p:par>
-                              <p:par>
-                                <p:cTn id="8" presetID="10" presetClass="entr" presetSubtype="0" fill="hold" nodeType="withEffect">
-                                  <p:stCondLst>
-                                    <p:cond delay="0"/>
-                                  </p:stCondLst>
-                                  <p:childTnLst>
-                                    <p:set>
-                                      <p:cBhvr>
-                                        <p:cTn id="9" dur="1" fill="hold">
-                                          <p:stCondLst>
-                                            <p:cond delay="0"/>
-                                          </p:stCondLst>
-                                        </p:cTn>
-                                        <p:tgtEl>
-                                          <p:spTgt spid="8">
-                                            <p:txEl>
-                                              <p:pRg st="2" end="2"/>
-                                            </p:txEl>
-                                          </p:spTgt>
-                                        </p:tgtEl>
-                                        <p:attrNameLst>
-                                          <p:attrName>style.visibility</p:attrName>
-                                        </p:attrNameLst>
-                                      </p:cBhvr>
-                                      <p:to>
-                                        <p:strVal val="visible"/>
-                                      </p:to>
-                                    </p:set>
-                                    <p:animEffect transition="in" filter="fade">
-                                      <p:cBhvr>
-                                        <p:cTn id="10" dur="500"/>
-                                        <p:tgtEl>
-                                          <p:spTgt spid="8">
-                                            <p:txEl>
-                                              <p:pRg st="2" end="2"/>
-                                            </p:txEl>
-                                          </p:spTgt>
-                                        </p:tgtEl>
-                                      </p:cBhvr>
-                                    </p:animEffect>
-                                  </p:childTnLst>
-                                </p:cTn>
-                              </p:par>
-                              <p:par>
-                                <p:cTn id="11" presetID="10" presetClass="entr" presetSubtype="0" fill="hold" nodeType="withEffect">
-                                  <p:stCondLst>
-                                    <p:cond delay="0"/>
-                                  </p:stCondLst>
-                                  <p:childTnLst>
-                                    <p:set>
-                                      <p:cBhvr>
-                                        <p:cTn id="12" dur="1" fill="hold">
-                                          <p:stCondLst>
-                                            <p:cond delay="0"/>
-                                          </p:stCondLst>
-                                        </p:cTn>
-                                        <p:tgtEl>
-                                          <p:spTgt spid="8">
-                                            <p:txEl>
-                                              <p:pRg st="3" end="3"/>
-                                            </p:txEl>
-                                          </p:spTgt>
-                                        </p:tgtEl>
-                                        <p:attrNameLst>
-                                          <p:attrName>style.visibility</p:attrName>
-                                        </p:attrNameLst>
-                                      </p:cBhvr>
-                                      <p:to>
-                                        <p:strVal val="visible"/>
-                                      </p:to>
-                                    </p:set>
-                                    <p:animEffect transition="in" filter="fade">
-                                      <p:cBhvr>
-                                        <p:cTn id="13" dur="500"/>
-                                        <p:tgtEl>
-                                          <p:spTgt spid="8">
-                                            <p:txEl>
-                                              <p:pRg st="3" end="3"/>
-                                            </p:txEl>
-                                          </p:spTgt>
-                                        </p:tgtEl>
-                                      </p:cBhvr>
-                                    </p:animEffect>
-                                  </p:childTnLst>
-                                </p:cTn>
-                              </p:par>
-                              <p:par>
-                                <p:cTn id="14" presetID="10" presetClass="entr" presetSubtype="0" fill="hold" nodeType="withEffect">
-                                  <p:stCondLst>
-                                    <p:cond delay="0"/>
-                                  </p:stCondLst>
-                                  <p:childTnLst>
-                                    <p:set>
-                                      <p:cBhvr>
-                                        <p:cTn id="15" dur="1" fill="hold">
-                                          <p:stCondLst>
-                                            <p:cond delay="0"/>
-                                          </p:stCondLst>
-                                        </p:cTn>
-                                        <p:tgtEl>
-                                          <p:spTgt spid="8">
-                                            <p:txEl>
-                                              <p:pRg st="4" end="4"/>
-                                            </p:txEl>
-                                          </p:spTgt>
-                                        </p:tgtEl>
-                                        <p:attrNameLst>
-                                          <p:attrName>style.visibility</p:attrName>
-                                        </p:attrNameLst>
-                                      </p:cBhvr>
-                                      <p:to>
-                                        <p:strVal val="visible"/>
-                                      </p:to>
-                                    </p:set>
-                                    <p:animEffect transition="in" filter="fade">
-                                      <p:cBhvr>
-                                        <p:cTn id="16" dur="500"/>
-                                        <p:tgtEl>
-                                          <p:spTgt spid="8">
-                                            <p:txEl>
-                                              <p:pRg st="4" end="4"/>
-                                            </p:txEl>
-                                          </p:spTgt>
+                                          <p:spTgt spid="93"/>
                                         </p:tgtEl>
                                       </p:cBhvr>
                                     </p:animEffect>
@@ -9194,6 +10631,995 @@
 </p:sld>
 </file>
 
+<file path=ppt/slides/slide20.xml><?xml version="1.0" encoding="utf-8"?>
+<p:sld xmlns:a="http://schemas.openxmlformats.org/drawingml/2006/main" xmlns:r="http://schemas.openxmlformats.org/officeDocument/2006/relationships" xmlns:p="http://schemas.openxmlformats.org/presentationml/2006/main">
+  <p:cSld>
+    <p:spTree>
+      <p:nvGrpSpPr>
+        <p:cNvPr id="1" name=""/>
+        <p:cNvGrpSpPr/>
+        <p:nvPr/>
+      </p:nvGrpSpPr>
+      <p:grpSpPr>
+        <a:xfrm>
+          <a:off x="0" y="0"/>
+          <a:ext cx="0" cy="0"/>
+          <a:chOff x="0" y="0"/>
+          <a:chExt cx="0" cy="0"/>
+        </a:xfrm>
+      </p:grpSpPr>
+      <p:sp>
+        <p:nvSpPr>
+          <p:cNvPr id="2" name="Title 1">
+            <a:extLst>
+              <a:ext uri="{FF2B5EF4-FFF2-40B4-BE49-F238E27FC236}">
+                <a16:creationId xmlns:a16="http://schemas.microsoft.com/office/drawing/2014/main" id="{1701A736-353D-4D4D-849D-E5B36B5E108D}"/>
+              </a:ext>
+            </a:extLst>
+          </p:cNvPr>
+          <p:cNvSpPr>
+            <a:spLocks noGrp="1"/>
+          </p:cNvSpPr>
+          <p:nvPr>
+            <p:ph type="title"/>
+          </p:nvPr>
+        </p:nvSpPr>
+        <p:spPr/>
+        <p:txBody>
+          <a:bodyPr/>
+          <a:lstStyle/>
+          <a:p>
+            <a:r>
+              <a:rPr lang="en-US" dirty="0"/>
+              <a:t>Convolutional Autoencoders (3)</a:t>
+            </a:r>
+          </a:p>
+        </p:txBody>
+      </p:sp>
+      <p:grpSp>
+        <p:nvGrpSpPr>
+          <p:cNvPr id="7" name="Group 6">
+            <a:extLst>
+              <a:ext uri="{FF2B5EF4-FFF2-40B4-BE49-F238E27FC236}">
+                <a16:creationId xmlns:a16="http://schemas.microsoft.com/office/drawing/2014/main" id="{4BAA16BA-AE10-0589-6552-A8BE168E6D3E}"/>
+              </a:ext>
+            </a:extLst>
+          </p:cNvPr>
+          <p:cNvGrpSpPr/>
+          <p:nvPr/>
+        </p:nvGrpSpPr>
+        <p:grpSpPr>
+          <a:xfrm>
+            <a:off x="342900" y="1447800"/>
+            <a:ext cx="8458200" cy="3733800"/>
+            <a:chOff x="685800" y="1828800"/>
+            <a:chExt cx="7686675" cy="2925762"/>
+          </a:xfrm>
+        </p:grpSpPr>
+        <p:pic>
+          <p:nvPicPr>
+            <p:cNvPr id="4" name="Picture 3">
+              <a:extLst>
+                <a:ext uri="{FF2B5EF4-FFF2-40B4-BE49-F238E27FC236}">
+                  <a16:creationId xmlns:a16="http://schemas.microsoft.com/office/drawing/2014/main" id="{75A779B9-0917-9CD7-3A4D-407E72736FDB}"/>
+                </a:ext>
+              </a:extLst>
+            </p:cNvPr>
+            <p:cNvPicPr>
+              <a:picLocks noChangeAspect="1"/>
+            </p:cNvPicPr>
+            <p:nvPr/>
+          </p:nvPicPr>
+          <p:blipFill>
+            <a:blip r:embed="rId2"/>
+            <a:stretch>
+              <a:fillRect/>
+            </a:stretch>
+          </p:blipFill>
+          <p:spPr>
+            <a:xfrm>
+              <a:off x="685800" y="1828800"/>
+              <a:ext cx="3657600" cy="2921000"/>
+            </a:xfrm>
+            <a:prstGeom prst="rect">
+              <a:avLst/>
+            </a:prstGeom>
+            <a:effectLst>
+              <a:outerShdw blurRad="50800" dist="38100" dir="2700000" algn="tl" rotWithShape="0">
+                <a:prstClr val="black">
+                  <a:alpha val="40000"/>
+                </a:prstClr>
+              </a:outerShdw>
+            </a:effectLst>
+          </p:spPr>
+        </p:pic>
+        <p:pic>
+          <p:nvPicPr>
+            <p:cNvPr id="6" name="Picture 5">
+              <a:extLst>
+                <a:ext uri="{FF2B5EF4-FFF2-40B4-BE49-F238E27FC236}">
+                  <a16:creationId xmlns:a16="http://schemas.microsoft.com/office/drawing/2014/main" id="{01110B69-E59A-3B39-DDB4-95F9301C6B40}"/>
+                </a:ext>
+              </a:extLst>
+            </p:cNvPr>
+            <p:cNvPicPr>
+              <a:picLocks noChangeAspect="1"/>
+            </p:cNvPicPr>
+            <p:nvPr/>
+          </p:nvPicPr>
+          <p:blipFill>
+            <a:blip r:embed="rId3"/>
+            <a:stretch>
+              <a:fillRect/>
+            </a:stretch>
+          </p:blipFill>
+          <p:spPr>
+            <a:xfrm>
+              <a:off x="4714875" y="1833562"/>
+              <a:ext cx="3657600" cy="2921000"/>
+            </a:xfrm>
+            <a:prstGeom prst="rect">
+              <a:avLst/>
+            </a:prstGeom>
+            <a:effectLst>
+              <a:outerShdw blurRad="50800" dist="38100" dir="2700000" algn="tl" rotWithShape="0">
+                <a:prstClr val="black">
+                  <a:alpha val="40000"/>
+                </a:prstClr>
+              </a:outerShdw>
+            </a:effectLst>
+          </p:spPr>
+        </p:pic>
+      </p:grpSp>
+      <p:sp>
+        <p:nvSpPr>
+          <p:cNvPr id="8" name="TextBox 7">
+            <a:extLst>
+              <a:ext uri="{FF2B5EF4-FFF2-40B4-BE49-F238E27FC236}">
+                <a16:creationId xmlns:a16="http://schemas.microsoft.com/office/drawing/2014/main" id="{F9A9DE06-4FB8-A09A-109A-1569ED3828E3}"/>
+              </a:ext>
+            </a:extLst>
+          </p:cNvPr>
+          <p:cNvSpPr txBox="1"/>
+          <p:nvPr/>
+        </p:nvSpPr>
+        <p:spPr>
+          <a:xfrm>
+            <a:off x="1066800" y="5325690"/>
+            <a:ext cx="2156360" cy="461665"/>
+          </a:xfrm>
+          <a:prstGeom prst="rect">
+            <a:avLst/>
+          </a:prstGeom>
+          <a:noFill/>
+        </p:spPr>
+        <p:txBody>
+          <a:bodyPr wrap="none" rtlCol="0">
+            <a:spAutoFit/>
+          </a:bodyPr>
+          <a:lstStyle/>
+          <a:p>
+            <a:r>
+              <a:rPr lang="en-US" dirty="0"/>
+              <a:t>Original images</a:t>
+            </a:r>
+          </a:p>
+        </p:txBody>
+      </p:sp>
+      <p:sp>
+        <p:nvSpPr>
+          <p:cNvPr id="9" name="TextBox 8">
+            <a:extLst>
+              <a:ext uri="{FF2B5EF4-FFF2-40B4-BE49-F238E27FC236}">
+                <a16:creationId xmlns:a16="http://schemas.microsoft.com/office/drawing/2014/main" id="{F365B59D-D13A-E221-05E0-1D7489E5A355}"/>
+              </a:ext>
+            </a:extLst>
+          </p:cNvPr>
+          <p:cNvSpPr txBox="1"/>
+          <p:nvPr/>
+        </p:nvSpPr>
+        <p:spPr>
+          <a:xfrm>
+            <a:off x="5638800" y="5337844"/>
+            <a:ext cx="2890535" cy="461665"/>
+          </a:xfrm>
+          <a:prstGeom prst="rect">
+            <a:avLst/>
+          </a:prstGeom>
+          <a:noFill/>
+        </p:spPr>
+        <p:txBody>
+          <a:bodyPr wrap="none" rtlCol="0">
+            <a:spAutoFit/>
+          </a:bodyPr>
+          <a:lstStyle/>
+          <a:p>
+            <a:r>
+              <a:rPr lang="en-US" dirty="0"/>
+              <a:t>Reconstructed images</a:t>
+            </a:r>
+          </a:p>
+        </p:txBody>
+      </p:sp>
+      <p:sp>
+        <p:nvSpPr>
+          <p:cNvPr id="10" name="TextBox 9">
+            <a:extLst>
+              <a:ext uri="{FF2B5EF4-FFF2-40B4-BE49-F238E27FC236}">
+                <a16:creationId xmlns:a16="http://schemas.microsoft.com/office/drawing/2014/main" id="{A197811C-50E0-5DD7-90ED-E72A4AADD5EA}"/>
+              </a:ext>
+            </a:extLst>
+          </p:cNvPr>
+          <p:cNvSpPr txBox="1"/>
+          <p:nvPr/>
+        </p:nvSpPr>
+        <p:spPr>
+          <a:xfrm>
+            <a:off x="2929019" y="5786735"/>
+            <a:ext cx="2618024" cy="461665"/>
+          </a:xfrm>
+          <a:prstGeom prst="rect">
+            <a:avLst/>
+          </a:prstGeom>
+          <a:noFill/>
+        </p:spPr>
+        <p:txBody>
+          <a:bodyPr wrap="none" rtlCol="0">
+            <a:spAutoFit/>
+          </a:bodyPr>
+          <a:lstStyle/>
+          <a:p>
+            <a:r>
+              <a:rPr lang="en-US" dirty="0" err="1">
+                <a:solidFill>
+                  <a:srgbClr val="0033CC"/>
+                </a:solidFill>
+              </a:rPr>
+              <a:t>tutorial_CAE.ipynb</a:t>
+            </a:r>
+            <a:endParaRPr lang="en-US" dirty="0">
+              <a:solidFill>
+                <a:srgbClr val="0033CC"/>
+              </a:solidFill>
+            </a:endParaRPr>
+          </a:p>
+        </p:txBody>
+      </p:sp>
+    </p:spTree>
+    <p:extLst>
+      <p:ext uri="{BB962C8B-B14F-4D97-AF65-F5344CB8AC3E}">
+        <p14:creationId xmlns:p14="http://schemas.microsoft.com/office/powerpoint/2010/main" val="2116122349"/>
+      </p:ext>
+    </p:extLst>
+  </p:cSld>
+  <p:clrMapOvr>
+    <a:masterClrMapping/>
+  </p:clrMapOvr>
+</p:sld>
+</file>
+
+<file path=ppt/slides/slide21.xml><?xml version="1.0" encoding="utf-8"?>
+<p:sld xmlns:a="http://schemas.openxmlformats.org/drawingml/2006/main" xmlns:r="http://schemas.openxmlformats.org/officeDocument/2006/relationships" xmlns:p="http://schemas.openxmlformats.org/presentationml/2006/main">
+  <p:cSld>
+    <p:spTree>
+      <p:nvGrpSpPr>
+        <p:cNvPr id="1" name="">
+          <a:extLst>
+            <a:ext uri="{FF2B5EF4-FFF2-40B4-BE49-F238E27FC236}">
+              <a16:creationId xmlns:a16="http://schemas.microsoft.com/office/drawing/2014/main" id="{816EAC2F-9954-9009-66F5-71B7AAC85067}"/>
+            </a:ext>
+          </a:extLst>
+        </p:cNvPr>
+        <p:cNvGrpSpPr/>
+        <p:nvPr/>
+      </p:nvGrpSpPr>
+      <p:grpSpPr>
+        <a:xfrm>
+          <a:off x="0" y="0"/>
+          <a:ext cx="0" cy="0"/>
+          <a:chOff x="0" y="0"/>
+          <a:chExt cx="0" cy="0"/>
+        </a:xfrm>
+      </p:grpSpPr>
+      <p:pic>
+        <p:nvPicPr>
+          <p:cNvPr id="5" name="Picture 4">
+            <a:extLst>
+              <a:ext uri="{FF2B5EF4-FFF2-40B4-BE49-F238E27FC236}">
+                <a16:creationId xmlns:a16="http://schemas.microsoft.com/office/drawing/2014/main" id="{9354AEF2-5CF0-A0DC-7C31-93A9383F6B5C}"/>
+              </a:ext>
+            </a:extLst>
+          </p:cNvPr>
+          <p:cNvPicPr>
+            <a:picLocks noChangeAspect="1"/>
+          </p:cNvPicPr>
+          <p:nvPr/>
+        </p:nvPicPr>
+        <p:blipFill>
+          <a:blip r:embed="rId2"/>
+          <a:stretch>
+            <a:fillRect/>
+          </a:stretch>
+        </p:blipFill>
+        <p:spPr>
+          <a:xfrm>
+            <a:off x="3954250" y="1295399"/>
+            <a:ext cx="5037349" cy="4022883"/>
+          </a:xfrm>
+          <a:prstGeom prst="rect">
+            <a:avLst/>
+          </a:prstGeom>
+          <a:effectLst>
+            <a:outerShdw blurRad="50800" dist="38100" dir="2700000" algn="tl" rotWithShape="0">
+              <a:prstClr val="black">
+                <a:alpha val="40000"/>
+              </a:prstClr>
+            </a:outerShdw>
+          </a:effectLst>
+        </p:spPr>
+      </p:pic>
+      <p:sp>
+        <p:nvSpPr>
+          <p:cNvPr id="2" name="Title 1">
+            <a:extLst>
+              <a:ext uri="{FF2B5EF4-FFF2-40B4-BE49-F238E27FC236}">
+                <a16:creationId xmlns:a16="http://schemas.microsoft.com/office/drawing/2014/main" id="{B418DA83-EE2F-4FF7-546D-B2F6490DD6F4}"/>
+              </a:ext>
+            </a:extLst>
+          </p:cNvPr>
+          <p:cNvSpPr>
+            <a:spLocks noGrp="1"/>
+          </p:cNvSpPr>
+          <p:nvPr>
+            <p:ph type="title"/>
+          </p:nvPr>
+        </p:nvSpPr>
+        <p:spPr/>
+        <p:txBody>
+          <a:bodyPr/>
+          <a:lstStyle/>
+          <a:p>
+            <a:r>
+              <a:rPr lang="en-US" dirty="0"/>
+              <a:t>Convolutional Autoencoders (4)</a:t>
+            </a:r>
+          </a:p>
+        </p:txBody>
+      </p:sp>
+      <p:sp>
+        <p:nvSpPr>
+          <p:cNvPr id="11" name="Content Placeholder 10">
+            <a:extLst>
+              <a:ext uri="{FF2B5EF4-FFF2-40B4-BE49-F238E27FC236}">
+                <a16:creationId xmlns:a16="http://schemas.microsoft.com/office/drawing/2014/main" id="{0296A3F2-A628-50B6-FF7B-55B609A716CD}"/>
+              </a:ext>
+            </a:extLst>
+          </p:cNvPr>
+          <p:cNvSpPr>
+            <a:spLocks noGrp="1"/>
+          </p:cNvSpPr>
+          <p:nvPr>
+            <p:ph sz="half" idx="1"/>
+          </p:nvPr>
+        </p:nvSpPr>
+        <p:spPr>
+          <a:xfrm>
+            <a:off x="711200" y="1295400"/>
+            <a:ext cx="4013200" cy="4819650"/>
+          </a:xfrm>
+        </p:spPr>
+        <p:txBody>
+          <a:bodyPr/>
+          <a:lstStyle/>
+          <a:p>
+            <a:r>
+              <a:rPr lang="en-US" dirty="0"/>
+              <a:t>The latent space consists of images of shape (</a:t>
+            </a:r>
+            <a:r>
+              <a:rPr lang="en-US" dirty="0">
+                <a:solidFill>
+                  <a:srgbClr val="0033CC"/>
+                </a:solidFill>
+              </a:rPr>
+              <a:t>16, 6, 6</a:t>
+            </a:r>
+            <a:r>
+              <a:rPr lang="en-US" dirty="0"/>
+              <a:t>),</a:t>
+            </a:r>
+            <a:br>
+              <a:rPr lang="en-US" dirty="0"/>
+            </a:br>
+            <a:r>
+              <a:rPr lang="en-US" dirty="0"/>
+              <a:t>which we have mapped to</a:t>
+            </a:r>
+            <a:br>
+              <a:rPr lang="en-US" dirty="0"/>
+            </a:br>
+            <a:r>
+              <a:rPr lang="en-US" dirty="0"/>
+              <a:t>single-channel images of</a:t>
+            </a:r>
+            <a:br>
+              <a:rPr lang="en-US" dirty="0"/>
+            </a:br>
+            <a:r>
+              <a:rPr lang="en-US" dirty="0"/>
+              <a:t>shape (</a:t>
+            </a:r>
+            <a:r>
+              <a:rPr lang="en-US" dirty="0">
+                <a:solidFill>
+                  <a:srgbClr val="0033CC"/>
+                </a:solidFill>
+              </a:rPr>
+              <a:t>1, 24, 24</a:t>
+            </a:r>
+            <a:r>
+              <a:rPr lang="en-US" dirty="0"/>
+              <a:t>).</a:t>
+            </a:r>
+          </a:p>
+          <a:p>
+            <a:pPr marL="0" indent="0">
+              <a:buNone/>
+            </a:pPr>
+            <a:endParaRPr lang="en-US" dirty="0"/>
+          </a:p>
+          <a:p>
+            <a:r>
+              <a:rPr lang="en-US" dirty="0"/>
+              <a:t>Despite claims to the contrary, in the literature, it seems exceedingly unlikely to me that we can truly interpret what we see are seeing here.</a:t>
+            </a:r>
+          </a:p>
+        </p:txBody>
+      </p:sp>
+      <p:sp>
+        <p:nvSpPr>
+          <p:cNvPr id="9" name="TextBox 8">
+            <a:extLst>
+              <a:ext uri="{FF2B5EF4-FFF2-40B4-BE49-F238E27FC236}">
+                <a16:creationId xmlns:a16="http://schemas.microsoft.com/office/drawing/2014/main" id="{75E8282B-3459-9B61-0563-7CDED6749823}"/>
+              </a:ext>
+            </a:extLst>
+          </p:cNvPr>
+          <p:cNvSpPr txBox="1"/>
+          <p:nvPr/>
+        </p:nvSpPr>
+        <p:spPr>
+          <a:xfrm>
+            <a:off x="5257800" y="5476309"/>
+            <a:ext cx="2675732" cy="461665"/>
+          </a:xfrm>
+          <a:prstGeom prst="rect">
+            <a:avLst/>
+          </a:prstGeom>
+          <a:noFill/>
+        </p:spPr>
+        <p:txBody>
+          <a:bodyPr wrap="none" rtlCol="0">
+            <a:spAutoFit/>
+          </a:bodyPr>
+          <a:lstStyle/>
+          <a:p>
+            <a:r>
+              <a:rPr lang="en-US" dirty="0"/>
+              <a:t>Latent space images</a:t>
+            </a:r>
+          </a:p>
+        </p:txBody>
+      </p:sp>
+    </p:spTree>
+    <p:extLst>
+      <p:ext uri="{BB962C8B-B14F-4D97-AF65-F5344CB8AC3E}">
+        <p14:creationId xmlns:p14="http://schemas.microsoft.com/office/powerpoint/2010/main" val="4252351245"/>
+      </p:ext>
+    </p:extLst>
+  </p:cSld>
+  <p:clrMapOvr>
+    <a:masterClrMapping/>
+  </p:clrMapOvr>
+</p:sld>
+</file>
+
+<file path=ppt/slides/slide22.xml><?xml version="1.0" encoding="utf-8"?>
+<p:sld xmlns:a="http://schemas.openxmlformats.org/drawingml/2006/main" xmlns:r="http://schemas.openxmlformats.org/officeDocument/2006/relationships" xmlns:p="http://schemas.openxmlformats.org/presentationml/2006/main">
+  <p:cSld>
+    <p:spTree>
+      <p:nvGrpSpPr>
+        <p:cNvPr id="1" name="">
+          <a:extLst>
+            <a:ext uri="{FF2B5EF4-FFF2-40B4-BE49-F238E27FC236}">
+              <a16:creationId xmlns:a16="http://schemas.microsoft.com/office/drawing/2014/main" id="{42D7CE1E-C644-828C-8BB5-30BF147137CF}"/>
+            </a:ext>
+          </a:extLst>
+        </p:cNvPr>
+        <p:cNvGrpSpPr/>
+        <p:nvPr/>
+      </p:nvGrpSpPr>
+      <p:grpSpPr>
+        <a:xfrm>
+          <a:off x="0" y="0"/>
+          <a:ext cx="0" cy="0"/>
+          <a:chOff x="0" y="0"/>
+          <a:chExt cx="0" cy="0"/>
+        </a:xfrm>
+      </p:grpSpPr>
+      <p:sp>
+        <p:nvSpPr>
+          <p:cNvPr id="7" name="Title 6">
+            <a:extLst>
+              <a:ext uri="{FF2B5EF4-FFF2-40B4-BE49-F238E27FC236}">
+                <a16:creationId xmlns:a16="http://schemas.microsoft.com/office/drawing/2014/main" id="{F5556444-88BA-CD4E-25CE-6F7C7AA9F0B6}"/>
+              </a:ext>
+            </a:extLst>
+          </p:cNvPr>
+          <p:cNvSpPr>
+            <a:spLocks noGrp="1"/>
+          </p:cNvSpPr>
+          <p:nvPr>
+            <p:ph type="title"/>
+          </p:nvPr>
+        </p:nvSpPr>
+        <p:spPr/>
+        <p:txBody>
+          <a:bodyPr/>
+          <a:lstStyle/>
+          <a:p>
+            <a:r>
+              <a:rPr lang="en-US" dirty="0"/>
+              <a:t>Summary</a:t>
+            </a:r>
+            <a:endParaRPr lang="en-US" dirty="0">
+              <a:solidFill>
+                <a:schemeClr val="accent1"/>
+              </a:solidFill>
+            </a:endParaRPr>
+          </a:p>
+        </p:txBody>
+      </p:sp>
+      <mc:AlternateContent xmlns:mc="http://schemas.openxmlformats.org/markup-compatibility/2006" xmlns:a14="http://schemas.microsoft.com/office/drawing/2010/main">
+        <mc:Choice Requires="a14">
+          <p:sp>
+            <p:nvSpPr>
+              <p:cNvPr id="8" name="Content Placeholder 7">
+                <a:extLst>
+                  <a:ext uri="{FF2B5EF4-FFF2-40B4-BE49-F238E27FC236}">
+                    <a16:creationId xmlns:a16="http://schemas.microsoft.com/office/drawing/2014/main" id="{C32B846A-7F3C-5809-5D05-66B4BFACE181}"/>
+                  </a:ext>
+                </a:extLst>
+              </p:cNvPr>
+              <p:cNvSpPr>
+                <a:spLocks noGrp="1"/>
+              </p:cNvSpPr>
+              <p:nvPr>
+                <p:ph idx="1"/>
+              </p:nvPr>
+            </p:nvSpPr>
+            <p:spPr/>
+            <p:txBody>
+              <a:bodyPr/>
+              <a:lstStyle/>
+              <a:p>
+                <a:r>
+                  <a:rPr lang="en-US" dirty="0"/>
+                  <a:t>An autoencoder is a model that implements the map </a:t>
+                </a:r>
+                <a:br>
+                  <a:rPr lang="en-US" b="0" i="1" dirty="0">
+                    <a:solidFill>
+                      <a:srgbClr val="0033CC"/>
+                    </a:solidFill>
+                    <a:latin typeface="Cambria Math" panose="02040503050406030204" pitchFamily="18" charset="0"/>
+                  </a:rPr>
+                </a:br>
+                <a14:m>
+                  <m:oMath xmlns:m="http://schemas.openxmlformats.org/officeDocument/2006/math">
+                    <m:r>
+                      <a:rPr lang="en-US" b="0" i="1" smtClean="0">
+                        <a:solidFill>
+                          <a:srgbClr val="0033CC"/>
+                        </a:solidFill>
+                        <a:latin typeface="Cambria Math" panose="02040503050406030204" pitchFamily="18" charset="0"/>
+                      </a:rPr>
+                      <m:t>𝑓</m:t>
+                    </m:r>
+                    <m:r>
+                      <a:rPr lang="en-US" b="0" i="1" smtClean="0">
+                        <a:solidFill>
+                          <a:srgbClr val="0033CC"/>
+                        </a:solidFill>
+                        <a:latin typeface="Cambria Math" panose="02040503050406030204" pitchFamily="18" charset="0"/>
+                      </a:rPr>
+                      <m:t>:</m:t>
+                    </m:r>
+                    <m:r>
+                      <a:rPr lang="en-US" b="0" i="1" smtClean="0">
+                        <a:solidFill>
+                          <a:srgbClr val="0033CC"/>
+                        </a:solidFill>
+                        <a:latin typeface="Cambria Math" panose="02040503050406030204" pitchFamily="18" charset="0"/>
+                      </a:rPr>
+                      <m:t>𝑥</m:t>
+                    </m:r>
+                    <m:r>
+                      <a:rPr lang="en-US" b="0" i="1" smtClean="0">
+                        <a:solidFill>
+                          <a:srgbClr val="0033CC"/>
+                        </a:solidFill>
+                        <a:latin typeface="Cambria Math" panose="02040503050406030204" pitchFamily="18" charset="0"/>
+                      </a:rPr>
+                      <m:t>→</m:t>
+                    </m:r>
+                    <m:r>
+                      <a:rPr lang="en-US" b="0" i="1" smtClean="0">
+                        <a:solidFill>
+                          <a:srgbClr val="0033CC"/>
+                        </a:solidFill>
+                        <a:latin typeface="Cambria Math" panose="02040503050406030204" pitchFamily="18" charset="0"/>
+                      </a:rPr>
+                      <m:t>𝑥</m:t>
+                    </m:r>
+                  </m:oMath>
+                </a14:m>
+                <a:r>
+                  <a:rPr lang="en-US" dirty="0">
+                    <a:solidFill>
+                      <a:srgbClr val="0033CC"/>
+                    </a:solidFill>
+                  </a:rPr>
+                  <a:t> </a:t>
+                </a:r>
+                <a:r>
+                  <a:rPr lang="en-US" dirty="0"/>
+                  <a:t>via a bottleneck called the </a:t>
+                </a:r>
+                <a:r>
+                  <a:rPr lang="en-US" dirty="0">
+                    <a:solidFill>
+                      <a:srgbClr val="0033CC"/>
+                    </a:solidFill>
+                  </a:rPr>
+                  <a:t>latent space </a:t>
+                </a:r>
+                <a:r>
+                  <a:rPr lang="en-US" dirty="0"/>
+                  <a:t>whose dimensionality is (usually) much smaller than that of the input space.</a:t>
+                </a:r>
+                <a:br>
+                  <a:rPr lang="en-US" dirty="0"/>
+                </a:br>
+                <a:endParaRPr lang="en-US" dirty="0"/>
+              </a:p>
+              <a:p>
+                <a:r>
+                  <a:rPr lang="en-US" dirty="0"/>
+                  <a:t>The applications include:</a:t>
+                </a:r>
+              </a:p>
+              <a:p>
+                <a:pPr marL="857250" lvl="1" indent="-457200">
+                  <a:buFont typeface="+mj-lt"/>
+                  <a:buAutoNum type="arabicPeriod"/>
+                </a:pPr>
+                <a:r>
+                  <a:rPr lang="en-US" dirty="0"/>
+                  <a:t>Data compression</a:t>
+                </a:r>
+              </a:p>
+              <a:p>
+                <a:pPr marL="857250" lvl="1" indent="-457200">
+                  <a:buFont typeface="+mj-lt"/>
+                  <a:buAutoNum type="arabicPeriod"/>
+                </a:pPr>
+                <a:r>
+                  <a:rPr lang="en-US" dirty="0"/>
+                  <a:t>Anomaly detection</a:t>
+                </a:r>
+              </a:p>
+              <a:p>
+                <a:pPr marL="857250" lvl="1" indent="-457200">
+                  <a:buFont typeface="+mj-lt"/>
+                  <a:buAutoNum type="arabicPeriod"/>
+                </a:pPr>
+                <a:r>
+                  <a:rPr lang="en-US" dirty="0"/>
+                  <a:t>Noise removal</a:t>
+                </a:r>
+              </a:p>
+              <a:p>
+                <a:endParaRPr lang="en-US" dirty="0"/>
+              </a:p>
+            </p:txBody>
+          </p:sp>
+        </mc:Choice>
+        <mc:Fallback xmlns="">
+          <p:sp>
+            <p:nvSpPr>
+              <p:cNvPr id="8" name="Content Placeholder 7">
+                <a:extLst>
+                  <a:ext uri="{FF2B5EF4-FFF2-40B4-BE49-F238E27FC236}">
+                    <a16:creationId xmlns:a16="http://schemas.microsoft.com/office/drawing/2014/main" id="{C32B846A-7F3C-5809-5D05-66B4BFACE181}"/>
+                  </a:ext>
+                </a:extLst>
+              </p:cNvPr>
+              <p:cNvSpPr>
+                <a:spLocks noGrp="1" noRot="1" noChangeAspect="1" noMove="1" noResize="1" noEditPoints="1" noAdjustHandles="1" noChangeArrowheads="1" noChangeShapeType="1" noTextEdit="1"/>
+              </p:cNvSpPr>
+              <p:nvPr>
+                <p:ph idx="1"/>
+              </p:nvPr>
+            </p:nvSpPr>
+            <p:spPr>
+              <a:blipFill>
+                <a:blip r:embed="rId2"/>
+                <a:stretch>
+                  <a:fillRect l="-1142" t="-1316"/>
+                </a:stretch>
+              </a:blipFill>
+            </p:spPr>
+            <p:txBody>
+              <a:bodyPr/>
+              <a:lstStyle/>
+              <a:p>
+                <a:r>
+                  <a:rPr lang="en-US">
+                    <a:noFill/>
+                  </a:rPr>
+                  <a:t> </a:t>
+                </a:r>
+              </a:p>
+            </p:txBody>
+          </p:sp>
+        </mc:Fallback>
+      </mc:AlternateContent>
+    </p:spTree>
+    <p:extLst>
+      <p:ext uri="{BB962C8B-B14F-4D97-AF65-F5344CB8AC3E}">
+        <p14:creationId xmlns:p14="http://schemas.microsoft.com/office/powerpoint/2010/main" val="3569935970"/>
+      </p:ext>
+    </p:extLst>
+  </p:cSld>
+  <p:clrMapOvr>
+    <a:masterClrMapping/>
+  </p:clrMapOvr>
+  <mc:AlternateContent xmlns:mc="http://schemas.openxmlformats.org/markup-compatibility/2006" xmlns:p14="http://schemas.microsoft.com/office/powerpoint/2010/main">
+    <mc:Choice Requires="p14">
+      <p:transition spd="med" p14:dur="700">
+        <p:fade/>
+      </p:transition>
+    </mc:Choice>
+    <mc:Fallback xmlns="">
+      <p:transition spd="med">
+        <p:fade/>
+      </p:transition>
+    </mc:Fallback>
+  </mc:AlternateContent>
+  <p:timing>
+    <p:tnLst>
+      <p:par>
+        <p:cTn id="1" dur="indefinite" restart="never" nodeType="tmRoot">
+          <p:childTnLst>
+            <p:seq concurrent="1" nextAc="seek">
+              <p:cTn id="2" dur="indefinite" nodeType="mainSeq">
+                <p:childTnLst>
+                  <p:par>
+                    <p:cTn id="3" fill="hold">
+                      <p:stCondLst>
+                        <p:cond delay="indefinite"/>
+                      </p:stCondLst>
+                      <p:childTnLst>
+                        <p:par>
+                          <p:cTn id="4" fill="hold">
+                            <p:stCondLst>
+                              <p:cond delay="0"/>
+                            </p:stCondLst>
+                            <p:childTnLst>
+                              <p:par>
+                                <p:cTn id="5" presetID="10" presetClass="entr" presetSubtype="0" fill="hold" nodeType="clickEffect">
+                                  <p:stCondLst>
+                                    <p:cond delay="0"/>
+                                  </p:stCondLst>
+                                  <p:childTnLst>
+                                    <p:set>
+                                      <p:cBhvr>
+                                        <p:cTn id="6" dur="1" fill="hold">
+                                          <p:stCondLst>
+                                            <p:cond delay="0"/>
+                                          </p:stCondLst>
+                                        </p:cTn>
+                                        <p:tgtEl>
+                                          <p:spTgt spid="8">
+                                            <p:txEl>
+                                              <p:pRg st="1" end="1"/>
+                                            </p:txEl>
+                                          </p:spTgt>
+                                        </p:tgtEl>
+                                        <p:attrNameLst>
+                                          <p:attrName>style.visibility</p:attrName>
+                                        </p:attrNameLst>
+                                      </p:cBhvr>
+                                      <p:to>
+                                        <p:strVal val="visible"/>
+                                      </p:to>
+                                    </p:set>
+                                    <p:animEffect transition="in" filter="fade">
+                                      <p:cBhvr>
+                                        <p:cTn id="7" dur="500"/>
+                                        <p:tgtEl>
+                                          <p:spTgt spid="8">
+                                            <p:txEl>
+                                              <p:pRg st="1" end="1"/>
+                                            </p:txEl>
+                                          </p:spTgt>
+                                        </p:tgtEl>
+                                      </p:cBhvr>
+                                    </p:animEffect>
+                                  </p:childTnLst>
+                                </p:cTn>
+                              </p:par>
+                              <p:par>
+                                <p:cTn id="8" presetID="10" presetClass="entr" presetSubtype="0" fill="hold" nodeType="withEffect">
+                                  <p:stCondLst>
+                                    <p:cond delay="0"/>
+                                  </p:stCondLst>
+                                  <p:childTnLst>
+                                    <p:set>
+                                      <p:cBhvr>
+                                        <p:cTn id="9" dur="1" fill="hold">
+                                          <p:stCondLst>
+                                            <p:cond delay="0"/>
+                                          </p:stCondLst>
+                                        </p:cTn>
+                                        <p:tgtEl>
+                                          <p:spTgt spid="8">
+                                            <p:txEl>
+                                              <p:pRg st="2" end="2"/>
+                                            </p:txEl>
+                                          </p:spTgt>
+                                        </p:tgtEl>
+                                        <p:attrNameLst>
+                                          <p:attrName>style.visibility</p:attrName>
+                                        </p:attrNameLst>
+                                      </p:cBhvr>
+                                      <p:to>
+                                        <p:strVal val="visible"/>
+                                      </p:to>
+                                    </p:set>
+                                    <p:animEffect transition="in" filter="fade">
+                                      <p:cBhvr>
+                                        <p:cTn id="10" dur="500"/>
+                                        <p:tgtEl>
+                                          <p:spTgt spid="8">
+                                            <p:txEl>
+                                              <p:pRg st="2" end="2"/>
+                                            </p:txEl>
+                                          </p:spTgt>
+                                        </p:tgtEl>
+                                      </p:cBhvr>
+                                    </p:animEffect>
+                                  </p:childTnLst>
+                                </p:cTn>
+                              </p:par>
+                              <p:par>
+                                <p:cTn id="11" presetID="10" presetClass="entr" presetSubtype="0" fill="hold" nodeType="withEffect">
+                                  <p:stCondLst>
+                                    <p:cond delay="0"/>
+                                  </p:stCondLst>
+                                  <p:childTnLst>
+                                    <p:set>
+                                      <p:cBhvr>
+                                        <p:cTn id="12" dur="1" fill="hold">
+                                          <p:stCondLst>
+                                            <p:cond delay="0"/>
+                                          </p:stCondLst>
+                                        </p:cTn>
+                                        <p:tgtEl>
+                                          <p:spTgt spid="8">
+                                            <p:txEl>
+                                              <p:pRg st="3" end="3"/>
+                                            </p:txEl>
+                                          </p:spTgt>
+                                        </p:tgtEl>
+                                        <p:attrNameLst>
+                                          <p:attrName>style.visibility</p:attrName>
+                                        </p:attrNameLst>
+                                      </p:cBhvr>
+                                      <p:to>
+                                        <p:strVal val="visible"/>
+                                      </p:to>
+                                    </p:set>
+                                    <p:animEffect transition="in" filter="fade">
+                                      <p:cBhvr>
+                                        <p:cTn id="13" dur="500"/>
+                                        <p:tgtEl>
+                                          <p:spTgt spid="8">
+                                            <p:txEl>
+                                              <p:pRg st="3" end="3"/>
+                                            </p:txEl>
+                                          </p:spTgt>
+                                        </p:tgtEl>
+                                      </p:cBhvr>
+                                    </p:animEffect>
+                                  </p:childTnLst>
+                                </p:cTn>
+                              </p:par>
+                              <p:par>
+                                <p:cTn id="14" presetID="10" presetClass="entr" presetSubtype="0" fill="hold" nodeType="withEffect">
+                                  <p:stCondLst>
+                                    <p:cond delay="0"/>
+                                  </p:stCondLst>
+                                  <p:childTnLst>
+                                    <p:set>
+                                      <p:cBhvr>
+                                        <p:cTn id="15" dur="1" fill="hold">
+                                          <p:stCondLst>
+                                            <p:cond delay="0"/>
+                                          </p:stCondLst>
+                                        </p:cTn>
+                                        <p:tgtEl>
+                                          <p:spTgt spid="8">
+                                            <p:txEl>
+                                              <p:pRg st="4" end="4"/>
+                                            </p:txEl>
+                                          </p:spTgt>
+                                        </p:tgtEl>
+                                        <p:attrNameLst>
+                                          <p:attrName>style.visibility</p:attrName>
+                                        </p:attrNameLst>
+                                      </p:cBhvr>
+                                      <p:to>
+                                        <p:strVal val="visible"/>
+                                      </p:to>
+                                    </p:set>
+                                    <p:animEffect transition="in" filter="fade">
+                                      <p:cBhvr>
+                                        <p:cTn id="16" dur="500"/>
+                                        <p:tgtEl>
+                                          <p:spTgt spid="8">
+                                            <p:txEl>
+                                              <p:pRg st="4" end="4"/>
+                                            </p:txEl>
+                                          </p:spTgt>
+                                        </p:tgtEl>
+                                      </p:cBhvr>
+                                    </p:animEffect>
+                                  </p:childTnLst>
+                                </p:cTn>
+                              </p:par>
+                            </p:childTnLst>
+                          </p:cTn>
+                        </p:par>
+                      </p:childTnLst>
+                    </p:cTn>
+                  </p:par>
+                </p:childTnLst>
+              </p:cTn>
+              <p:prevCondLst>
+                <p:cond evt="onPrev" delay="0">
+                  <p:tgtEl>
+                    <p:sldTgt/>
+                  </p:tgtEl>
+                </p:cond>
+              </p:prevCondLst>
+              <p:nextCondLst>
+                <p:cond evt="onNext" delay="0">
+                  <p:tgtEl>
+                    <p:sldTgt/>
+                  </p:tgtEl>
+                </p:cond>
+              </p:nextCondLst>
+            </p:seq>
+          </p:childTnLst>
+        </p:cTn>
+      </p:par>
+    </p:tnLst>
+  </p:timing>
+</p:sld>
+</file>
+
 <file path=ppt/slides/slide3.xml><?xml version="1.0" encoding="utf-8"?>
 <p:sld xmlns:a="http://schemas.openxmlformats.org/drawingml/2006/main" xmlns:r="http://schemas.openxmlformats.org/officeDocument/2006/relationships" xmlns:p="http://schemas.openxmlformats.org/presentationml/2006/main">
   <p:cSld>
@@ -10339,806 +12765,9 @@
             </a:r>
             <a:endParaRPr lang="en-US" dirty="0">
               <a:solidFill>
-                <a:schemeClr val="accent1"/>
-              </a:solidFill>
-            </a:endParaRPr>
-          </a:p>
-        </p:txBody>
-      </p:sp>
-      <p:sp>
-        <p:nvSpPr>
-          <p:cNvPr id="8" name="Content Placeholder 7">
-            <a:extLst>
-              <a:ext uri="{FF2B5EF4-FFF2-40B4-BE49-F238E27FC236}">
-                <a16:creationId xmlns:a16="http://schemas.microsoft.com/office/drawing/2014/main" id="{300A18EE-490E-A176-D2EC-4715A99445FA}"/>
-              </a:ext>
-            </a:extLst>
-          </p:cNvPr>
-          <p:cNvSpPr>
-            <a:spLocks noGrp="1"/>
-          </p:cNvSpPr>
-          <p:nvPr>
-            <p:ph idx="1"/>
-          </p:nvPr>
-        </p:nvSpPr>
-        <p:spPr/>
-        <p:txBody>
-          <a:bodyPr/>
-          <a:lstStyle/>
-          <a:p>
-            <a:r>
-              <a:rPr lang="en-US" dirty="0"/>
-              <a:t>We’ll use an autoencoder </a:t>
-            </a:r>
-          </a:p>
-          <a:p>
-            <a:pPr marL="0" indent="0">
-              <a:buNone/>
-            </a:pPr>
-            <a:r>
-              <a:rPr lang="en-US" dirty="0"/>
-              <a:t>     to search for structure in</a:t>
-            </a:r>
-          </a:p>
-          <a:p>
-            <a:pPr marL="0" indent="0">
-              <a:buNone/>
-            </a:pPr>
-            <a:r>
-              <a:rPr lang="en-US" dirty="0"/>
-              <a:t>     stellar color data from the </a:t>
-            </a:r>
-          </a:p>
-          <a:p>
-            <a:pPr marL="0" indent="0">
-              <a:buNone/>
-            </a:pPr>
-            <a:r>
-              <a:rPr lang="en-US" dirty="0">
-                <a:solidFill>
-                  <a:srgbClr val="0033CC"/>
-                </a:solidFill>
-              </a:rPr>
-              <a:t>     Sloan Digital Sky Survey</a:t>
-            </a:r>
-            <a:r>
-              <a:rPr lang="en-US" dirty="0"/>
-              <a:t> </a:t>
-            </a:r>
-            <a:br>
-              <a:rPr lang="en-US" dirty="0"/>
-            </a:br>
-            <a:r>
-              <a:rPr lang="en-US" dirty="0"/>
-              <a:t>    (SDSS)*.</a:t>
-            </a:r>
-          </a:p>
-          <a:p>
-            <a:pPr marL="0" indent="0">
-              <a:buNone/>
-            </a:pPr>
-            <a:endParaRPr lang="en-US" dirty="0"/>
-          </a:p>
-          <a:p>
-            <a:r>
-              <a:rPr lang="en-US" dirty="0"/>
-              <a:t>The data are fluxes </a:t>
-            </a:r>
-            <a:br>
-              <a:rPr lang="en-US" dirty="0"/>
-            </a:br>
-            <a:r>
-              <a:rPr lang="en-US" dirty="0"/>
-              <a:t>measured in five filters:  </a:t>
-            </a:r>
-          </a:p>
-          <a:p>
-            <a:pPr marL="0" indent="0">
-              <a:buNone/>
-            </a:pPr>
-            <a:endParaRPr lang="en-US" dirty="0"/>
-          </a:p>
-          <a:p>
-            <a:pPr marL="0" indent="0">
-              <a:buNone/>
-            </a:pPr>
-            <a:endParaRPr lang="en-US" dirty="0"/>
-          </a:p>
-          <a:p>
-            <a:pPr marL="0" indent="0">
-              <a:buNone/>
-            </a:pPr>
-            <a:r>
-              <a:rPr lang="en-US" dirty="0"/>
-              <a:t>*</a:t>
-            </a:r>
-            <a:r>
-              <a:rPr lang="en-US" dirty="0">
-                <a:hlinkClick r:id="rId2"/>
-              </a:rPr>
-              <a:t>https://www.sdss.org/</a:t>
-            </a:r>
-            <a:endParaRPr lang="en-US" dirty="0"/>
-          </a:p>
-          <a:p>
-            <a:pPr marL="0" indent="0">
-              <a:buNone/>
-            </a:pPr>
-            <a:endParaRPr lang="en-US" dirty="0"/>
-          </a:p>
-        </p:txBody>
-      </p:sp>
-      <p:pic>
-        <p:nvPicPr>
-          <p:cNvPr id="3" name="Picture 2" descr="A graph of different colored lines&#10;&#10;Description automatically generated">
-            <a:extLst>
-              <a:ext uri="{FF2B5EF4-FFF2-40B4-BE49-F238E27FC236}">
-                <a16:creationId xmlns:a16="http://schemas.microsoft.com/office/drawing/2014/main" id="{F6DA818B-5A8E-3E38-D4E2-3759431FA626}"/>
-              </a:ext>
-            </a:extLst>
-          </p:cNvPr>
-          <p:cNvPicPr>
-            <a:picLocks noChangeAspect="1"/>
-          </p:cNvPicPr>
-          <p:nvPr/>
-        </p:nvPicPr>
-        <p:blipFill>
-          <a:blip r:embed="rId3"/>
-          <a:stretch>
-            <a:fillRect/>
-          </a:stretch>
-        </p:blipFill>
-        <p:spPr>
-          <a:xfrm>
-            <a:off x="4959350" y="990600"/>
-            <a:ext cx="3886200" cy="2590800"/>
-          </a:xfrm>
-          <a:prstGeom prst="rect">
-            <a:avLst/>
-          </a:prstGeom>
-          <a:effectLst>
-            <a:outerShdw blurRad="50800" dist="38100" dir="2700000" algn="tl" rotWithShape="0">
-              <a:prstClr val="black">
-                <a:alpha val="40000"/>
-              </a:prstClr>
-            </a:outerShdw>
-          </a:effectLst>
-        </p:spPr>
-      </p:pic>
-      <p:pic>
-        <p:nvPicPr>
-          <p:cNvPr id="6" name="Picture 5" descr="A table with numbers and letters&#10;&#10;Description automatically generated">
-            <a:extLst>
-              <a:ext uri="{FF2B5EF4-FFF2-40B4-BE49-F238E27FC236}">
-                <a16:creationId xmlns:a16="http://schemas.microsoft.com/office/drawing/2014/main" id="{580D55D1-8F3F-B2B8-0089-43BB4F012C21}"/>
-              </a:ext>
-            </a:extLst>
-          </p:cNvPr>
-          <p:cNvPicPr>
-            <a:picLocks noChangeAspect="1"/>
-          </p:cNvPicPr>
-          <p:nvPr/>
-        </p:nvPicPr>
-        <p:blipFill>
-          <a:blip r:embed="rId4"/>
-          <a:stretch>
-            <a:fillRect/>
-          </a:stretch>
-        </p:blipFill>
-        <p:spPr>
-          <a:xfrm>
-            <a:off x="4203700" y="3536950"/>
-            <a:ext cx="3721100" cy="2806700"/>
-          </a:xfrm>
-          <a:prstGeom prst="rect">
-            <a:avLst/>
-          </a:prstGeom>
-          <a:effectLst>
-            <a:outerShdw blurRad="50800" dist="38100" dir="2700000" algn="tl" rotWithShape="0">
-              <a:prstClr val="black">
-                <a:alpha val="40000"/>
-              </a:prstClr>
-            </a:outerShdw>
-          </a:effectLst>
-        </p:spPr>
-      </p:pic>
-    </p:spTree>
-    <p:extLst>
-      <p:ext uri="{BB962C8B-B14F-4D97-AF65-F5344CB8AC3E}">
-        <p14:creationId xmlns:p14="http://schemas.microsoft.com/office/powerpoint/2010/main" val="2425916098"/>
-      </p:ext>
-    </p:extLst>
-  </p:cSld>
-  <p:clrMapOvr>
-    <a:masterClrMapping/>
-  </p:clrMapOvr>
-  <mc:AlternateContent xmlns:mc="http://schemas.openxmlformats.org/markup-compatibility/2006" xmlns:p14="http://schemas.microsoft.com/office/powerpoint/2010/main">
-    <mc:Choice Requires="p14">
-      <p:transition spd="med" p14:dur="700">
-        <p:fade/>
-      </p:transition>
-    </mc:Choice>
-    <mc:Fallback xmlns="">
-      <p:transition spd="med">
-        <p:fade/>
-      </p:transition>
-    </mc:Fallback>
-  </mc:AlternateContent>
-</p:sld>
-</file>
-
-<file path=ppt/slides/slide6.xml><?xml version="1.0" encoding="utf-8"?>
-<p:sld xmlns:a="http://schemas.openxmlformats.org/drawingml/2006/main" xmlns:r="http://schemas.openxmlformats.org/officeDocument/2006/relationships" xmlns:p="http://schemas.openxmlformats.org/presentationml/2006/main">
-  <p:cSld>
-    <p:spTree>
-      <p:nvGrpSpPr>
-        <p:cNvPr id="1" name="">
-          <a:extLst>
-            <a:ext uri="{FF2B5EF4-FFF2-40B4-BE49-F238E27FC236}">
-              <a16:creationId xmlns:a16="http://schemas.microsoft.com/office/drawing/2014/main" id="{9359C3DA-9A08-64E3-0E07-5972302829E4}"/>
-            </a:ext>
-          </a:extLst>
-        </p:cNvPr>
-        <p:cNvGrpSpPr/>
-        <p:nvPr/>
-      </p:nvGrpSpPr>
-      <p:grpSpPr>
-        <a:xfrm>
-          <a:off x="0" y="0"/>
-          <a:ext cx="0" cy="0"/>
-          <a:chOff x="0" y="0"/>
-          <a:chExt cx="0" cy="0"/>
-        </a:xfrm>
-      </p:grpSpPr>
-      <p:sp>
-        <p:nvSpPr>
-          <p:cNvPr id="7" name="Title 6">
-            <a:extLst>
-              <a:ext uri="{FF2B5EF4-FFF2-40B4-BE49-F238E27FC236}">
-                <a16:creationId xmlns:a16="http://schemas.microsoft.com/office/drawing/2014/main" id="{EB9EC33A-50BA-E6E2-8666-32CD6A416E57}"/>
-              </a:ext>
-            </a:extLst>
-          </p:cNvPr>
-          <p:cNvSpPr>
-            <a:spLocks noGrp="1"/>
-          </p:cNvSpPr>
-          <p:nvPr>
-            <p:ph type="title"/>
-          </p:nvPr>
-        </p:nvSpPr>
-        <p:spPr/>
-        <p:txBody>
-          <a:bodyPr/>
-          <a:lstStyle/>
-          <a:p>
-            <a:r>
-              <a:rPr lang="en-US" dirty="0"/>
-              <a:t>Introduction (5)</a:t>
-            </a:r>
-            <a:endParaRPr lang="en-US" dirty="0">
-              <a:solidFill>
-                <a:schemeClr val="accent1"/>
-              </a:solidFill>
-            </a:endParaRPr>
-          </a:p>
-        </p:txBody>
-      </p:sp>
-      <p:sp>
-        <p:nvSpPr>
-          <p:cNvPr id="8" name="Content Placeholder 7">
-            <a:extLst>
-              <a:ext uri="{FF2B5EF4-FFF2-40B4-BE49-F238E27FC236}">
-                <a16:creationId xmlns:a16="http://schemas.microsoft.com/office/drawing/2014/main" id="{0952DC20-149F-4F7D-392D-CECD85A09A35}"/>
-              </a:ext>
-            </a:extLst>
-          </p:cNvPr>
-          <p:cNvSpPr>
-            <a:spLocks noGrp="1"/>
-          </p:cNvSpPr>
-          <p:nvPr>
-            <p:ph idx="1"/>
-          </p:nvPr>
-        </p:nvSpPr>
-        <p:spPr>
-          <a:xfrm>
-            <a:off x="711200" y="1295400"/>
-            <a:ext cx="8128000" cy="4819650"/>
-          </a:xfrm>
-        </p:spPr>
-        <p:txBody>
-          <a:bodyPr/>
-          <a:lstStyle/>
-          <a:p>
-            <a:pPr marL="0" indent="0">
-              <a:buNone/>
-            </a:pPr>
-            <a:r>
-              <a:rPr lang="en-US" dirty="0">
-                <a:solidFill>
-                  <a:srgbClr val="0033CC"/>
-                </a:solidFill>
-              </a:rPr>
-              <a:t>SDSS Dataset (</a:t>
-            </a:r>
-            <a:r>
-              <a:rPr lang="en-US" dirty="0">
-                <a:solidFill>
-                  <a:srgbClr val="0033CC"/>
-                </a:solidFill>
-                <a:hlinkClick r:id="rId2"/>
-              </a:rPr>
-              <a:t>https://cas.sdss.org/dr18/SearchTools/sql</a:t>
-            </a:r>
-            <a:r>
-              <a:rPr lang="en-US" dirty="0">
-                <a:solidFill>
-                  <a:srgbClr val="0033CC"/>
-                </a:solidFill>
-              </a:rPr>
-              <a:t>) </a:t>
-            </a:r>
-          </a:p>
-          <a:p>
-            <a:pPr marL="0" indent="0">
-              <a:buNone/>
-            </a:pPr>
-            <a:r>
-              <a:rPr lang="en-US" dirty="0"/>
-              <a:t>We use data from </a:t>
-            </a:r>
-            <a:r>
-              <a:rPr lang="en-US" dirty="0">
-                <a:solidFill>
-                  <a:srgbClr val="0033CC"/>
-                </a:solidFill>
-              </a:rPr>
-              <a:t>255,000</a:t>
-            </a:r>
-            <a:r>
-              <a:rPr lang="en-US" dirty="0"/>
-              <a:t> stars extracted using the SQL command:</a:t>
-            </a:r>
-          </a:p>
-          <a:p>
-            <a:pPr marL="0" indent="0">
-              <a:buNone/>
-            </a:pPr>
-            <a:endParaRPr lang="en-US" dirty="0"/>
-          </a:p>
-          <a:p>
-            <a:pPr marL="0" indent="0">
-              <a:buNone/>
-            </a:pPr>
-            <a:endParaRPr lang="en-US" dirty="0"/>
-          </a:p>
-          <a:p>
-            <a:pPr marL="0" indent="0">
-              <a:buNone/>
-            </a:pPr>
-            <a:endParaRPr lang="en-US" dirty="0"/>
-          </a:p>
-          <a:p>
-            <a:pPr marL="0" indent="0">
-              <a:buNone/>
-            </a:pPr>
-            <a:endParaRPr lang="en-US" dirty="0"/>
-          </a:p>
-          <a:p>
-            <a:pPr marL="0" indent="0">
-              <a:buNone/>
-            </a:pPr>
-            <a:endParaRPr lang="en-US" dirty="0"/>
-          </a:p>
-          <a:p>
-            <a:pPr marL="0" indent="0">
-              <a:buNone/>
-            </a:pPr>
-            <a:endParaRPr lang="en-US" dirty="0"/>
-          </a:p>
-          <a:p>
-            <a:pPr marL="0" indent="0">
-              <a:buNone/>
-            </a:pPr>
-            <a:r>
-              <a:rPr lang="en-US" dirty="0"/>
-              <a:t>				</a:t>
-            </a:r>
-          </a:p>
-        </p:txBody>
-      </p:sp>
-      <p:pic>
-        <p:nvPicPr>
-          <p:cNvPr id="3" name="Picture 2" descr="A screenshot of a computer code&#10;&#10;AI-generated content may be incorrect.">
-            <a:extLst>
-              <a:ext uri="{FF2B5EF4-FFF2-40B4-BE49-F238E27FC236}">
-                <a16:creationId xmlns:a16="http://schemas.microsoft.com/office/drawing/2014/main" id="{DC136126-D85F-ABF4-3D7E-35D07E9423AF}"/>
-              </a:ext>
-            </a:extLst>
-          </p:cNvPr>
-          <p:cNvPicPr>
-            <a:picLocks noChangeAspect="1"/>
-          </p:cNvPicPr>
-          <p:nvPr/>
-        </p:nvPicPr>
-        <p:blipFill>
-          <a:blip r:embed="rId3"/>
-          <a:stretch>
-            <a:fillRect/>
-          </a:stretch>
-        </p:blipFill>
-        <p:spPr>
-          <a:xfrm>
-            <a:off x="1204367" y="2514600"/>
-            <a:ext cx="7253833" cy="3371850"/>
-          </a:xfrm>
-          <a:prstGeom prst="rect">
-            <a:avLst/>
-          </a:prstGeom>
-          <a:effectLst>
-            <a:outerShdw blurRad="50800" dist="38100" dir="2700000" algn="tl" rotWithShape="0">
-              <a:prstClr val="black">
-                <a:alpha val="40000"/>
-              </a:prstClr>
-            </a:outerShdw>
-          </a:effectLst>
-        </p:spPr>
-      </p:pic>
-    </p:spTree>
-    <p:extLst>
-      <p:ext uri="{BB962C8B-B14F-4D97-AF65-F5344CB8AC3E}">
-        <p14:creationId xmlns:p14="http://schemas.microsoft.com/office/powerpoint/2010/main" val="4160723943"/>
-      </p:ext>
-    </p:extLst>
-  </p:cSld>
-  <p:clrMapOvr>
-    <a:masterClrMapping/>
-  </p:clrMapOvr>
-  <mc:AlternateContent xmlns:mc="http://schemas.openxmlformats.org/markup-compatibility/2006" xmlns:p14="http://schemas.microsoft.com/office/powerpoint/2010/main">
-    <mc:Choice Requires="p14">
-      <p:transition spd="med" p14:dur="700">
-        <p:fade/>
-      </p:transition>
-    </mc:Choice>
-    <mc:Fallback xmlns="">
-      <p:transition spd="med">
-        <p:fade/>
-      </p:transition>
-    </mc:Fallback>
-  </mc:AlternateContent>
-</p:sld>
-</file>
-
-<file path=ppt/slides/slide7.xml><?xml version="1.0" encoding="utf-8"?>
-<p:sld xmlns:a="http://schemas.openxmlformats.org/drawingml/2006/main" xmlns:r="http://schemas.openxmlformats.org/officeDocument/2006/relationships" xmlns:p="http://schemas.openxmlformats.org/presentationml/2006/main">
-  <p:cSld>
-    <p:spTree>
-      <p:nvGrpSpPr>
-        <p:cNvPr id="1" name="">
-          <a:extLst>
-            <a:ext uri="{FF2B5EF4-FFF2-40B4-BE49-F238E27FC236}">
-              <a16:creationId xmlns:a16="http://schemas.microsoft.com/office/drawing/2014/main" id="{26801E74-81A9-5052-F699-835321EE1926}"/>
-            </a:ext>
-          </a:extLst>
-        </p:cNvPr>
-        <p:cNvGrpSpPr/>
-        <p:nvPr/>
-      </p:nvGrpSpPr>
-      <p:grpSpPr>
-        <a:xfrm>
-          <a:off x="0" y="0"/>
-          <a:ext cx="0" cy="0"/>
-          <a:chOff x="0" y="0"/>
-          <a:chExt cx="0" cy="0"/>
-        </a:xfrm>
-      </p:grpSpPr>
-      <p:sp>
-        <p:nvSpPr>
-          <p:cNvPr id="7" name="Title 6">
-            <a:extLst>
-              <a:ext uri="{FF2B5EF4-FFF2-40B4-BE49-F238E27FC236}">
-                <a16:creationId xmlns:a16="http://schemas.microsoft.com/office/drawing/2014/main" id="{D30CB107-DAF6-9843-34B0-2F5BEC6DFA83}"/>
-              </a:ext>
-            </a:extLst>
-          </p:cNvPr>
-          <p:cNvSpPr>
-            <a:spLocks noGrp="1"/>
-          </p:cNvSpPr>
-          <p:nvPr>
-            <p:ph type="title"/>
-          </p:nvPr>
-        </p:nvSpPr>
-        <p:spPr/>
-        <p:txBody>
-          <a:bodyPr/>
-          <a:lstStyle/>
-          <a:p>
-            <a:r>
-              <a:rPr lang="en-US" dirty="0"/>
-              <a:t>Introduction (6)</a:t>
-            </a:r>
-            <a:endParaRPr lang="en-US" dirty="0">
-              <a:solidFill>
-                <a:schemeClr val="accent1"/>
-              </a:solidFill>
-            </a:endParaRPr>
-          </a:p>
-        </p:txBody>
-      </p:sp>
-      <p:sp>
-        <p:nvSpPr>
-          <p:cNvPr id="8" name="Content Placeholder 7">
-            <a:extLst>
-              <a:ext uri="{FF2B5EF4-FFF2-40B4-BE49-F238E27FC236}">
-                <a16:creationId xmlns:a16="http://schemas.microsoft.com/office/drawing/2014/main" id="{2BEE8A40-D7E6-3AAC-E92D-22BE2DE088F3}"/>
-              </a:ext>
-            </a:extLst>
-          </p:cNvPr>
-          <p:cNvSpPr>
-            <a:spLocks noGrp="1"/>
-          </p:cNvSpPr>
-          <p:nvPr>
-            <p:ph sz="half" idx="1"/>
-          </p:nvPr>
-        </p:nvSpPr>
-        <p:spPr>
-          <a:xfrm>
-            <a:off x="711200" y="1295400"/>
-            <a:ext cx="3556000" cy="4819650"/>
-          </a:xfrm>
-        </p:spPr>
-        <p:txBody>
-          <a:bodyPr/>
-          <a:lstStyle/>
-          <a:p>
-            <a:pPr marL="0" indent="0">
-              <a:buNone/>
-            </a:pPr>
-            <a:r>
-              <a:rPr lang="en-US" dirty="0"/>
-              <a:t>Beyond correlations, the plots show no obvious structure. </a:t>
-            </a:r>
-          </a:p>
-          <a:p>
-            <a:pPr marL="0" indent="0">
-              <a:buNone/>
-            </a:pPr>
-            <a:endParaRPr lang="en-US" dirty="0"/>
-          </a:p>
-          <a:p>
-            <a:pPr marL="0" indent="0">
-              <a:buNone/>
-            </a:pPr>
-            <a:r>
-              <a:rPr lang="en-US" dirty="0"/>
-              <a:t>But the hope is that the latent space of the autoencoder will reveal any structure that may be present in the data.</a:t>
-            </a:r>
-          </a:p>
-          <a:p>
-            <a:pPr marL="0" indent="0">
-              <a:buNone/>
-            </a:pPr>
-            <a:endParaRPr lang="en-US" dirty="0"/>
-          </a:p>
-          <a:p>
-            <a:pPr marL="0" indent="0">
-              <a:buNone/>
-            </a:pPr>
-            <a:endParaRPr lang="en-US" dirty="0"/>
-          </a:p>
-          <a:p>
-            <a:pPr marL="0" indent="0">
-              <a:buNone/>
-            </a:pPr>
-            <a:endParaRPr lang="en-US" dirty="0"/>
-          </a:p>
-          <a:p>
-            <a:pPr marL="0" indent="0">
-              <a:buNone/>
-            </a:pPr>
-            <a:endParaRPr lang="en-US" dirty="0"/>
-          </a:p>
-          <a:p>
-            <a:pPr marL="0" indent="0">
-              <a:buNone/>
-            </a:pPr>
-            <a:endParaRPr lang="en-US" dirty="0"/>
-          </a:p>
-          <a:p>
-            <a:pPr marL="0" indent="0">
-              <a:buNone/>
-            </a:pPr>
-            <a:r>
-              <a:rPr lang="en-US" dirty="0"/>
-              <a:t>				</a:t>
-            </a:r>
-          </a:p>
-        </p:txBody>
-      </p:sp>
-      <p:pic>
-        <p:nvPicPr>
-          <p:cNvPr id="5" name="Picture 4" descr="A graph of a graph of a number of objects&#10;&#10;AI-generated content may be incorrect.">
-            <a:extLst>
-              <a:ext uri="{FF2B5EF4-FFF2-40B4-BE49-F238E27FC236}">
-                <a16:creationId xmlns:a16="http://schemas.microsoft.com/office/drawing/2014/main" id="{6861D6D0-E5DD-9F17-C7B9-724DFEE9B1BD}"/>
-              </a:ext>
-            </a:extLst>
-          </p:cNvPr>
-          <p:cNvPicPr>
-            <a:picLocks noChangeAspect="1"/>
-          </p:cNvPicPr>
-          <p:nvPr/>
-        </p:nvPicPr>
-        <p:blipFill>
-          <a:blip r:embed="rId2"/>
-          <a:stretch>
-            <a:fillRect/>
-          </a:stretch>
-        </p:blipFill>
-        <p:spPr>
-          <a:xfrm>
-            <a:off x="4241409" y="1438275"/>
-            <a:ext cx="4533900" cy="4533900"/>
-          </a:xfrm>
-          <a:prstGeom prst="rect">
-            <a:avLst/>
-          </a:prstGeom>
-          <a:effectLst>
-            <a:outerShdw blurRad="50800" dist="38100" dir="2700000" algn="tl" rotWithShape="0">
-              <a:prstClr val="black">
-                <a:alpha val="40000"/>
-              </a:prstClr>
-            </a:outerShdw>
-          </a:effectLst>
-        </p:spPr>
-      </p:pic>
-    </p:spTree>
-    <p:extLst>
-      <p:ext uri="{BB962C8B-B14F-4D97-AF65-F5344CB8AC3E}">
-        <p14:creationId xmlns:p14="http://schemas.microsoft.com/office/powerpoint/2010/main" val="3560357507"/>
-      </p:ext>
-    </p:extLst>
-  </p:cSld>
-  <p:clrMapOvr>
-    <a:masterClrMapping/>
-  </p:clrMapOvr>
-  <mc:AlternateContent xmlns:mc="http://schemas.openxmlformats.org/markup-compatibility/2006" xmlns:p14="http://schemas.microsoft.com/office/powerpoint/2010/main">
-    <mc:Choice Requires="p14">
-      <p:transition spd="med" p14:dur="700">
-        <p:fade/>
-      </p:transition>
-    </mc:Choice>
-    <mc:Fallback xmlns="">
-      <p:transition spd="med">
-        <p:fade/>
-      </p:transition>
-    </mc:Fallback>
-  </mc:AlternateContent>
-</p:sld>
-</file>
-
-<file path=ppt/slides/slide8.xml><?xml version="1.0" encoding="utf-8"?>
-<p:sld xmlns:a="http://schemas.openxmlformats.org/drawingml/2006/main" xmlns:r="http://schemas.openxmlformats.org/officeDocument/2006/relationships" xmlns:p="http://schemas.openxmlformats.org/presentationml/2006/main">
-  <p:cSld>
-    <p:spTree>
-      <p:nvGrpSpPr>
-        <p:cNvPr id="1" name="">
-          <a:extLst>
-            <a:ext uri="{FF2B5EF4-FFF2-40B4-BE49-F238E27FC236}">
-              <a16:creationId xmlns:a16="http://schemas.microsoft.com/office/drawing/2014/main" id="{8B8363AD-3EC9-612C-DEDC-FE624437AB7F}"/>
-            </a:ext>
-          </a:extLst>
-        </p:cNvPr>
-        <p:cNvGrpSpPr/>
-        <p:nvPr/>
-      </p:nvGrpSpPr>
-      <p:grpSpPr>
-        <a:xfrm>
-          <a:off x="0" y="0"/>
-          <a:ext cx="0" cy="0"/>
-          <a:chOff x="0" y="0"/>
-          <a:chExt cx="0" cy="0"/>
-        </a:xfrm>
-      </p:grpSpPr>
-      <p:sp>
-        <p:nvSpPr>
-          <p:cNvPr id="4" name="Title 3">
-            <a:extLst>
-              <a:ext uri="{FF2B5EF4-FFF2-40B4-BE49-F238E27FC236}">
-                <a16:creationId xmlns:a16="http://schemas.microsoft.com/office/drawing/2014/main" id="{BE7EC2CE-5B10-7A14-5C25-5E8833307923}"/>
-              </a:ext>
-            </a:extLst>
-          </p:cNvPr>
-          <p:cNvSpPr>
-            <a:spLocks noGrp="1"/>
-          </p:cNvSpPr>
-          <p:nvPr>
-            <p:ph type="ctrTitle"/>
-          </p:nvPr>
-        </p:nvSpPr>
-        <p:spPr/>
-        <p:txBody>
-          <a:bodyPr/>
-          <a:lstStyle/>
-          <a:p>
-            <a:r>
-              <a:rPr lang="en-US" dirty="0" err="1"/>
-              <a:t>AUtoencoders</a:t>
-            </a:r>
-            <a:endParaRPr lang="en-US" sz="2400" dirty="0">
-              <a:solidFill>
-                <a:srgbClr val="0033CC"/>
-              </a:solidFill>
-            </a:endParaRPr>
-          </a:p>
-        </p:txBody>
-      </p:sp>
-    </p:spTree>
-    <p:extLst>
-      <p:ext uri="{BB962C8B-B14F-4D97-AF65-F5344CB8AC3E}">
-        <p14:creationId xmlns:p14="http://schemas.microsoft.com/office/powerpoint/2010/main" val="1659426476"/>
-      </p:ext>
-    </p:extLst>
-  </p:cSld>
-  <p:clrMapOvr>
-    <a:masterClrMapping/>
-  </p:clrMapOvr>
-  <p:transition>
-    <p:fade/>
-  </p:transition>
-</p:sld>
-</file>
-
-<file path=ppt/slides/slide9.xml><?xml version="1.0" encoding="utf-8"?>
-<p:sld xmlns:a="http://schemas.openxmlformats.org/drawingml/2006/main" xmlns:r="http://schemas.openxmlformats.org/officeDocument/2006/relationships" xmlns:p="http://schemas.openxmlformats.org/presentationml/2006/main">
-  <p:cSld>
-    <p:spTree>
-      <p:nvGrpSpPr>
-        <p:cNvPr id="1" name="">
-          <a:extLst>
-            <a:ext uri="{FF2B5EF4-FFF2-40B4-BE49-F238E27FC236}">
-              <a16:creationId xmlns:a16="http://schemas.microsoft.com/office/drawing/2014/main" id="{391CF93D-FDD3-43DB-4570-580903FD8030}"/>
-            </a:ext>
-          </a:extLst>
-        </p:cNvPr>
-        <p:cNvGrpSpPr/>
-        <p:nvPr/>
-      </p:nvGrpSpPr>
-      <p:grpSpPr>
-        <a:xfrm>
-          <a:off x="0" y="0"/>
-          <a:ext cx="0" cy="0"/>
-          <a:chOff x="0" y="0"/>
-          <a:chExt cx="0" cy="0"/>
-        </a:xfrm>
-      </p:grpSpPr>
-      <p:sp>
-        <p:nvSpPr>
-          <p:cNvPr id="7" name="Title 6">
-            <a:extLst>
-              <a:ext uri="{FF2B5EF4-FFF2-40B4-BE49-F238E27FC236}">
-                <a16:creationId xmlns:a16="http://schemas.microsoft.com/office/drawing/2014/main" id="{6B279E5A-1E8E-574A-DDCD-07B1AAE357AB}"/>
-              </a:ext>
-            </a:extLst>
-          </p:cNvPr>
-          <p:cNvSpPr>
-            <a:spLocks noGrp="1"/>
-          </p:cNvSpPr>
-          <p:nvPr>
-            <p:ph type="title"/>
-          </p:nvPr>
-        </p:nvSpPr>
-        <p:spPr/>
-        <p:txBody>
-          <a:bodyPr/>
-          <a:lstStyle/>
-          <a:p>
-            <a:r>
-              <a:rPr lang="en-US" dirty="0"/>
-              <a:t>Autoencoders (1)</a:t>
-            </a:r>
-            <a:endParaRPr lang="en-US" dirty="0">
-              <a:solidFill>
-                <a:schemeClr val="accent1"/>
+                <a:schemeClr val="accent1">
+                  <a:lumMod val="75000"/>
+                </a:schemeClr>
               </a:solidFill>
             </a:endParaRPr>
           </a:p>
@@ -11184,7 +12813,7 @@
                 </a:r>
                 <a:r>
                   <a:rPr lang="en-US" dirty="0"/>
-                  <a:t> between the encoder and the decoder. This forces the model to construct a lower-dimensional representation in the latent space, which we take to be </a:t>
+                  <a:t> between the encoder and the decoder. This forces the model to construct a lower-dimensional representation in the latent space </a:t>
                 </a:r>
                 <a14:m>
                   <m:oMath xmlns:m="http://schemas.openxmlformats.org/officeDocument/2006/math">
@@ -11232,14 +12861,14 @@
                       </m:e>
                       <m:sup>
                         <m:r>
-                          <a:rPr lang="en-US" i="1">
+                          <a:rPr lang="en-US" b="0" i="1" smtClean="0">
                             <a:solidFill>
                               <a:srgbClr val="0033CC"/>
                             </a:solidFill>
                             <a:latin typeface="Cambria Math" panose="02040503050406030204" pitchFamily="18" charset="0"/>
                             <a:ea typeface="Cambria Math" panose="02040503050406030204" pitchFamily="18" charset="0"/>
                           </a:rPr>
-                          <m:t>2</m:t>
+                          <m:t>𝑛</m:t>
                         </m:r>
                       </m:sup>
                     </m:sSup>
@@ -11247,7 +12876,7 @@
                 </a14:m>
                 <a:r>
                   <a:rPr lang="en-US" dirty="0"/>
-                  <a:t>, of the input data </a:t>
+                  <a:t> of the input data </a:t>
                 </a:r>
                 <a14:m>
                   <m:oMath xmlns:m="http://schemas.openxmlformats.org/officeDocument/2006/math">
@@ -11295,14 +12924,14 @@
                       </m:e>
                       <m:sup>
                         <m:r>
-                          <a:rPr lang="en-US" i="1">
+                          <a:rPr lang="en-US" b="0" i="1" smtClean="0">
                             <a:solidFill>
                               <a:srgbClr val="0033CC"/>
                             </a:solidFill>
                             <a:latin typeface="Cambria Math" panose="02040503050406030204" pitchFamily="18" charset="0"/>
                             <a:ea typeface="Cambria Math" panose="02040503050406030204" pitchFamily="18" charset="0"/>
                           </a:rPr>
-                          <m:t>5</m:t>
+                          <m:t>𝑁</m:t>
                         </m:r>
                       </m:sup>
                     </m:sSup>
@@ -11544,7 +13173,60 @@
                 </a14:m>
                 <a:r>
                   <a:rPr lang="en-US" dirty="0"/>
-                  <a:t>, is typically used. Revisiting our derivation of the functional derivative, but specializing to the current case, we arrive at</a:t>
+                  <a:t>, is typically used. Revisiting our derivation of the functional derivative </a:t>
+                </a:r>
+                <a14:m>
+                  <m:oMath xmlns:m="http://schemas.openxmlformats.org/officeDocument/2006/math">
+                    <m:r>
+                      <a:rPr lang="en-US" b="0" i="1" smtClean="0">
+                        <a:solidFill>
+                          <a:srgbClr val="0033CC"/>
+                        </a:solidFill>
+                        <a:latin typeface="Cambria Math" panose="02040503050406030204" pitchFamily="18" charset="0"/>
+                      </a:rPr>
+                      <m:t>𝛿</m:t>
+                    </m:r>
+                    <m:r>
+                      <a:rPr lang="en-US" b="0" i="1" smtClean="0">
+                        <a:solidFill>
+                          <a:srgbClr val="0033CC"/>
+                        </a:solidFill>
+                        <a:latin typeface="Cambria Math" panose="02040503050406030204" pitchFamily="18" charset="0"/>
+                      </a:rPr>
+                      <m:t>𝑅</m:t>
+                    </m:r>
+                    <m:r>
+                      <a:rPr lang="en-US" b="0" i="1" smtClean="0">
+                        <a:solidFill>
+                          <a:srgbClr val="0033CC"/>
+                        </a:solidFill>
+                        <a:latin typeface="Cambria Math" panose="02040503050406030204" pitchFamily="18" charset="0"/>
+                      </a:rPr>
+                      <m:t>/</m:t>
+                    </m:r>
+                    <m:r>
+                      <a:rPr lang="en-US" b="0" i="1" smtClean="0">
+                        <a:solidFill>
+                          <a:srgbClr val="0033CC"/>
+                        </a:solidFill>
+                        <a:latin typeface="Cambria Math" panose="02040503050406030204" pitchFamily="18" charset="0"/>
+                      </a:rPr>
+                      <m:t>𝛿</m:t>
+                    </m:r>
+                    <m:r>
+                      <a:rPr lang="en-US" b="0" i="1" smtClean="0">
+                        <a:solidFill>
+                          <a:srgbClr val="0033CC"/>
+                        </a:solidFill>
+                        <a:latin typeface="Cambria Math" panose="02040503050406030204" pitchFamily="18" charset="0"/>
+                      </a:rPr>
+                      <m:t>𝑓</m:t>
+                    </m:r>
+                  </m:oMath>
+                </a14:m>
+                <a:r>
+                  <a:rPr lang="en-US" dirty="0"/>
+                  <a:t>, but specializing to the current case, leads to</a:t>
                 </a:r>
                 <a:endParaRPr lang="en-US" i="1" dirty="0">
                   <a:latin typeface="Cambria Math" panose="02040503050406030204" pitchFamily="18" charset="0"/>
@@ -11739,7 +13421,7 @@
               <a:blipFill>
                 <a:blip r:embed="rId2"/>
                 <a:stretch>
-                  <a:fillRect l="-1305" t="-1316" b="-36316"/>
+                  <a:fillRect l="-1305" t="-1316" r="-163" b="-36316"/>
                 </a:stretch>
               </a:blipFill>
             </p:spPr>
@@ -11762,6 +13444,1248 @@
     <p:extLst>
       <p:ext uri="{BB962C8B-B14F-4D97-AF65-F5344CB8AC3E}">
         <p14:creationId xmlns:p14="http://schemas.microsoft.com/office/powerpoint/2010/main" val="301026001"/>
+      </p:ext>
+    </p:extLst>
+  </p:cSld>
+  <p:clrMapOvr>
+    <a:masterClrMapping/>
+  </p:clrMapOvr>
+  <mc:AlternateContent xmlns:mc="http://schemas.openxmlformats.org/markup-compatibility/2006" xmlns:p14="http://schemas.microsoft.com/office/powerpoint/2010/main">
+    <mc:Choice Requires="p14">
+      <p:transition spd="med" p14:dur="700">
+        <p:fade/>
+      </p:transition>
+    </mc:Choice>
+    <mc:Fallback xmlns="">
+      <p:transition spd="med">
+        <p:fade/>
+      </p:transition>
+    </mc:Fallback>
+  </mc:AlternateContent>
+</p:sld>
+</file>
+
+<file path=ppt/slides/slide6.xml><?xml version="1.0" encoding="utf-8"?>
+<p:sld xmlns:a="http://schemas.openxmlformats.org/drawingml/2006/main" xmlns:r="http://schemas.openxmlformats.org/officeDocument/2006/relationships" xmlns:p="http://schemas.openxmlformats.org/presentationml/2006/main">
+  <p:cSld>
+    <p:spTree>
+      <p:nvGrpSpPr>
+        <p:cNvPr id="1" name="">
+          <a:extLst>
+            <a:ext uri="{FF2B5EF4-FFF2-40B4-BE49-F238E27FC236}">
+              <a16:creationId xmlns:a16="http://schemas.microsoft.com/office/drawing/2014/main" id="{E1D59C08-41B8-A2D2-647E-DE2B2B9B8F0E}"/>
+            </a:ext>
+          </a:extLst>
+        </p:cNvPr>
+        <p:cNvGrpSpPr/>
+        <p:nvPr/>
+      </p:nvGrpSpPr>
+      <p:grpSpPr>
+        <a:xfrm>
+          <a:off x="0" y="0"/>
+          <a:ext cx="0" cy="0"/>
+          <a:chOff x="0" y="0"/>
+          <a:chExt cx="0" cy="0"/>
+        </a:xfrm>
+      </p:grpSpPr>
+      <p:sp>
+        <p:nvSpPr>
+          <p:cNvPr id="7" name="Title 6">
+            <a:extLst>
+              <a:ext uri="{FF2B5EF4-FFF2-40B4-BE49-F238E27FC236}">
+                <a16:creationId xmlns:a16="http://schemas.microsoft.com/office/drawing/2014/main" id="{9ACFEAEC-5075-C633-6D8C-1AEC17C0C3E1}"/>
+              </a:ext>
+            </a:extLst>
+          </p:cNvPr>
+          <p:cNvSpPr>
+            <a:spLocks noGrp="1"/>
+          </p:cNvSpPr>
+          <p:nvPr>
+            <p:ph type="title"/>
+          </p:nvPr>
+        </p:nvSpPr>
+        <p:spPr/>
+        <p:txBody>
+          <a:bodyPr/>
+          <a:lstStyle/>
+          <a:p>
+            <a:r>
+              <a:rPr lang="en-US" dirty="0"/>
+              <a:t>Introduction (5)</a:t>
+            </a:r>
+            <a:endParaRPr lang="en-US" dirty="0">
+              <a:solidFill>
+                <a:schemeClr val="accent1"/>
+              </a:solidFill>
+            </a:endParaRPr>
+          </a:p>
+        </p:txBody>
+      </p:sp>
+      <mc:AlternateContent xmlns:mc="http://schemas.openxmlformats.org/markup-compatibility/2006" xmlns:a14="http://schemas.microsoft.com/office/drawing/2010/main">
+        <mc:Choice Requires="a14">
+          <p:sp>
+            <p:nvSpPr>
+              <p:cNvPr id="8" name="Content Placeholder 7">
+                <a:extLst>
+                  <a:ext uri="{FF2B5EF4-FFF2-40B4-BE49-F238E27FC236}">
+                    <a16:creationId xmlns:a16="http://schemas.microsoft.com/office/drawing/2014/main" id="{643F5EAD-1EF0-251F-2946-991C2C879FB9}"/>
+                  </a:ext>
+                </a:extLst>
+              </p:cNvPr>
+              <p:cNvSpPr>
+                <a:spLocks noGrp="1"/>
+              </p:cNvSpPr>
+              <p:nvPr>
+                <p:ph idx="1"/>
+              </p:nvPr>
+            </p:nvSpPr>
+            <p:spPr/>
+            <p:txBody>
+              <a:bodyPr/>
+              <a:lstStyle/>
+              <a:p>
+                <a:pPr marL="0" indent="0">
+                  <a:buNone/>
+                </a:pPr>
+                <a:r>
+                  <a:rPr lang="en-US" dirty="0">
+                    <a:latin typeface="Times New Roman" panose="02020603050405020304" pitchFamily="18" charset="0"/>
+                    <a:cs typeface="Times New Roman" panose="02020603050405020304" pitchFamily="18" charset="0"/>
+                  </a:rPr>
+                  <a:t>Since, by assumption, the function </a:t>
+                </a:r>
+                <a14:m>
+                  <m:oMath xmlns:m="http://schemas.openxmlformats.org/officeDocument/2006/math">
+                    <m:r>
+                      <a:rPr lang="en-US" i="1" smtClean="0">
+                        <a:solidFill>
+                          <a:srgbClr val="0033CC"/>
+                        </a:solidFill>
+                        <a:latin typeface="Cambria Math" panose="02040503050406030204" pitchFamily="18" charset="0"/>
+                      </a:rPr>
+                      <m:t>𝑔</m:t>
+                    </m:r>
+                    <m:r>
+                      <a:rPr lang="en-US" i="1" smtClean="0">
+                        <a:solidFill>
+                          <a:srgbClr val="0033CC"/>
+                        </a:solidFill>
+                        <a:latin typeface="Cambria Math" panose="02040503050406030204" pitchFamily="18" charset="0"/>
+                      </a:rPr>
+                      <m:t>(</m:t>
+                    </m:r>
+                    <m:r>
+                      <a:rPr lang="en-US" i="1" smtClean="0">
+                        <a:solidFill>
+                          <a:srgbClr val="0033CC"/>
+                        </a:solidFill>
+                        <a:latin typeface="Cambria Math" panose="02040503050406030204" pitchFamily="18" charset="0"/>
+                      </a:rPr>
+                      <m:t>𝑥</m:t>
+                    </m:r>
+                    <m:r>
+                      <a:rPr lang="en-US" i="1" smtClean="0">
+                        <a:solidFill>
+                          <a:srgbClr val="0033CC"/>
+                        </a:solidFill>
+                        <a:latin typeface="Cambria Math" panose="02040503050406030204" pitchFamily="18" charset="0"/>
+                      </a:rPr>
+                      <m:t>)</m:t>
+                    </m:r>
+                  </m:oMath>
+                </a14:m>
+                <a:r>
+                  <a:rPr lang="en-US" dirty="0">
+                    <a:latin typeface="Times New Roman" panose="02020603050405020304" pitchFamily="18" charset="0"/>
+                    <a:cs typeface="Times New Roman" panose="02020603050405020304" pitchFamily="18" charset="0"/>
+                  </a:rPr>
+                  <a:t> is arbitrary in</a:t>
+                </a:r>
+              </a:p>
+              <a:p>
+                <a:pPr marL="0" indent="0">
+                  <a:buNone/>
+                </a:pPr>
+                <a14:m>
+                  <m:oMathPara xmlns:m="http://schemas.openxmlformats.org/officeDocument/2006/math">
+                    <m:oMathParaPr>
+                      <m:jc m:val="centerGroup"/>
+                    </m:oMathParaPr>
+                    <m:oMath xmlns:m="http://schemas.openxmlformats.org/officeDocument/2006/math">
+                      <m:nary>
+                        <m:naryPr>
+                          <m:limLoc m:val="undOvr"/>
+                          <m:subHide m:val="on"/>
+                          <m:supHide m:val="on"/>
+                          <m:ctrlPr>
+                            <a:rPr lang="en-US" i="1">
+                              <a:latin typeface="Cambria Math" panose="02040503050406030204" pitchFamily="18" charset="0"/>
+                            </a:rPr>
+                          </m:ctrlPr>
+                        </m:naryPr>
+                        <m:sub/>
+                        <m:sup/>
+                        <m:e>
+                          <m:r>
+                            <a:rPr lang="en-US" i="1">
+                              <a:latin typeface="Cambria Math" panose="02040503050406030204" pitchFamily="18" charset="0"/>
+                            </a:rPr>
+                            <m:t>𝑑𝑥</m:t>
+                          </m:r>
+                          <m:r>
+                            <a:rPr lang="en-US" i="1">
+                              <a:latin typeface="Cambria Math" panose="02040503050406030204" pitchFamily="18" charset="0"/>
+                            </a:rPr>
+                            <m:t> </m:t>
+                          </m:r>
+                          <m:r>
+                            <a:rPr lang="en-US" i="1">
+                              <a:latin typeface="Cambria Math" panose="02040503050406030204" pitchFamily="18" charset="0"/>
+                            </a:rPr>
+                            <m:t>𝑝</m:t>
+                          </m:r>
+                          <m:d>
+                            <m:dPr>
+                              <m:ctrlPr>
+                                <a:rPr lang="en-US" i="1">
+                                  <a:latin typeface="Cambria Math" panose="02040503050406030204" pitchFamily="18" charset="0"/>
+                                </a:rPr>
+                              </m:ctrlPr>
+                            </m:dPr>
+                            <m:e>
+                              <m:r>
+                                <a:rPr lang="en-US" i="1">
+                                  <a:latin typeface="Cambria Math" panose="02040503050406030204" pitchFamily="18" charset="0"/>
+                                </a:rPr>
+                                <m:t>𝑥</m:t>
+                              </m:r>
+                            </m:e>
+                          </m:d>
+                          <m:r>
+                            <a:rPr lang="en-US" i="1">
+                              <a:latin typeface="Cambria Math" panose="02040503050406030204" pitchFamily="18" charset="0"/>
+                            </a:rPr>
+                            <m:t>𝑔</m:t>
+                          </m:r>
+                          <m:r>
+                            <a:rPr lang="en-US" i="1">
+                              <a:latin typeface="Cambria Math" panose="02040503050406030204" pitchFamily="18" charset="0"/>
+                            </a:rPr>
+                            <m:t>(</m:t>
+                          </m:r>
+                          <m:r>
+                            <a:rPr lang="en-US" i="1">
+                              <a:latin typeface="Cambria Math" panose="02040503050406030204" pitchFamily="18" charset="0"/>
+                            </a:rPr>
+                            <m:t>𝑥</m:t>
+                          </m:r>
+                          <m:r>
+                            <a:rPr lang="en-US" i="1">
+                              <a:latin typeface="Cambria Math" panose="02040503050406030204" pitchFamily="18" charset="0"/>
+                            </a:rPr>
+                            <m:t>)</m:t>
+                          </m:r>
+                          <m:f>
+                            <m:fPr>
+                              <m:ctrlPr>
+                                <a:rPr lang="en-US" i="1">
+                                  <a:latin typeface="Cambria Math" panose="02040503050406030204" pitchFamily="18" charset="0"/>
+                                </a:rPr>
+                              </m:ctrlPr>
+                            </m:fPr>
+                            <m:num>
+                              <m:r>
+                                <a:rPr lang="en-US" i="1">
+                                  <a:latin typeface="Cambria Math" panose="02040503050406030204" pitchFamily="18" charset="0"/>
+                                </a:rPr>
+                                <m:t>𝜕</m:t>
+                              </m:r>
+                              <m:r>
+                                <a:rPr lang="en-US" i="1">
+                                  <a:latin typeface="Cambria Math" panose="02040503050406030204" pitchFamily="18" charset="0"/>
+                                </a:rPr>
+                                <m:t>𝐿</m:t>
+                              </m:r>
+                            </m:num>
+                            <m:den>
+                              <m:r>
+                                <a:rPr lang="en-US" i="1">
+                                  <a:latin typeface="Cambria Math" panose="02040503050406030204" pitchFamily="18" charset="0"/>
+                                </a:rPr>
+                                <m:t>𝜕</m:t>
+                              </m:r>
+                              <m:r>
+                                <a:rPr lang="en-US" i="1">
+                                  <a:latin typeface="Cambria Math" panose="02040503050406030204" pitchFamily="18" charset="0"/>
+                                </a:rPr>
+                                <m:t>𝑓</m:t>
+                              </m:r>
+                            </m:den>
+                          </m:f>
+                        </m:e>
+                      </m:nary>
+                      <m:r>
+                        <a:rPr lang="en-US" i="1">
+                          <a:latin typeface="Cambria Math" panose="02040503050406030204" pitchFamily="18" charset="0"/>
+                        </a:rPr>
+                        <m:t>=0</m:t>
+                      </m:r>
+                    </m:oMath>
+                  </m:oMathPara>
+                </a14:m>
+                <a:endParaRPr lang="en-US" dirty="0"/>
+              </a:p>
+              <a:p>
+                <a:pPr marL="0" indent="0">
+                  <a:buNone/>
+                </a:pPr>
+                <a:r>
+                  <a:rPr lang="en-US" dirty="0"/>
+                  <a:t>Then, if </a:t>
+                </a:r>
+                <a14:m>
+                  <m:oMath xmlns:m="http://schemas.openxmlformats.org/officeDocument/2006/math">
+                    <m:r>
+                      <a:rPr lang="en-US" i="1" smtClean="0">
+                        <a:solidFill>
+                          <a:srgbClr val="0033CC"/>
+                        </a:solidFill>
+                        <a:latin typeface="Cambria Math" panose="02040503050406030204" pitchFamily="18" charset="0"/>
+                      </a:rPr>
+                      <m:t>𝑝</m:t>
+                    </m:r>
+                    <m:d>
+                      <m:dPr>
+                        <m:ctrlPr>
+                          <a:rPr lang="en-US" i="1">
+                            <a:solidFill>
+                              <a:srgbClr val="0033CC"/>
+                            </a:solidFill>
+                            <a:latin typeface="Cambria Math" panose="02040503050406030204" pitchFamily="18" charset="0"/>
+                          </a:rPr>
+                        </m:ctrlPr>
+                      </m:dPr>
+                      <m:e>
+                        <m:r>
+                          <a:rPr lang="en-US" i="1">
+                            <a:solidFill>
+                              <a:srgbClr val="0033CC"/>
+                            </a:solidFill>
+                            <a:latin typeface="Cambria Math" panose="02040503050406030204" pitchFamily="18" charset="0"/>
+                          </a:rPr>
+                          <m:t>𝑥</m:t>
+                        </m:r>
+                      </m:e>
+                    </m:d>
+                    <m:r>
+                      <a:rPr lang="en-US" b="0" i="1" smtClean="0">
+                        <a:solidFill>
+                          <a:srgbClr val="0033CC"/>
+                        </a:solidFill>
+                        <a:latin typeface="Cambria Math" panose="02040503050406030204" pitchFamily="18" charset="0"/>
+                      </a:rPr>
+                      <m:t>&gt;0 ∀ </m:t>
+                    </m:r>
+                    <m:r>
+                      <a:rPr lang="en-US" b="0" i="1" smtClean="0">
+                        <a:solidFill>
+                          <a:srgbClr val="0033CC"/>
+                        </a:solidFill>
+                        <a:latin typeface="Cambria Math" panose="02040503050406030204" pitchFamily="18" charset="0"/>
+                      </a:rPr>
+                      <m:t>𝑥</m:t>
+                    </m:r>
+                  </m:oMath>
+                </a14:m>
+                <a:r>
+                  <a:rPr lang="en-US" dirty="0"/>
+                  <a:t>, the equality will hold </a:t>
+                </a:r>
+                <a:r>
+                  <a:rPr lang="en-US" i="1" dirty="0"/>
+                  <a:t>if and only if </a:t>
+                </a:r>
+                <a:endParaRPr lang="en-US" i="1" dirty="0">
+                  <a:latin typeface="Cambria Math" panose="02040503050406030204" pitchFamily="18" charset="0"/>
+                </a:endParaRPr>
+              </a:p>
+              <a:p>
+                <a:pPr marL="0" indent="0">
+                  <a:buNone/>
+                </a:pPr>
+                <a14:m>
+                  <m:oMathPara xmlns:m="http://schemas.openxmlformats.org/officeDocument/2006/math">
+                    <m:oMathParaPr>
+                      <m:jc m:val="centerGroup"/>
+                    </m:oMathParaPr>
+                    <m:oMath xmlns:m="http://schemas.openxmlformats.org/officeDocument/2006/math">
+                      <m:f>
+                        <m:fPr>
+                          <m:ctrlPr>
+                            <a:rPr lang="en-US" i="1">
+                              <a:latin typeface="Cambria Math" panose="02040503050406030204" pitchFamily="18" charset="0"/>
+                            </a:rPr>
+                          </m:ctrlPr>
+                        </m:fPr>
+                        <m:num>
+                          <m:r>
+                            <a:rPr lang="en-US" i="1">
+                              <a:latin typeface="Cambria Math" panose="02040503050406030204" pitchFamily="18" charset="0"/>
+                            </a:rPr>
+                            <m:t>𝜕</m:t>
+                          </m:r>
+                          <m:r>
+                            <a:rPr lang="en-US" i="1">
+                              <a:latin typeface="Cambria Math" panose="02040503050406030204" pitchFamily="18" charset="0"/>
+                            </a:rPr>
+                            <m:t>𝐿</m:t>
+                          </m:r>
+                        </m:num>
+                        <m:den>
+                          <m:r>
+                            <a:rPr lang="en-US" i="1">
+                              <a:latin typeface="Cambria Math" panose="02040503050406030204" pitchFamily="18" charset="0"/>
+                            </a:rPr>
+                            <m:t>𝜕</m:t>
+                          </m:r>
+                          <m:r>
+                            <a:rPr lang="en-US" i="1">
+                              <a:latin typeface="Cambria Math" panose="02040503050406030204" pitchFamily="18" charset="0"/>
+                            </a:rPr>
+                            <m:t>𝑓</m:t>
+                          </m:r>
+                        </m:den>
+                      </m:f>
+                      <m:r>
+                        <a:rPr lang="en-US" b="0" i="1" smtClean="0">
+                          <a:latin typeface="Cambria Math" panose="02040503050406030204" pitchFamily="18" charset="0"/>
+                        </a:rPr>
+                        <m:t>=0</m:t>
+                      </m:r>
+                    </m:oMath>
+                  </m:oMathPara>
+                </a14:m>
+                <a:br>
+                  <a:rPr lang="en-US" dirty="0"/>
+                </a:br>
+                <a:endParaRPr lang="en-US" dirty="0"/>
+              </a:p>
+              <a:p>
+                <a:pPr marL="0" indent="0">
+                  <a:buNone/>
+                </a:pPr>
+                <a:r>
+                  <a:rPr lang="en-US" dirty="0"/>
+                  <a:t>which, for </a:t>
+                </a:r>
+                <a14:m>
+                  <m:oMath xmlns:m="http://schemas.openxmlformats.org/officeDocument/2006/math">
+                    <m:r>
+                      <a:rPr lang="en-US" i="1">
+                        <a:solidFill>
+                          <a:srgbClr val="0033CC"/>
+                        </a:solidFill>
+                        <a:latin typeface="Cambria Math" panose="02040503050406030204" pitchFamily="18" charset="0"/>
+                        <a:ea typeface="Cambria Math" charset="0"/>
+                        <a:cs typeface="Cambria Math" charset="0"/>
+                      </a:rPr>
+                      <m:t>𝐿</m:t>
+                    </m:r>
+                    <m:d>
+                      <m:dPr>
+                        <m:ctrlPr>
+                          <a:rPr lang="en-US" i="1">
+                            <a:solidFill>
+                              <a:srgbClr val="0033CC"/>
+                            </a:solidFill>
+                            <a:latin typeface="Cambria Math" panose="02040503050406030204" pitchFamily="18" charset="0"/>
+                            <a:ea typeface="Cambria Math" charset="0"/>
+                            <a:cs typeface="Cambria Math" charset="0"/>
+                          </a:rPr>
+                        </m:ctrlPr>
+                      </m:dPr>
+                      <m:e>
+                        <m:r>
+                          <a:rPr lang="en-US" i="1">
+                            <a:solidFill>
+                              <a:srgbClr val="0033CC"/>
+                            </a:solidFill>
+                            <a:latin typeface="Cambria Math" panose="02040503050406030204" pitchFamily="18" charset="0"/>
+                            <a:ea typeface="Cambria Math" charset="0"/>
+                            <a:cs typeface="Cambria Math" charset="0"/>
+                          </a:rPr>
+                          <m:t>𝑥</m:t>
+                        </m:r>
+                        <m:r>
+                          <a:rPr lang="en-US" i="1">
+                            <a:solidFill>
+                              <a:srgbClr val="0033CC"/>
+                            </a:solidFill>
+                            <a:latin typeface="Cambria Math" panose="02040503050406030204" pitchFamily="18" charset="0"/>
+                            <a:ea typeface="Cambria Math" charset="0"/>
+                            <a:cs typeface="Cambria Math" charset="0"/>
+                          </a:rPr>
+                          <m:t>, </m:t>
+                        </m:r>
+                        <m:r>
+                          <a:rPr lang="en-US" i="1">
+                            <a:solidFill>
+                              <a:srgbClr val="0033CC"/>
+                            </a:solidFill>
+                            <a:latin typeface="Cambria Math" panose="02040503050406030204" pitchFamily="18" charset="0"/>
+                            <a:ea typeface="Cambria Math" charset="0"/>
+                            <a:cs typeface="Cambria Math" charset="0"/>
+                          </a:rPr>
+                          <m:t>𝑓</m:t>
+                        </m:r>
+                      </m:e>
+                    </m:d>
+                    <m:r>
+                      <a:rPr lang="en-US">
+                        <a:solidFill>
+                          <a:srgbClr val="0033CC"/>
+                        </a:solidFill>
+                        <a:latin typeface="Cambria Math" panose="02040503050406030204" pitchFamily="18" charset="0"/>
+                        <a:ea typeface="Cambria Math" charset="0"/>
+                        <a:cs typeface="Cambria Math" charset="0"/>
+                      </a:rPr>
+                      <m:t>=</m:t>
+                    </m:r>
+                    <m:sSup>
+                      <m:sSupPr>
+                        <m:ctrlPr>
+                          <a:rPr lang="en-US" i="1">
+                            <a:solidFill>
+                              <a:srgbClr val="0033CC"/>
+                            </a:solidFill>
+                            <a:latin typeface="Cambria Math" panose="02040503050406030204" pitchFamily="18" charset="0"/>
+                          </a:rPr>
+                        </m:ctrlPr>
+                      </m:sSupPr>
+                      <m:e>
+                        <m:r>
+                          <a:rPr lang="en-US" i="1">
+                            <a:solidFill>
+                              <a:srgbClr val="0033CC"/>
+                            </a:solidFill>
+                            <a:latin typeface="Cambria Math" panose="02040503050406030204" pitchFamily="18" charset="0"/>
+                          </a:rPr>
+                          <m:t> </m:t>
+                        </m:r>
+                        <m:d>
+                          <m:dPr>
+                            <m:ctrlPr>
+                              <a:rPr lang="en-US" i="1">
+                                <a:solidFill>
+                                  <a:srgbClr val="0033CC"/>
+                                </a:solidFill>
+                                <a:latin typeface="Cambria Math" panose="02040503050406030204" pitchFamily="18" charset="0"/>
+                              </a:rPr>
+                            </m:ctrlPr>
+                          </m:dPr>
+                          <m:e>
+                            <m:r>
+                              <a:rPr lang="en-US" i="1">
+                                <a:solidFill>
+                                  <a:srgbClr val="0033CC"/>
+                                </a:solidFill>
+                                <a:latin typeface="Cambria Math" panose="02040503050406030204" pitchFamily="18" charset="0"/>
+                              </a:rPr>
+                              <m:t>𝑥</m:t>
+                            </m:r>
+                            <m:r>
+                              <a:rPr lang="en-US" i="1">
+                                <a:solidFill>
+                                  <a:srgbClr val="0033CC"/>
+                                </a:solidFill>
+                                <a:latin typeface="Cambria Math" charset="0"/>
+                              </a:rPr>
+                              <m:t>−</m:t>
+                            </m:r>
+                            <m:r>
+                              <a:rPr lang="en-US" i="1">
+                                <a:solidFill>
+                                  <a:srgbClr val="0033CC"/>
+                                </a:solidFill>
+                                <a:latin typeface="Cambria Math" charset="0"/>
+                              </a:rPr>
+                              <m:t>𝑓</m:t>
+                            </m:r>
+                          </m:e>
+                        </m:d>
+                      </m:e>
+                      <m:sup>
+                        <m:r>
+                          <a:rPr lang="en-US" i="1">
+                            <a:solidFill>
+                              <a:srgbClr val="0033CC"/>
+                            </a:solidFill>
+                            <a:latin typeface="Cambria Math" charset="0"/>
+                          </a:rPr>
+                          <m:t>2</m:t>
+                        </m:r>
+                      </m:sup>
+                    </m:sSup>
+                  </m:oMath>
+                </a14:m>
+                <a:r>
+                  <a:rPr lang="en-US" dirty="0"/>
+                  <a:t>, implies</a:t>
+                </a:r>
+              </a:p>
+              <a:p>
+                <a:pPr marL="0" indent="0" algn="ctr">
+                  <a:buNone/>
+                </a:pPr>
+                <a14:m>
+                  <m:oMath xmlns:m="http://schemas.openxmlformats.org/officeDocument/2006/math">
+                    <m:r>
+                      <a:rPr lang="en-US" i="1" dirty="0" smtClean="0">
+                        <a:latin typeface="Cambria Math" panose="02040503050406030204" pitchFamily="18" charset="0"/>
+                      </a:rPr>
+                      <m:t>𝑓</m:t>
+                    </m:r>
+                    <m:r>
+                      <a:rPr lang="en-US" i="1" dirty="0" smtClean="0">
+                        <a:latin typeface="Cambria Math" panose="02040503050406030204" pitchFamily="18" charset="0"/>
+                      </a:rPr>
+                      <m:t>(</m:t>
+                    </m:r>
+                    <m:r>
+                      <a:rPr lang="en-US" i="1" dirty="0" smtClean="0">
+                        <a:latin typeface="Cambria Math" panose="02040503050406030204" pitchFamily="18" charset="0"/>
+                      </a:rPr>
+                      <m:t>𝑥</m:t>
+                    </m:r>
+                    <m:r>
+                      <a:rPr lang="en-US" i="1" dirty="0" smtClean="0">
+                        <a:latin typeface="Cambria Math" panose="02040503050406030204" pitchFamily="18" charset="0"/>
+                      </a:rPr>
+                      <m:t>, </m:t>
+                    </m:r>
+                    <m:sSup>
+                      <m:sSupPr>
+                        <m:ctrlPr>
+                          <a:rPr lang="en-US" i="1" dirty="0">
+                            <a:latin typeface="Cambria Math" panose="02040503050406030204" pitchFamily="18" charset="0"/>
+                          </a:rPr>
+                        </m:ctrlPr>
+                      </m:sSupPr>
+                      <m:e>
+                        <m:r>
+                          <a:rPr lang="en-US" i="1" dirty="0">
+                            <a:latin typeface="Cambria Math" panose="02040503050406030204" pitchFamily="18" charset="0"/>
+                          </a:rPr>
+                          <m:t>𝜔</m:t>
+                        </m:r>
+                      </m:e>
+                      <m:sup>
+                        <m:r>
+                          <a:rPr lang="en-US" i="1" dirty="0">
+                            <a:latin typeface="Cambria Math" panose="02040503050406030204" pitchFamily="18" charset="0"/>
+                          </a:rPr>
+                          <m:t>∗</m:t>
+                        </m:r>
+                      </m:sup>
+                    </m:sSup>
+                    <m:r>
+                      <a:rPr lang="en-US" i="1" dirty="0">
+                        <a:latin typeface="Cambria Math" panose="02040503050406030204" pitchFamily="18" charset="0"/>
+                      </a:rPr>
+                      <m:t>)</m:t>
+                    </m:r>
+                    <m:r>
+                      <a:rPr lang="en-US" i="1">
+                        <a:latin typeface="Cambria Math" panose="02040503050406030204" pitchFamily="18" charset="0"/>
+                      </a:rPr>
+                      <m:t>=</m:t>
+                    </m:r>
+                    <m:r>
+                      <a:rPr lang="en-US" b="0" i="1" smtClean="0">
+                        <a:latin typeface="Cambria Math" panose="02040503050406030204" pitchFamily="18" charset="0"/>
+                      </a:rPr>
+                      <m:t>𝑥</m:t>
+                    </m:r>
+                  </m:oMath>
+                </a14:m>
+                <a:r>
+                  <a:rPr lang="en-US" dirty="0"/>
+                  <a:t>.</a:t>
+                </a:r>
+                <a:br>
+                  <a:rPr lang="en-US" dirty="0"/>
+                </a:br>
+                <a:endParaRPr lang="en-US" dirty="0"/>
+              </a:p>
+              <a:p>
+                <a:pPr marL="0" indent="0">
+                  <a:buNone/>
+                </a:pPr>
+                <a:r>
+                  <a:rPr lang="en-US" dirty="0"/>
+                  <a:t>In principle, the model provides an </a:t>
+                </a:r>
+                <a:r>
+                  <a:rPr lang="en-US" i="1" dirty="0">
+                    <a:solidFill>
+                      <a:srgbClr val="0033CC"/>
+                    </a:solidFill>
+                  </a:rPr>
+                  <a:t>unbiased</a:t>
+                </a:r>
+                <a:r>
+                  <a:rPr lang="en-US" dirty="0"/>
+                  <a:t> estimate of the input data.</a:t>
+                </a:r>
+              </a:p>
+            </p:txBody>
+          </p:sp>
+        </mc:Choice>
+        <mc:Fallback xmlns="">
+          <p:sp>
+            <p:nvSpPr>
+              <p:cNvPr id="8" name="Content Placeholder 7">
+                <a:extLst>
+                  <a:ext uri="{FF2B5EF4-FFF2-40B4-BE49-F238E27FC236}">
+                    <a16:creationId xmlns:a16="http://schemas.microsoft.com/office/drawing/2014/main" id="{643F5EAD-1EF0-251F-2946-991C2C879FB9}"/>
+                  </a:ext>
+                </a:extLst>
+              </p:cNvPr>
+              <p:cNvSpPr>
+                <a:spLocks noGrp="1" noRot="1" noChangeAspect="1" noMove="1" noResize="1" noEditPoints="1" noAdjustHandles="1" noChangeArrowheads="1" noChangeShapeType="1" noTextEdit="1"/>
+              </p:cNvSpPr>
+              <p:nvPr>
+                <p:ph idx="1"/>
+              </p:nvPr>
+            </p:nvSpPr>
+            <p:spPr>
+              <a:blipFill>
+                <a:blip r:embed="rId2"/>
+                <a:stretch>
+                  <a:fillRect l="-1305" t="-23421"/>
+                </a:stretch>
+              </a:blipFill>
+            </p:spPr>
+            <p:txBody>
+              <a:bodyPr/>
+              <a:lstStyle/>
+              <a:p>
+                <a:r>
+                  <a:rPr lang="en-US">
+                    <a:noFill/>
+                  </a:rPr>
+                  <a:t> </a:t>
+                </a:r>
+              </a:p>
+            </p:txBody>
+          </p:sp>
+        </mc:Fallback>
+      </mc:AlternateContent>
+    </p:spTree>
+    <p:extLst>
+      <p:ext uri="{BB962C8B-B14F-4D97-AF65-F5344CB8AC3E}">
+        <p14:creationId xmlns:p14="http://schemas.microsoft.com/office/powerpoint/2010/main" val="3442980997"/>
+      </p:ext>
+    </p:extLst>
+  </p:cSld>
+  <p:clrMapOvr>
+    <a:masterClrMapping/>
+  </p:clrMapOvr>
+  <mc:AlternateContent xmlns:mc="http://schemas.openxmlformats.org/markup-compatibility/2006" xmlns:p14="http://schemas.microsoft.com/office/powerpoint/2010/main">
+    <mc:Choice Requires="p14">
+      <p:transition spd="med" p14:dur="700">
+        <p:fade/>
+      </p:transition>
+    </mc:Choice>
+    <mc:Fallback xmlns="">
+      <p:transition spd="med">
+        <p:fade/>
+      </p:transition>
+    </mc:Fallback>
+  </mc:AlternateContent>
+</p:sld>
+</file>
+
+<file path=ppt/slides/slide7.xml><?xml version="1.0" encoding="utf-8"?>
+<p:sld xmlns:a="http://schemas.openxmlformats.org/drawingml/2006/main" xmlns:r="http://schemas.openxmlformats.org/officeDocument/2006/relationships" xmlns:p="http://schemas.openxmlformats.org/presentationml/2006/main">
+  <p:cSld>
+    <p:spTree>
+      <p:nvGrpSpPr>
+        <p:cNvPr id="1" name=""/>
+        <p:cNvGrpSpPr/>
+        <p:nvPr/>
+      </p:nvGrpSpPr>
+      <p:grpSpPr>
+        <a:xfrm>
+          <a:off x="0" y="0"/>
+          <a:ext cx="0" cy="0"/>
+          <a:chOff x="0" y="0"/>
+          <a:chExt cx="0" cy="0"/>
+        </a:xfrm>
+      </p:grpSpPr>
+      <p:sp>
+        <p:nvSpPr>
+          <p:cNvPr id="4" name="Content Placeholder 3">
+            <a:extLst>
+              <a:ext uri="{FF2B5EF4-FFF2-40B4-BE49-F238E27FC236}">
+                <a16:creationId xmlns:a16="http://schemas.microsoft.com/office/drawing/2014/main" id="{5C31BC51-E2D2-460E-B4DF-2D6E81BE4C4A}"/>
+              </a:ext>
+            </a:extLst>
+          </p:cNvPr>
+          <p:cNvSpPr>
+            <a:spLocks noGrp="1"/>
+          </p:cNvSpPr>
+          <p:nvPr>
+            <p:ph sz="half" idx="1"/>
+          </p:nvPr>
+        </p:nvSpPr>
+        <p:spPr/>
+        <p:txBody>
+          <a:bodyPr/>
+          <a:lstStyle/>
+          <a:p>
+            <a:r>
+              <a:rPr lang="en-US" dirty="0"/>
+              <a:t>There are many kinds of autoencoders, but we’ll consider two of the simplest:</a:t>
+            </a:r>
+          </a:p>
+          <a:p>
+            <a:pPr lvl="1"/>
+            <a:r>
+              <a:rPr lang="en-US" dirty="0"/>
+              <a:t>(Standard) </a:t>
+            </a:r>
+            <a:r>
+              <a:rPr lang="en-US" dirty="0">
+                <a:solidFill>
+                  <a:srgbClr val="0033CC"/>
+                </a:solidFill>
+              </a:rPr>
+              <a:t>Autoencoder</a:t>
+            </a:r>
+            <a:r>
+              <a:rPr lang="en-US" dirty="0"/>
+              <a:t> (AE)</a:t>
+            </a:r>
+          </a:p>
+          <a:p>
+            <a:pPr lvl="1"/>
+            <a:r>
+              <a:rPr lang="en-US" dirty="0">
+                <a:solidFill>
+                  <a:srgbClr val="0033CC"/>
+                </a:solidFill>
+              </a:rPr>
+              <a:t>Convolutional Autoencoder </a:t>
+            </a:r>
+            <a:r>
+              <a:rPr lang="en-US" dirty="0"/>
+              <a:t>(CAE)</a:t>
+            </a:r>
+          </a:p>
+          <a:p>
+            <a:pPr lvl="1"/>
+            <a:endParaRPr lang="en-US" dirty="0"/>
+          </a:p>
+          <a:p>
+            <a:r>
+              <a:rPr lang="en-US" dirty="0"/>
+              <a:t>An important class of autoencoders that we shall not discuss is </a:t>
+            </a:r>
+            <a:r>
+              <a:rPr lang="en-US" dirty="0">
+                <a:solidFill>
+                  <a:srgbClr val="0033CC"/>
+                </a:solidFill>
+              </a:rPr>
+              <a:t>Variational Autoencoders </a:t>
+            </a:r>
+            <a:r>
+              <a:rPr lang="en-US" dirty="0"/>
+              <a:t>(VAE).</a:t>
+            </a:r>
+          </a:p>
+          <a:p>
+            <a:endParaRPr lang="en-US" dirty="0"/>
+          </a:p>
+          <a:p>
+            <a:r>
+              <a:rPr lang="en-US" dirty="0"/>
+              <a:t>We’ll discuss AE and CAE using simple examples.</a:t>
+            </a:r>
+          </a:p>
+        </p:txBody>
+      </p:sp>
+      <p:sp>
+        <p:nvSpPr>
+          <p:cNvPr id="3" name="Title 2">
+            <a:extLst>
+              <a:ext uri="{FF2B5EF4-FFF2-40B4-BE49-F238E27FC236}">
+                <a16:creationId xmlns:a16="http://schemas.microsoft.com/office/drawing/2014/main" id="{36B80657-73AD-89AF-0E67-034D2850A258}"/>
+              </a:ext>
+            </a:extLst>
+          </p:cNvPr>
+          <p:cNvSpPr>
+            <a:spLocks noGrp="1"/>
+          </p:cNvSpPr>
+          <p:nvPr>
+            <p:ph type="title"/>
+          </p:nvPr>
+        </p:nvSpPr>
+        <p:spPr/>
+        <p:txBody>
+          <a:bodyPr/>
+          <a:lstStyle/>
+          <a:p>
+            <a:r>
+              <a:rPr lang="en-US" dirty="0"/>
+              <a:t>Introduction (6) </a:t>
+            </a:r>
+          </a:p>
+        </p:txBody>
+      </p:sp>
+    </p:spTree>
+    <p:extLst>
+      <p:ext uri="{BB962C8B-B14F-4D97-AF65-F5344CB8AC3E}">
+        <p14:creationId xmlns:p14="http://schemas.microsoft.com/office/powerpoint/2010/main" val="3326910107"/>
+      </p:ext>
+    </p:extLst>
+  </p:cSld>
+  <p:clrMapOvr>
+    <a:masterClrMapping/>
+  </p:clrMapOvr>
+</p:sld>
+</file>
+
+<file path=ppt/slides/slide8.xml><?xml version="1.0" encoding="utf-8"?>
+<p:sld xmlns:a="http://schemas.openxmlformats.org/drawingml/2006/main" xmlns:r="http://schemas.openxmlformats.org/officeDocument/2006/relationships" xmlns:p="http://schemas.openxmlformats.org/presentationml/2006/main">
+  <p:cSld>
+    <p:spTree>
+      <p:nvGrpSpPr>
+        <p:cNvPr id="1" name="">
+          <a:extLst>
+            <a:ext uri="{FF2B5EF4-FFF2-40B4-BE49-F238E27FC236}">
+              <a16:creationId xmlns:a16="http://schemas.microsoft.com/office/drawing/2014/main" id="{8B8363AD-3EC9-612C-DEDC-FE624437AB7F}"/>
+            </a:ext>
+          </a:extLst>
+        </p:cNvPr>
+        <p:cNvGrpSpPr/>
+        <p:nvPr/>
+      </p:nvGrpSpPr>
+      <p:grpSpPr>
+        <a:xfrm>
+          <a:off x="0" y="0"/>
+          <a:ext cx="0" cy="0"/>
+          <a:chOff x="0" y="0"/>
+          <a:chExt cx="0" cy="0"/>
+        </a:xfrm>
+      </p:grpSpPr>
+      <p:sp>
+        <p:nvSpPr>
+          <p:cNvPr id="4" name="Title 3">
+            <a:extLst>
+              <a:ext uri="{FF2B5EF4-FFF2-40B4-BE49-F238E27FC236}">
+                <a16:creationId xmlns:a16="http://schemas.microsoft.com/office/drawing/2014/main" id="{BE7EC2CE-5B10-7A14-5C25-5E8833307923}"/>
+              </a:ext>
+            </a:extLst>
+          </p:cNvPr>
+          <p:cNvSpPr>
+            <a:spLocks noGrp="1"/>
+          </p:cNvSpPr>
+          <p:nvPr>
+            <p:ph type="ctrTitle"/>
+          </p:nvPr>
+        </p:nvSpPr>
+        <p:spPr/>
+        <p:txBody>
+          <a:bodyPr/>
+          <a:lstStyle/>
+          <a:p>
+            <a:r>
+              <a:rPr lang="en-US" dirty="0"/>
+              <a:t>Autoencoders (AE)</a:t>
+            </a:r>
+            <a:endParaRPr lang="en-US" sz="2400" dirty="0">
+              <a:solidFill>
+                <a:srgbClr val="0033CC"/>
+              </a:solidFill>
+            </a:endParaRPr>
+          </a:p>
+        </p:txBody>
+      </p:sp>
+    </p:spTree>
+    <p:extLst>
+      <p:ext uri="{BB962C8B-B14F-4D97-AF65-F5344CB8AC3E}">
+        <p14:creationId xmlns:p14="http://schemas.microsoft.com/office/powerpoint/2010/main" val="1659426476"/>
+      </p:ext>
+    </p:extLst>
+  </p:cSld>
+  <p:clrMapOvr>
+    <a:masterClrMapping/>
+  </p:clrMapOvr>
+  <p:transition>
+    <p:fade/>
+  </p:transition>
+</p:sld>
+</file>
+
+<file path=ppt/slides/slide9.xml><?xml version="1.0" encoding="utf-8"?>
+<p:sld xmlns:a="http://schemas.openxmlformats.org/drawingml/2006/main" xmlns:r="http://schemas.openxmlformats.org/officeDocument/2006/relationships" xmlns:p="http://schemas.openxmlformats.org/presentationml/2006/main">
+  <p:cSld>
+    <p:spTree>
+      <p:nvGrpSpPr>
+        <p:cNvPr id="1" name="">
+          <a:extLst>
+            <a:ext uri="{FF2B5EF4-FFF2-40B4-BE49-F238E27FC236}">
+              <a16:creationId xmlns:a16="http://schemas.microsoft.com/office/drawing/2014/main" id="{391CF93D-FDD3-43DB-4570-580903FD8030}"/>
+            </a:ext>
+          </a:extLst>
+        </p:cNvPr>
+        <p:cNvGrpSpPr/>
+        <p:nvPr/>
+      </p:nvGrpSpPr>
+      <p:grpSpPr>
+        <a:xfrm>
+          <a:off x="0" y="0"/>
+          <a:ext cx="0" cy="0"/>
+          <a:chOff x="0" y="0"/>
+          <a:chExt cx="0" cy="0"/>
+        </a:xfrm>
+      </p:grpSpPr>
+      <p:sp>
+        <p:nvSpPr>
+          <p:cNvPr id="7" name="Title 6">
+            <a:extLst>
+              <a:ext uri="{FF2B5EF4-FFF2-40B4-BE49-F238E27FC236}">
+                <a16:creationId xmlns:a16="http://schemas.microsoft.com/office/drawing/2014/main" id="{6B279E5A-1E8E-574A-DDCD-07B1AAE357AB}"/>
+              </a:ext>
+            </a:extLst>
+          </p:cNvPr>
+          <p:cNvSpPr>
+            <a:spLocks noGrp="1"/>
+          </p:cNvSpPr>
+          <p:nvPr>
+            <p:ph type="title"/>
+          </p:nvPr>
+        </p:nvSpPr>
+        <p:spPr/>
+        <p:txBody>
+          <a:bodyPr/>
+          <a:lstStyle/>
+          <a:p>
+            <a:r>
+              <a:rPr lang="en-US" dirty="0"/>
+              <a:t>Autoencoders (1)</a:t>
+            </a:r>
+            <a:endParaRPr lang="en-US" dirty="0">
+              <a:solidFill>
+                <a:schemeClr val="accent1"/>
+              </a:solidFill>
+            </a:endParaRPr>
+          </a:p>
+        </p:txBody>
+      </p:sp>
+      <p:sp>
+        <p:nvSpPr>
+          <p:cNvPr id="8" name="Content Placeholder 7">
+            <a:extLst>
+              <a:ext uri="{FF2B5EF4-FFF2-40B4-BE49-F238E27FC236}">
+                <a16:creationId xmlns:a16="http://schemas.microsoft.com/office/drawing/2014/main" id="{300A18EE-490E-A176-D2EC-4715A99445FA}"/>
+              </a:ext>
+            </a:extLst>
+          </p:cNvPr>
+          <p:cNvSpPr>
+            <a:spLocks noGrp="1"/>
+          </p:cNvSpPr>
+          <p:nvPr>
+            <p:ph idx="1"/>
+          </p:nvPr>
+        </p:nvSpPr>
+        <p:spPr/>
+        <p:txBody>
+          <a:bodyPr/>
+          <a:lstStyle/>
+          <a:p>
+            <a:r>
+              <a:rPr lang="en-US" dirty="0"/>
+              <a:t>We’ll use an autoencoder </a:t>
+            </a:r>
+          </a:p>
+          <a:p>
+            <a:pPr marL="0" indent="0">
+              <a:buNone/>
+            </a:pPr>
+            <a:r>
+              <a:rPr lang="en-US" dirty="0"/>
+              <a:t>     to search for structure in</a:t>
+            </a:r>
+          </a:p>
+          <a:p>
+            <a:pPr marL="0" indent="0">
+              <a:buNone/>
+            </a:pPr>
+            <a:r>
+              <a:rPr lang="en-US" dirty="0"/>
+              <a:t>     stellar color data from the </a:t>
+            </a:r>
+          </a:p>
+          <a:p>
+            <a:pPr marL="0" indent="0">
+              <a:buNone/>
+            </a:pPr>
+            <a:r>
+              <a:rPr lang="en-US" dirty="0">
+                <a:solidFill>
+                  <a:srgbClr val="0033CC"/>
+                </a:solidFill>
+              </a:rPr>
+              <a:t>     Sloan Digital Sky Survey</a:t>
+            </a:r>
+            <a:r>
+              <a:rPr lang="en-US" dirty="0"/>
+              <a:t> </a:t>
+            </a:r>
+            <a:br>
+              <a:rPr lang="en-US" dirty="0"/>
+            </a:br>
+            <a:r>
+              <a:rPr lang="en-US" dirty="0"/>
+              <a:t>    (SDSS)*.</a:t>
+            </a:r>
+          </a:p>
+          <a:p>
+            <a:pPr marL="0" indent="0">
+              <a:buNone/>
+            </a:pPr>
+            <a:endParaRPr lang="en-US" dirty="0"/>
+          </a:p>
+          <a:p>
+            <a:r>
+              <a:rPr lang="en-US" dirty="0"/>
+              <a:t>The data are fluxes </a:t>
+            </a:r>
+            <a:br>
+              <a:rPr lang="en-US" dirty="0"/>
+            </a:br>
+            <a:r>
+              <a:rPr lang="en-US" dirty="0"/>
+              <a:t>measured in five filters:  </a:t>
+            </a:r>
+          </a:p>
+          <a:p>
+            <a:pPr marL="0" indent="0">
+              <a:buNone/>
+            </a:pPr>
+            <a:endParaRPr lang="en-US" dirty="0"/>
+          </a:p>
+          <a:p>
+            <a:pPr marL="0" indent="0">
+              <a:buNone/>
+            </a:pPr>
+            <a:endParaRPr lang="en-US" dirty="0"/>
+          </a:p>
+          <a:p>
+            <a:pPr marL="0" indent="0">
+              <a:buNone/>
+            </a:pPr>
+            <a:r>
+              <a:rPr lang="en-US" dirty="0"/>
+              <a:t>*</a:t>
+            </a:r>
+            <a:r>
+              <a:rPr lang="en-US" dirty="0">
+                <a:hlinkClick r:id="rId2"/>
+              </a:rPr>
+              <a:t>https://www.sdss.org/</a:t>
+            </a:r>
+            <a:endParaRPr lang="en-US" dirty="0"/>
+          </a:p>
+          <a:p>
+            <a:pPr marL="0" indent="0">
+              <a:buNone/>
+            </a:pPr>
+            <a:endParaRPr lang="en-US" dirty="0"/>
+          </a:p>
+        </p:txBody>
+      </p:sp>
+      <p:pic>
+        <p:nvPicPr>
+          <p:cNvPr id="3" name="Picture 2" descr="A graph of different colored lines&#10;&#10;Description automatically generated">
+            <a:extLst>
+              <a:ext uri="{FF2B5EF4-FFF2-40B4-BE49-F238E27FC236}">
+                <a16:creationId xmlns:a16="http://schemas.microsoft.com/office/drawing/2014/main" id="{F6DA818B-5A8E-3E38-D4E2-3759431FA626}"/>
+              </a:ext>
+            </a:extLst>
+          </p:cNvPr>
+          <p:cNvPicPr>
+            <a:picLocks noChangeAspect="1"/>
+          </p:cNvPicPr>
+          <p:nvPr/>
+        </p:nvPicPr>
+        <p:blipFill>
+          <a:blip r:embed="rId3"/>
+          <a:stretch>
+            <a:fillRect/>
+          </a:stretch>
+        </p:blipFill>
+        <p:spPr>
+          <a:xfrm>
+            <a:off x="4959350" y="990600"/>
+            <a:ext cx="3886200" cy="2590800"/>
+          </a:xfrm>
+          <a:prstGeom prst="rect">
+            <a:avLst/>
+          </a:prstGeom>
+          <a:effectLst>
+            <a:outerShdw blurRad="50800" dist="38100" dir="2700000" algn="tl" rotWithShape="0">
+              <a:prstClr val="black">
+                <a:alpha val="40000"/>
+              </a:prstClr>
+            </a:outerShdw>
+          </a:effectLst>
+        </p:spPr>
+      </p:pic>
+      <p:pic>
+        <p:nvPicPr>
+          <p:cNvPr id="6" name="Picture 5" descr="A table with numbers and letters&#10;&#10;Description automatically generated">
+            <a:extLst>
+              <a:ext uri="{FF2B5EF4-FFF2-40B4-BE49-F238E27FC236}">
+                <a16:creationId xmlns:a16="http://schemas.microsoft.com/office/drawing/2014/main" id="{580D55D1-8F3F-B2B8-0089-43BB4F012C21}"/>
+              </a:ext>
+            </a:extLst>
+          </p:cNvPr>
+          <p:cNvPicPr>
+            <a:picLocks noChangeAspect="1"/>
+          </p:cNvPicPr>
+          <p:nvPr/>
+        </p:nvPicPr>
+        <p:blipFill>
+          <a:blip r:embed="rId4"/>
+          <a:stretch>
+            <a:fillRect/>
+          </a:stretch>
+        </p:blipFill>
+        <p:spPr>
+          <a:xfrm>
+            <a:off x="4203700" y="3536950"/>
+            <a:ext cx="3721100" cy="2806700"/>
+          </a:xfrm>
+          <a:prstGeom prst="rect">
+            <a:avLst/>
+          </a:prstGeom>
+          <a:effectLst>
+            <a:outerShdw blurRad="50800" dist="38100" dir="2700000" algn="tl" rotWithShape="0">
+              <a:prstClr val="black">
+                <a:alpha val="40000"/>
+              </a:prstClr>
+            </a:outerShdw>
+          </a:effectLst>
+        </p:spPr>
+      </p:pic>
+    </p:spTree>
+    <p:extLst>
+      <p:ext uri="{BB962C8B-B14F-4D97-AF65-F5344CB8AC3E}">
+        <p14:creationId xmlns:p14="http://schemas.microsoft.com/office/powerpoint/2010/main" val="2425916098"/>
       </p:ext>
     </p:extLst>
   </p:cSld>

--- a/Lectures/05.AE/Lecture_AE.pptx
+++ b/Lectures/05.AE/Lecture_AE.pptx
@@ -11071,7 +11071,7 @@
           <a:p>
             <a:r>
               <a:rPr lang="en-US" dirty="0"/>
-              <a:t>Despite claims to the contrary, in the literature, it seems exceedingly unlikely to me that we can truly interpret what we see are seeing here.</a:t>
+              <a:t>Despite claims to the contrary in the literature, it seems exceedingly unlikely to me that we can ever fully interpret what we are seeing in the latent.</a:t>
             </a:r>
           </a:p>
         </p:txBody>
@@ -13521,8 +13521,8 @@
           </a:p>
         </p:txBody>
       </p:sp>
-      <mc:AlternateContent xmlns:mc="http://schemas.openxmlformats.org/markup-compatibility/2006" xmlns:a14="http://schemas.microsoft.com/office/drawing/2010/main">
-        <mc:Choice Requires="a14">
+      <mc:AlternateContent xmlns:mc="http://schemas.openxmlformats.org/markup-compatibility/2006">
+        <mc:Choice xmlns:a14="http://schemas.microsoft.com/office/drawing/2010/main" Requires="a14">
           <p:sp>
             <p:nvSpPr>
               <p:cNvPr id="8" name="Content Placeholder 7">
@@ -13599,7 +13599,7 @@
                     <a:latin typeface="Times New Roman" panose="02020603050405020304" pitchFamily="18" charset="0"/>
                     <a:cs typeface="Times New Roman" panose="02020603050405020304" pitchFamily="18" charset="0"/>
                   </a:rPr>
-                  <a:t> is arbitrary in</a:t>
+                  <a:t> is arbitrary, in</a:t>
                 </a:r>
               </a:p>
               <a:p>
@@ -13741,7 +13741,7 @@
                 </a:pPr>
                 <a:r>
                   <a:rPr lang="en-US" dirty="0"/>
-                  <a:t>Then, if </a:t>
+                  <a:t>if </a:t>
                 </a:r>
                 <a14:m>
                   <m:oMath xmlns:m="http://schemas.openxmlformats.org/officeDocument/2006/math">
@@ -14123,7 +14123,7 @@
                 </a:pPr>
                 <a:r>
                   <a:rPr lang="en-US" dirty="0"/>
-                  <a:t>In principle, the model provides an </a:t>
+                  <a:t>In principle, the autoencoder provides an </a:t>
                 </a:r>
                 <a:r>
                   <a:rPr lang="en-US" i="1" dirty="0">
@@ -14141,7 +14141,7 @@
             </p:txBody>
           </p:sp>
         </mc:Choice>
-        <mc:Fallback xmlns="">
+        <mc:Fallback>
           <p:sp>
             <p:nvSpPr>
               <p:cNvPr id="8" name="Content Placeholder 7">
@@ -14162,7 +14162,7 @@
               <a:blipFill>
                 <a:blip r:embed="rId2"/>
                 <a:stretch>
-                  <a:fillRect l="-1305" t="-23421"/>
+                  <a:fillRect l="-1305" t="-23421" r="-2121"/>
                 </a:stretch>
               </a:blipFill>
             </p:spPr>
